--- a/benchmark/IASNLP_Presentation.pptx
+++ b/benchmark/IASNLP_Presentation.pptx
@@ -21,6 +21,7 @@
     <p:sldId id="269" r:id="rId20"/>
     <p:sldId id="270" r:id="rId21"/>
     <p:sldId id="271" r:id="rId22"/>
+    <p:sldId id="272" r:id="rId23"/>
   </p:sldIdLst>
   <p:sldSz cx="12188952" cy="6858000" type="screen4x3"/>
   <p:notesSz cx="6858000" cy="9144000"/>
@@ -5942,7 +5943,7 @@
         <p:spPr>
           <a:xfrm>
             <a:off x="365760" y="182880"/>
-            <a:ext cx="8229600" cy="502920"/>
+            <a:ext cx="11430000" cy="502920"/>
           </a:xfrm>
           <a:prstGeom prst="rect">
             <a:avLst/>
@@ -5955,13 +5956,13 @@
           <a:p>
             <a:pPr algn="l"/>
             <a:r>
-              <a:rPr sz="2800" b="1" i="0">
-                <a:solidFill>
-                  <a:srgbClr val="FFFFFF"/>
-                </a:solidFill>
-                <a:latin typeface="Calibri"/>
-              </a:rPr>
-              <a:t>Patient Cohort: Deep Dive</a:t>
+              <a:rPr sz="2600" b="1" i="0">
+                <a:solidFill>
+                  <a:srgbClr val="FFFFFF"/>
+                </a:solidFill>
+                <a:latin typeface="Calibri"/>
+              </a:rPr>
+              <a:t>Extended Benchmark Confirms the Gap Widens</a:t>
             </a:r>
           </a:p>
         </p:txBody>
@@ -5975,7 +5976,7 @@
         <p:spPr>
           <a:xfrm>
             <a:off x="365760" y="749808"/>
-            <a:ext cx="3657600" cy="36576"/>
+            <a:ext cx="6858000" cy="36576"/>
           </a:xfrm>
           <a:prstGeom prst="rect">
             <a:avLst/>
@@ -6018,7 +6019,7 @@
         <p:spPr>
           <a:xfrm>
             <a:off x="365760" y="1005840"/>
-            <a:ext cx="1645920" cy="566928"/>
+            <a:ext cx="2377440" cy="640080"/>
           </a:xfrm>
           <a:prstGeom prst="rect">
             <a:avLst/>
@@ -6060,27 +6061,27 @@
         </p:nvSpPr>
         <p:spPr>
           <a:xfrm>
-            <a:off x="411480" y="1133856"/>
-            <a:ext cx="1554480" cy="566928"/>
-          </a:xfrm>
-          <a:prstGeom prst="rect">
-            <a:avLst/>
-          </a:prstGeom>
-          <a:noFill/>
-        </p:spPr>
-        <p:txBody>
-          <a:bodyPr wrap="square"/>
-          <a:lstStyle/>
-          <a:p>
-            <a:pPr algn="l"/>
-            <a:r>
-              <a:rPr sz="1300" b="1" i="0">
-                <a:solidFill>
-                  <a:srgbClr val="FFFFFF"/>
-                </a:solidFill>
-                <a:latin typeface="Calibri"/>
-              </a:rPr>
-              <a:t>Role</a:t>
+            <a:off x="411480" y="1161288"/>
+            <a:ext cx="2286000" cy="640080"/>
+          </a:xfrm>
+          <a:prstGeom prst="rect">
+            <a:avLst/>
+          </a:prstGeom>
+          <a:noFill/>
+        </p:spPr>
+        <p:txBody>
+          <a:bodyPr wrap="square"/>
+          <a:lstStyle/>
+          <a:p>
+            <a:pPr algn="ctr"/>
+            <a:r>
+              <a:rPr sz="1400" b="1" i="0">
+                <a:solidFill>
+                  <a:srgbClr val="FFFFFF"/>
+                </a:solidFill>
+                <a:latin typeface="Calibri"/>
+              </a:rPr>
+              <a:t>Benchmark</a:t>
             </a:r>
           </a:p>
         </p:txBody>
@@ -6093,8 +6094,8 @@
         </p:nvSpPr>
         <p:spPr>
           <a:xfrm>
-            <a:off x="2011680" y="1005840"/>
-            <a:ext cx="1645920" cy="566928"/>
+            <a:off x="2743200" y="1005840"/>
+            <a:ext cx="1097280" cy="640080"/>
           </a:xfrm>
           <a:prstGeom prst="rect">
             <a:avLst/>
@@ -6136,27 +6137,27 @@
         </p:nvSpPr>
         <p:spPr>
           <a:xfrm>
-            <a:off x="2057400" y="1133856"/>
-            <a:ext cx="1554480" cy="566928"/>
-          </a:xfrm>
-          <a:prstGeom prst="rect">
-            <a:avLst/>
-          </a:prstGeom>
-          <a:noFill/>
-        </p:spPr>
-        <p:txBody>
-          <a:bodyPr wrap="square"/>
-          <a:lstStyle/>
-          <a:p>
-            <a:pPr algn="l"/>
-            <a:r>
-              <a:rPr sz="1300" b="1" i="0">
-                <a:solidFill>
-                  <a:srgbClr val="FFFFFF"/>
-                </a:solidFill>
-                <a:latin typeface="Calibri"/>
-              </a:rPr>
-              <a:t>Patient ID</a:t>
+            <a:off x="2788920" y="1161288"/>
+            <a:ext cx="1005840" cy="640080"/>
+          </a:xfrm>
+          <a:prstGeom prst="rect">
+            <a:avLst/>
+          </a:prstGeom>
+          <a:noFill/>
+        </p:spPr>
+        <p:txBody>
+          <a:bodyPr wrap="square"/>
+          <a:lstStyle/>
+          <a:p>
+            <a:pPr algn="ctr"/>
+            <a:r>
+              <a:rPr sz="1400" b="1" i="0">
+                <a:solidFill>
+                  <a:srgbClr val="FFFFFF"/>
+                </a:solidFill>
+                <a:latin typeface="Calibri"/>
+              </a:rPr>
+              <a:t>KG</a:t>
             </a:r>
           </a:p>
         </p:txBody>
@@ -6169,8 +6170,8 @@
         </p:nvSpPr>
         <p:spPr>
           <a:xfrm>
-            <a:off x="3657600" y="1005840"/>
-            <a:ext cx="914400" cy="566928"/>
+            <a:off x="3840480" y="1005840"/>
+            <a:ext cx="1097280" cy="640080"/>
           </a:xfrm>
           <a:prstGeom prst="rect">
             <a:avLst/>
@@ -6212,27 +6213,27 @@
         </p:nvSpPr>
         <p:spPr>
           <a:xfrm>
-            <a:off x="3703320" y="1133856"/>
-            <a:ext cx="822960" cy="566928"/>
-          </a:xfrm>
-          <a:prstGeom prst="rect">
-            <a:avLst/>
-          </a:prstGeom>
-          <a:noFill/>
-        </p:spPr>
-        <p:txBody>
-          <a:bodyPr wrap="square"/>
-          <a:lstStyle/>
-          <a:p>
-            <a:pPr algn="l"/>
-            <a:r>
-              <a:rPr sz="1300" b="1" i="0">
-                <a:solidFill>
-                  <a:srgbClr val="FFFFFF"/>
-                </a:solidFill>
-                <a:latin typeface="Calibri"/>
-              </a:rPr>
-              <a:t>Waves</a:t>
+            <a:off x="3886200" y="1161288"/>
+            <a:ext cx="1005840" cy="640080"/>
+          </a:xfrm>
+          <a:prstGeom prst="rect">
+            <a:avLst/>
+          </a:prstGeom>
+          <a:noFill/>
+        </p:spPr>
+        <p:txBody>
+          <a:bodyPr wrap="square"/>
+          <a:lstStyle/>
+          <a:p>
+            <a:pPr algn="ctr"/>
+            <a:r>
+              <a:rPr sz="1400" b="1" i="0">
+                <a:solidFill>
+                  <a:srgbClr val="FFFFFF"/>
+                </a:solidFill>
+                <a:latin typeface="Calibri"/>
+              </a:rPr>
+              <a:t>T2P</a:t>
             </a:r>
           </a:p>
         </p:txBody>
@@ -6245,8 +6246,758 @@
         </p:nvSpPr>
         <p:spPr>
           <a:xfrm>
-            <a:off x="4572000" y="1005840"/>
-            <a:ext cx="1371600" cy="566928"/>
+            <a:off x="365760" y="1645920"/>
+            <a:ext cx="2377440" cy="640080"/>
+          </a:xfrm>
+          <a:prstGeom prst="rect">
+            <a:avLst/>
+          </a:prstGeom>
+          <a:solidFill>
+            <a:srgbClr val="0D142A"/>
+          </a:solidFill>
+          <a:ln>
+            <a:noFill/>
+          </a:ln>
+        </p:spPr>
+        <p:style>
+          <a:lnRef idx="1">
+            <a:schemeClr val="accent1"/>
+          </a:lnRef>
+          <a:fillRef idx="3">
+            <a:schemeClr val="accent1"/>
+          </a:fillRef>
+          <a:effectRef idx="2">
+            <a:schemeClr val="accent1"/>
+          </a:effectRef>
+          <a:fontRef idx="minor">
+            <a:schemeClr val="lt1"/>
+          </a:fontRef>
+        </p:style>
+        <p:txBody>
+          <a:bodyPr rtlCol="0" anchor="ctr"/>
+          <a:lstStyle/>
+          <a:p>
+            <a:pPr algn="ctr"/>
+          </a:p>
+        </p:txBody>
+      </p:sp>
+      <p:sp>
+        <p:nvSpPr>
+          <p:cNvPr id="13" name="TextBox 12"/>
+          <p:cNvSpPr txBox="1"/>
+          <p:nvPr/>
+        </p:nvSpPr>
+        <p:spPr>
+          <a:xfrm>
+            <a:off x="457200" y="1810512"/>
+            <a:ext cx="2286000" cy="640080"/>
+          </a:xfrm>
+          <a:prstGeom prst="rect">
+            <a:avLst/>
+          </a:prstGeom>
+          <a:noFill/>
+        </p:spPr>
+        <p:txBody>
+          <a:bodyPr wrap="square"/>
+          <a:lstStyle/>
+          <a:p>
+            <a:pPr algn="l"/>
+            <a:r>
+              <a:rPr sz="1400" b="0" i="0">
+                <a:solidFill>
+                  <a:srgbClr val="FFFFFF"/>
+                </a:solidFill>
+                <a:latin typeface="Calibri"/>
+              </a:rPr>
+              <a:t>Standard 100Q</a:t>
+            </a:r>
+          </a:p>
+        </p:txBody>
+      </p:sp>
+      <p:sp>
+        <p:nvSpPr>
+          <p:cNvPr id="14" name="Rectangle 13"/>
+          <p:cNvSpPr/>
+          <p:nvPr/>
+        </p:nvSpPr>
+        <p:spPr>
+          <a:xfrm>
+            <a:off x="2743200" y="1645920"/>
+            <a:ext cx="1097280" cy="640080"/>
+          </a:xfrm>
+          <a:prstGeom prst="rect">
+            <a:avLst/>
+          </a:prstGeom>
+          <a:solidFill>
+            <a:srgbClr val="0D4080"/>
+          </a:solidFill>
+          <a:ln>
+            <a:noFill/>
+          </a:ln>
+        </p:spPr>
+        <p:style>
+          <a:lnRef idx="1">
+            <a:schemeClr val="accent1"/>
+          </a:lnRef>
+          <a:fillRef idx="3">
+            <a:schemeClr val="accent1"/>
+          </a:fillRef>
+          <a:effectRef idx="2">
+            <a:schemeClr val="accent1"/>
+          </a:effectRef>
+          <a:fontRef idx="minor">
+            <a:schemeClr val="lt1"/>
+          </a:fontRef>
+        </p:style>
+        <p:txBody>
+          <a:bodyPr rtlCol="0" anchor="ctr"/>
+          <a:lstStyle/>
+          <a:p>
+            <a:pPr algn="ctr"/>
+          </a:p>
+        </p:txBody>
+      </p:sp>
+      <p:sp>
+        <p:nvSpPr>
+          <p:cNvPr id="15" name="TextBox 14"/>
+          <p:cNvSpPr txBox="1"/>
+          <p:nvPr/>
+        </p:nvSpPr>
+        <p:spPr>
+          <a:xfrm>
+            <a:off x="2743200" y="1810512"/>
+            <a:ext cx="1097280" cy="640080"/>
+          </a:xfrm>
+          <a:prstGeom prst="rect">
+            <a:avLst/>
+          </a:prstGeom>
+          <a:noFill/>
+        </p:spPr>
+        <p:txBody>
+          <a:bodyPr wrap="square"/>
+          <a:lstStyle/>
+          <a:p>
+            <a:pPr algn="ctr"/>
+            <a:r>
+              <a:rPr sz="1600" b="1" i="0">
+                <a:solidFill>
+                  <a:srgbClr val="FFFFFF"/>
+                </a:solidFill>
+                <a:latin typeface="Calibri"/>
+              </a:rPr>
+              <a:t>42%</a:t>
+            </a:r>
+          </a:p>
+        </p:txBody>
+      </p:sp>
+      <p:sp>
+        <p:nvSpPr>
+          <p:cNvPr id="16" name="Rectangle 15"/>
+          <p:cNvSpPr/>
+          <p:nvPr/>
+        </p:nvSpPr>
+        <p:spPr>
+          <a:xfrm>
+            <a:off x="3840480" y="1645920"/>
+            <a:ext cx="1097280" cy="640080"/>
+          </a:xfrm>
+          <a:prstGeom prst="rect">
+            <a:avLst/>
+          </a:prstGeom>
+          <a:solidFill>
+            <a:srgbClr val="1B5E20"/>
+          </a:solidFill>
+          <a:ln>
+            <a:noFill/>
+          </a:ln>
+        </p:spPr>
+        <p:style>
+          <a:lnRef idx="1">
+            <a:schemeClr val="accent1"/>
+          </a:lnRef>
+          <a:fillRef idx="3">
+            <a:schemeClr val="accent1"/>
+          </a:fillRef>
+          <a:effectRef idx="2">
+            <a:schemeClr val="accent1"/>
+          </a:effectRef>
+          <a:fontRef idx="minor">
+            <a:schemeClr val="lt1"/>
+          </a:fontRef>
+        </p:style>
+        <p:txBody>
+          <a:bodyPr rtlCol="0" anchor="ctr"/>
+          <a:lstStyle/>
+          <a:p>
+            <a:pPr algn="ctr"/>
+          </a:p>
+        </p:txBody>
+      </p:sp>
+      <p:sp>
+        <p:nvSpPr>
+          <p:cNvPr id="17" name="TextBox 16"/>
+          <p:cNvSpPr txBox="1"/>
+          <p:nvPr/>
+        </p:nvSpPr>
+        <p:spPr>
+          <a:xfrm>
+            <a:off x="3840480" y="1810512"/>
+            <a:ext cx="1097280" cy="640080"/>
+          </a:xfrm>
+          <a:prstGeom prst="rect">
+            <a:avLst/>
+          </a:prstGeom>
+          <a:noFill/>
+        </p:spPr>
+        <p:txBody>
+          <a:bodyPr wrap="square"/>
+          <a:lstStyle/>
+          <a:p>
+            <a:pPr algn="ctr"/>
+            <a:r>
+              <a:rPr sz="1600" b="1" i="0">
+                <a:solidFill>
+                  <a:srgbClr val="FFFFFF"/>
+                </a:solidFill>
+                <a:latin typeface="Calibri"/>
+              </a:rPr>
+              <a:t>100%</a:t>
+            </a:r>
+          </a:p>
+        </p:txBody>
+      </p:sp>
+      <p:sp>
+        <p:nvSpPr>
+          <p:cNvPr id="18" name="Rectangle 17"/>
+          <p:cNvSpPr/>
+          <p:nvPr/>
+        </p:nvSpPr>
+        <p:spPr>
+          <a:xfrm>
+            <a:off x="365760" y="2286000"/>
+            <a:ext cx="2377440" cy="640080"/>
+          </a:xfrm>
+          <a:prstGeom prst="rect">
+            <a:avLst/>
+          </a:prstGeom>
+          <a:solidFill>
+            <a:srgbClr val="1E2E50"/>
+          </a:solidFill>
+          <a:ln>
+            <a:noFill/>
+          </a:ln>
+        </p:spPr>
+        <p:style>
+          <a:lnRef idx="1">
+            <a:schemeClr val="accent1"/>
+          </a:lnRef>
+          <a:fillRef idx="3">
+            <a:schemeClr val="accent1"/>
+          </a:fillRef>
+          <a:effectRef idx="2">
+            <a:schemeClr val="accent1"/>
+          </a:effectRef>
+          <a:fontRef idx="minor">
+            <a:schemeClr val="lt1"/>
+          </a:fontRef>
+        </p:style>
+        <p:txBody>
+          <a:bodyPr rtlCol="0" anchor="ctr"/>
+          <a:lstStyle/>
+          <a:p>
+            <a:pPr algn="ctr"/>
+          </a:p>
+        </p:txBody>
+      </p:sp>
+      <p:sp>
+        <p:nvSpPr>
+          <p:cNvPr id="19" name="TextBox 18"/>
+          <p:cNvSpPr txBox="1"/>
+          <p:nvPr/>
+        </p:nvSpPr>
+        <p:spPr>
+          <a:xfrm>
+            <a:off x="457200" y="2450592"/>
+            <a:ext cx="2286000" cy="640080"/>
+          </a:xfrm>
+          <a:prstGeom prst="rect">
+            <a:avLst/>
+          </a:prstGeom>
+          <a:noFill/>
+        </p:spPr>
+        <p:txBody>
+          <a:bodyPr wrap="square"/>
+          <a:lstStyle/>
+          <a:p>
+            <a:pPr algn="l"/>
+            <a:r>
+              <a:rPr sz="1400" b="1" i="0">
+                <a:solidFill>
+                  <a:srgbClr val="FFFFFF"/>
+                </a:solidFill>
+                <a:latin typeface="Calibri"/>
+              </a:rPr>
+              <a:t>Extended 25Q</a:t>
+            </a:r>
+          </a:p>
+        </p:txBody>
+      </p:sp>
+      <p:sp>
+        <p:nvSpPr>
+          <p:cNvPr id="20" name="Rectangle 19"/>
+          <p:cNvSpPr/>
+          <p:nvPr/>
+        </p:nvSpPr>
+        <p:spPr>
+          <a:xfrm>
+            <a:off x="2743200" y="2286000"/>
+            <a:ext cx="1097280" cy="640080"/>
+          </a:xfrm>
+          <a:prstGeom prst="rect">
+            <a:avLst/>
+          </a:prstGeom>
+          <a:solidFill>
+            <a:srgbClr val="6D1818"/>
+          </a:solidFill>
+          <a:ln>
+            <a:noFill/>
+          </a:ln>
+        </p:spPr>
+        <p:style>
+          <a:lnRef idx="1">
+            <a:schemeClr val="accent1"/>
+          </a:lnRef>
+          <a:fillRef idx="3">
+            <a:schemeClr val="accent1"/>
+          </a:fillRef>
+          <a:effectRef idx="2">
+            <a:schemeClr val="accent1"/>
+          </a:effectRef>
+          <a:fontRef idx="minor">
+            <a:schemeClr val="lt1"/>
+          </a:fontRef>
+        </p:style>
+        <p:txBody>
+          <a:bodyPr rtlCol="0" anchor="ctr"/>
+          <a:lstStyle/>
+          <a:p>
+            <a:pPr algn="ctr"/>
+          </a:p>
+        </p:txBody>
+      </p:sp>
+      <p:sp>
+        <p:nvSpPr>
+          <p:cNvPr id="21" name="TextBox 20"/>
+          <p:cNvSpPr txBox="1"/>
+          <p:nvPr/>
+        </p:nvSpPr>
+        <p:spPr>
+          <a:xfrm>
+            <a:off x="2743200" y="2450592"/>
+            <a:ext cx="1097280" cy="640080"/>
+          </a:xfrm>
+          <a:prstGeom prst="rect">
+            <a:avLst/>
+          </a:prstGeom>
+          <a:noFill/>
+        </p:spPr>
+        <p:txBody>
+          <a:bodyPr wrap="square"/>
+          <a:lstStyle/>
+          <a:p>
+            <a:pPr algn="ctr"/>
+            <a:r>
+              <a:rPr sz="1600" b="1" i="0">
+                <a:solidFill>
+                  <a:srgbClr val="FFFFFF"/>
+                </a:solidFill>
+                <a:latin typeface="Calibri"/>
+              </a:rPr>
+              <a:t>12%</a:t>
+            </a:r>
+          </a:p>
+        </p:txBody>
+      </p:sp>
+      <p:sp>
+        <p:nvSpPr>
+          <p:cNvPr id="22" name="Rectangle 21"/>
+          <p:cNvSpPr/>
+          <p:nvPr/>
+        </p:nvSpPr>
+        <p:spPr>
+          <a:xfrm>
+            <a:off x="3840480" y="2286000"/>
+            <a:ext cx="1097280" cy="640080"/>
+          </a:xfrm>
+          <a:prstGeom prst="rect">
+            <a:avLst/>
+          </a:prstGeom>
+          <a:solidFill>
+            <a:srgbClr val="1B5E20"/>
+          </a:solidFill>
+          <a:ln>
+            <a:noFill/>
+          </a:ln>
+        </p:spPr>
+        <p:style>
+          <a:lnRef idx="1">
+            <a:schemeClr val="accent1"/>
+          </a:lnRef>
+          <a:fillRef idx="3">
+            <a:schemeClr val="accent1"/>
+          </a:fillRef>
+          <a:effectRef idx="2">
+            <a:schemeClr val="accent1"/>
+          </a:effectRef>
+          <a:fontRef idx="minor">
+            <a:schemeClr val="lt1"/>
+          </a:fontRef>
+        </p:style>
+        <p:txBody>
+          <a:bodyPr rtlCol="0" anchor="ctr"/>
+          <a:lstStyle/>
+          <a:p>
+            <a:pPr algn="ctr"/>
+          </a:p>
+        </p:txBody>
+      </p:sp>
+      <p:sp>
+        <p:nvSpPr>
+          <p:cNvPr id="23" name="TextBox 22"/>
+          <p:cNvSpPr txBox="1"/>
+          <p:nvPr/>
+        </p:nvSpPr>
+        <p:spPr>
+          <a:xfrm>
+            <a:off x="3840480" y="2450592"/>
+            <a:ext cx="1097280" cy="640080"/>
+          </a:xfrm>
+          <a:prstGeom prst="rect">
+            <a:avLst/>
+          </a:prstGeom>
+          <a:noFill/>
+        </p:spPr>
+        <p:txBody>
+          <a:bodyPr wrap="square"/>
+          <a:lstStyle/>
+          <a:p>
+            <a:pPr algn="ctr"/>
+            <a:r>
+              <a:rPr sz="1600" b="1" i="0">
+                <a:solidFill>
+                  <a:srgbClr val="FFFFFF"/>
+                </a:solidFill>
+                <a:latin typeface="Calibri"/>
+              </a:rPr>
+              <a:t>100%</a:t>
+            </a:r>
+          </a:p>
+        </p:txBody>
+      </p:sp>
+      <p:sp>
+        <p:nvSpPr>
+          <p:cNvPr id="24" name="Rectangle 23"/>
+          <p:cNvSpPr/>
+          <p:nvPr/>
+        </p:nvSpPr>
+        <p:spPr>
+          <a:xfrm>
+            <a:off x="365760" y="2926080"/>
+            <a:ext cx="2377440" cy="640080"/>
+          </a:xfrm>
+          <a:prstGeom prst="rect">
+            <a:avLst/>
+          </a:prstGeom>
+          <a:solidFill>
+            <a:srgbClr val="0D142A"/>
+          </a:solidFill>
+          <a:ln>
+            <a:noFill/>
+          </a:ln>
+        </p:spPr>
+        <p:style>
+          <a:lnRef idx="1">
+            <a:schemeClr val="accent1"/>
+          </a:lnRef>
+          <a:fillRef idx="3">
+            <a:schemeClr val="accent1"/>
+          </a:fillRef>
+          <a:effectRef idx="2">
+            <a:schemeClr val="accent1"/>
+          </a:effectRef>
+          <a:fontRef idx="minor">
+            <a:schemeClr val="lt1"/>
+          </a:fontRef>
+        </p:style>
+        <p:txBody>
+          <a:bodyPr rtlCol="0" anchor="ctr"/>
+          <a:lstStyle/>
+          <a:p>
+            <a:pPr algn="ctr"/>
+          </a:p>
+        </p:txBody>
+      </p:sp>
+      <p:sp>
+        <p:nvSpPr>
+          <p:cNvPr id="25" name="TextBox 24"/>
+          <p:cNvSpPr txBox="1"/>
+          <p:nvPr/>
+        </p:nvSpPr>
+        <p:spPr>
+          <a:xfrm>
+            <a:off x="457200" y="3090672"/>
+            <a:ext cx="2286000" cy="640080"/>
+          </a:xfrm>
+          <a:prstGeom prst="rect">
+            <a:avLst/>
+          </a:prstGeom>
+          <a:noFill/>
+        </p:spPr>
+        <p:txBody>
+          <a:bodyPr wrap="square"/>
+          <a:lstStyle/>
+          <a:p>
+            <a:pPr algn="l"/>
+            <a:r>
+              <a:rPr sz="1400" b="0" i="0">
+                <a:solidFill>
+                  <a:srgbClr val="FFFFFF"/>
+                </a:solidFill>
+                <a:latin typeface="Calibri"/>
+              </a:rPr>
+              <a:t>Combined</a:t>
+            </a:r>
+          </a:p>
+        </p:txBody>
+      </p:sp>
+      <p:sp>
+        <p:nvSpPr>
+          <p:cNvPr id="26" name="Rectangle 25"/>
+          <p:cNvSpPr/>
+          <p:nvPr/>
+        </p:nvSpPr>
+        <p:spPr>
+          <a:xfrm>
+            <a:off x="2743200" y="2926080"/>
+            <a:ext cx="1097280" cy="640080"/>
+          </a:xfrm>
+          <a:prstGeom prst="rect">
+            <a:avLst/>
+          </a:prstGeom>
+          <a:solidFill>
+            <a:srgbClr val="1A386D"/>
+          </a:solidFill>
+          <a:ln>
+            <a:noFill/>
+          </a:ln>
+        </p:spPr>
+        <p:style>
+          <a:lnRef idx="1">
+            <a:schemeClr val="accent1"/>
+          </a:lnRef>
+          <a:fillRef idx="3">
+            <a:schemeClr val="accent1"/>
+          </a:fillRef>
+          <a:effectRef idx="2">
+            <a:schemeClr val="accent1"/>
+          </a:effectRef>
+          <a:fontRef idx="minor">
+            <a:schemeClr val="lt1"/>
+          </a:fontRef>
+        </p:style>
+        <p:txBody>
+          <a:bodyPr rtlCol="0" anchor="ctr"/>
+          <a:lstStyle/>
+          <a:p>
+            <a:pPr algn="ctr"/>
+          </a:p>
+        </p:txBody>
+      </p:sp>
+      <p:sp>
+        <p:nvSpPr>
+          <p:cNvPr id="27" name="TextBox 26"/>
+          <p:cNvSpPr txBox="1"/>
+          <p:nvPr/>
+        </p:nvSpPr>
+        <p:spPr>
+          <a:xfrm>
+            <a:off x="2743200" y="3090672"/>
+            <a:ext cx="1097280" cy="640080"/>
+          </a:xfrm>
+          <a:prstGeom prst="rect">
+            <a:avLst/>
+          </a:prstGeom>
+          <a:noFill/>
+        </p:spPr>
+        <p:txBody>
+          <a:bodyPr wrap="square"/>
+          <a:lstStyle/>
+          <a:p>
+            <a:pPr algn="ctr"/>
+            <a:r>
+              <a:rPr sz="1600" b="1" i="0">
+                <a:solidFill>
+                  <a:srgbClr val="FFFFFF"/>
+                </a:solidFill>
+                <a:latin typeface="Calibri"/>
+              </a:rPr>
+              <a:t>36%</a:t>
+            </a:r>
+          </a:p>
+        </p:txBody>
+      </p:sp>
+      <p:sp>
+        <p:nvSpPr>
+          <p:cNvPr id="28" name="Rectangle 27"/>
+          <p:cNvSpPr/>
+          <p:nvPr/>
+        </p:nvSpPr>
+        <p:spPr>
+          <a:xfrm>
+            <a:off x="3840480" y="2926080"/>
+            <a:ext cx="1097280" cy="640080"/>
+          </a:xfrm>
+          <a:prstGeom prst="rect">
+            <a:avLst/>
+          </a:prstGeom>
+          <a:solidFill>
+            <a:srgbClr val="1B5E20"/>
+          </a:solidFill>
+          <a:ln>
+            <a:noFill/>
+          </a:ln>
+        </p:spPr>
+        <p:style>
+          <a:lnRef idx="1">
+            <a:schemeClr val="accent1"/>
+          </a:lnRef>
+          <a:fillRef idx="3">
+            <a:schemeClr val="accent1"/>
+          </a:fillRef>
+          <a:effectRef idx="2">
+            <a:schemeClr val="accent1"/>
+          </a:effectRef>
+          <a:fontRef idx="minor">
+            <a:schemeClr val="lt1"/>
+          </a:fontRef>
+        </p:style>
+        <p:txBody>
+          <a:bodyPr rtlCol="0" anchor="ctr"/>
+          <a:lstStyle/>
+          <a:p>
+            <a:pPr algn="ctr"/>
+          </a:p>
+        </p:txBody>
+      </p:sp>
+      <p:sp>
+        <p:nvSpPr>
+          <p:cNvPr id="29" name="TextBox 28"/>
+          <p:cNvSpPr txBox="1"/>
+          <p:nvPr/>
+        </p:nvSpPr>
+        <p:spPr>
+          <a:xfrm>
+            <a:off x="3840480" y="3090672"/>
+            <a:ext cx="1097280" cy="640080"/>
+          </a:xfrm>
+          <a:prstGeom prst="rect">
+            <a:avLst/>
+          </a:prstGeom>
+          <a:noFill/>
+        </p:spPr>
+        <p:txBody>
+          <a:bodyPr wrap="square"/>
+          <a:lstStyle/>
+          <a:p>
+            <a:pPr algn="ctr"/>
+            <a:r>
+              <a:rPr sz="1600" b="1" i="0">
+                <a:solidFill>
+                  <a:srgbClr val="FFFFFF"/>
+                </a:solidFill>
+                <a:latin typeface="Calibri"/>
+              </a:rPr>
+              <a:t>100%</a:t>
+            </a:r>
+          </a:p>
+        </p:txBody>
+      </p:sp>
+      <p:sp>
+        <p:nvSpPr>
+          <p:cNvPr id="30" name="TextBox 29"/>
+          <p:cNvSpPr txBox="1"/>
+          <p:nvPr/>
+        </p:nvSpPr>
+        <p:spPr>
+          <a:xfrm>
+            <a:off x="365760" y="3822192"/>
+            <a:ext cx="4572000" cy="347472"/>
+          </a:xfrm>
+          <a:prstGeom prst="rect">
+            <a:avLst/>
+          </a:prstGeom>
+          <a:noFill/>
+        </p:spPr>
+        <p:txBody>
+          <a:bodyPr wrap="square"/>
+          <a:lstStyle/>
+          <a:p>
+            <a:pPr algn="l"/>
+            <a:r>
+              <a:rPr sz="1200" b="1" i="0">
+                <a:solidFill>
+                  <a:srgbClr val="2196F3"/>
+                </a:solidFill>
+                <a:latin typeface="Calibri"/>
+              </a:rPr>
+              <a:t>Gap to oracle (Text-to-Pandas = 100%)</a:t>
+            </a:r>
+          </a:p>
+        </p:txBody>
+      </p:sp>
+      <p:sp>
+        <p:nvSpPr>
+          <p:cNvPr id="31" name="TextBox 30"/>
+          <p:cNvSpPr txBox="1"/>
+          <p:nvPr/>
+        </p:nvSpPr>
+        <p:spPr>
+          <a:xfrm>
+            <a:off x="365760" y="4224528"/>
+            <a:ext cx="1463040" cy="329184"/>
+          </a:xfrm>
+          <a:prstGeom prst="rect">
+            <a:avLst/>
+          </a:prstGeom>
+          <a:noFill/>
+        </p:spPr>
+        <p:txBody>
+          <a:bodyPr wrap="square"/>
+          <a:lstStyle/>
+          <a:p>
+            <a:pPr algn="l"/>
+            <a:r>
+              <a:rPr sz="1100" b="0" i="0">
+                <a:solidFill>
+                  <a:srgbClr val="E3F2FD"/>
+                </a:solidFill>
+                <a:latin typeface="Calibri"/>
+              </a:rPr>
+              <a:t>Standard 100Q</a:t>
+            </a:r>
+          </a:p>
+        </p:txBody>
+      </p:sp>
+      <p:sp>
+        <p:nvSpPr>
+          <p:cNvPr id="32" name="Rectangle 31"/>
+          <p:cNvSpPr/>
+          <p:nvPr/>
+        </p:nvSpPr>
+        <p:spPr>
+          <a:xfrm>
+            <a:off x="1920240" y="4270248"/>
+            <a:ext cx="2333548" cy="237744"/>
           </a:xfrm>
           <a:prstGeom prst="rect">
             <a:avLst/>
@@ -6282,14 +7033,14 @@
       </p:sp>
       <p:sp>
         <p:nvSpPr>
-          <p:cNvPr id="13" name="TextBox 12"/>
-          <p:cNvSpPr txBox="1"/>
-          <p:nvPr/>
-        </p:nvSpPr>
-        <p:spPr>
-          <a:xfrm>
-            <a:off x="4617720" y="1133856"/>
-            <a:ext cx="1280160" cy="566928"/>
+          <p:cNvPr id="33" name="TextBox 32"/>
+          <p:cNvSpPr txBox="1"/>
+          <p:nvPr/>
+        </p:nvSpPr>
+        <p:spPr>
+          <a:xfrm>
+            <a:off x="4345228" y="4224528"/>
+            <a:ext cx="822960" cy="329184"/>
           </a:xfrm>
           <a:prstGeom prst="rect">
             <a:avLst/>
@@ -6302,27 +7053,212 @@
           <a:p>
             <a:pPr algn="l"/>
             <a:r>
-              <a:rPr sz="1300" b="1" i="0">
-                <a:solidFill>
-                  <a:srgbClr val="FFFFFF"/>
-                </a:solidFill>
-                <a:latin typeface="Calibri"/>
-              </a:rPr>
-              <a:t>Conditions</a:t>
-            </a:r>
-          </a:p>
-        </p:txBody>
-      </p:sp>
-      <p:sp>
-        <p:nvSpPr>
-          <p:cNvPr id="14" name="Rectangle 13"/>
+              <a:rPr sz="1200" b="1" i="0">
+                <a:solidFill>
+                  <a:srgbClr val="FFFFFF"/>
+                </a:solidFill>
+                <a:latin typeface="Calibri"/>
+              </a:rPr>
+              <a:t>58 pts</a:t>
+            </a:r>
+          </a:p>
+        </p:txBody>
+      </p:sp>
+      <p:sp>
+        <p:nvSpPr>
+          <p:cNvPr id="34" name="TextBox 33"/>
+          <p:cNvSpPr txBox="1"/>
+          <p:nvPr/>
+        </p:nvSpPr>
+        <p:spPr>
+          <a:xfrm>
+            <a:off x="365760" y="4681728"/>
+            <a:ext cx="1463040" cy="329184"/>
+          </a:xfrm>
+          <a:prstGeom prst="rect">
+            <a:avLst/>
+          </a:prstGeom>
+          <a:noFill/>
+        </p:spPr>
+        <p:txBody>
+          <a:bodyPr wrap="square"/>
+          <a:lstStyle/>
+          <a:p>
+            <a:pPr algn="l"/>
+            <a:r>
+              <a:rPr sz="1100" b="0" i="0">
+                <a:solidFill>
+                  <a:srgbClr val="E3F2FD"/>
+                </a:solidFill>
+                <a:latin typeface="Calibri"/>
+              </a:rPr>
+              <a:t>Extended 25Q</a:t>
+            </a:r>
+          </a:p>
+        </p:txBody>
+      </p:sp>
+      <p:sp>
+        <p:nvSpPr>
+          <p:cNvPr id="35" name="Rectangle 34"/>
           <p:cNvSpPr/>
           <p:nvPr/>
         </p:nvSpPr>
         <p:spPr>
           <a:xfrm>
-            <a:off x="5943600" y="1005840"/>
-            <a:ext cx="6035040" cy="566928"/>
+            <a:off x="1920240" y="4727448"/>
+            <a:ext cx="3540556" cy="237744"/>
+          </a:xfrm>
+          <a:prstGeom prst="rect">
+            <a:avLst/>
+          </a:prstGeom>
+          <a:solidFill>
+            <a:srgbClr val="F44336"/>
+          </a:solidFill>
+          <a:ln>
+            <a:noFill/>
+          </a:ln>
+        </p:spPr>
+        <p:style>
+          <a:lnRef idx="1">
+            <a:schemeClr val="accent1"/>
+          </a:lnRef>
+          <a:fillRef idx="3">
+            <a:schemeClr val="accent1"/>
+          </a:fillRef>
+          <a:effectRef idx="2">
+            <a:schemeClr val="accent1"/>
+          </a:effectRef>
+          <a:fontRef idx="minor">
+            <a:schemeClr val="lt1"/>
+          </a:fontRef>
+        </p:style>
+        <p:txBody>
+          <a:bodyPr rtlCol="0" anchor="ctr"/>
+          <a:lstStyle/>
+          <a:p>
+            <a:pPr algn="ctr"/>
+          </a:p>
+        </p:txBody>
+      </p:sp>
+      <p:sp>
+        <p:nvSpPr>
+          <p:cNvPr id="36" name="TextBox 35"/>
+          <p:cNvSpPr txBox="1"/>
+          <p:nvPr/>
+        </p:nvSpPr>
+        <p:spPr>
+          <a:xfrm>
+            <a:off x="5552236" y="4681728"/>
+            <a:ext cx="822960" cy="329184"/>
+          </a:xfrm>
+          <a:prstGeom prst="rect">
+            <a:avLst/>
+          </a:prstGeom>
+          <a:noFill/>
+        </p:spPr>
+        <p:txBody>
+          <a:bodyPr wrap="square"/>
+          <a:lstStyle/>
+          <a:p>
+            <a:pPr algn="l"/>
+            <a:r>
+              <a:rPr sz="1200" b="1" i="0">
+                <a:solidFill>
+                  <a:srgbClr val="FFFFFF"/>
+                </a:solidFill>
+                <a:latin typeface="Calibri"/>
+              </a:rPr>
+              <a:t>88 pts</a:t>
+            </a:r>
+          </a:p>
+        </p:txBody>
+      </p:sp>
+      <p:sp>
+        <p:nvSpPr>
+          <p:cNvPr id="37" name="Rectangle 36"/>
+          <p:cNvSpPr/>
+          <p:nvPr/>
+        </p:nvSpPr>
+        <p:spPr>
+          <a:xfrm>
+            <a:off x="5303520" y="960120"/>
+            <a:ext cx="6537960" cy="4800600"/>
+          </a:xfrm>
+          <a:prstGeom prst="rect">
+            <a:avLst/>
+          </a:prstGeom>
+          <a:solidFill>
+            <a:srgbClr val="1E335E"/>
+          </a:solidFill>
+          <a:ln>
+            <a:noFill/>
+          </a:ln>
+        </p:spPr>
+        <p:style>
+          <a:lnRef idx="1">
+            <a:schemeClr val="accent1"/>
+          </a:lnRef>
+          <a:fillRef idx="3">
+            <a:schemeClr val="accent1"/>
+          </a:fillRef>
+          <a:effectRef idx="2">
+            <a:schemeClr val="accent1"/>
+          </a:effectRef>
+          <a:fontRef idx="minor">
+            <a:schemeClr val="lt1"/>
+          </a:fontRef>
+        </p:style>
+        <p:txBody>
+          <a:bodyPr rtlCol="0" anchor="ctr"/>
+          <a:lstStyle/>
+          <a:p>
+            <a:pPr algn="ctr"/>
+          </a:p>
+        </p:txBody>
+      </p:sp>
+      <p:sp>
+        <p:nvSpPr>
+          <p:cNvPr id="38" name="TextBox 37"/>
+          <p:cNvSpPr txBox="1"/>
+          <p:nvPr/>
+        </p:nvSpPr>
+        <p:spPr>
+          <a:xfrm>
+            <a:off x="5440680" y="1024128"/>
+            <a:ext cx="6309360" cy="438912"/>
+          </a:xfrm>
+          <a:prstGeom prst="rect">
+            <a:avLst/>
+          </a:prstGeom>
+          <a:noFill/>
+        </p:spPr>
+        <p:txBody>
+          <a:bodyPr wrap="square"/>
+          <a:lstStyle/>
+          <a:p>
+            <a:pPr algn="l"/>
+            <a:r>
+              <a:rPr sz="1800" b="1" i="0">
+                <a:solidFill>
+                  <a:srgbClr val="2196F3"/>
+                </a:solidFill>
+                <a:latin typeface="Calibri"/>
+              </a:rPr>
+              <a:t>Key Insight</a:t>
+            </a:r>
+          </a:p>
+        </p:txBody>
+      </p:sp>
+      <p:sp>
+        <p:nvSpPr>
+          <p:cNvPr id="39" name="Rectangle 38"/>
+          <p:cNvSpPr/>
+          <p:nvPr/>
+        </p:nvSpPr>
+        <p:spPr>
+          <a:xfrm>
+            <a:off x="5440680" y="1481328"/>
+            <a:ext cx="6309360" cy="27432"/>
           </a:xfrm>
           <a:prstGeom prst="rect">
             <a:avLst/>
@@ -6358,53 +7294,108 @@
       </p:sp>
       <p:sp>
         <p:nvSpPr>
-          <p:cNvPr id="15" name="TextBox 14"/>
-          <p:cNvSpPr txBox="1"/>
-          <p:nvPr/>
-        </p:nvSpPr>
-        <p:spPr>
-          <a:xfrm>
-            <a:off x="5989320" y="1133856"/>
-            <a:ext cx="5943600" cy="566928"/>
-          </a:xfrm>
-          <a:prstGeom prst="rect">
-            <a:avLst/>
-          </a:prstGeom>
-          <a:noFill/>
-        </p:spPr>
-        <p:txBody>
-          <a:bodyPr wrap="square"/>
-          <a:lstStyle/>
-          <a:p>
-            <a:pPr algn="l"/>
-            <a:r>
-              <a:rPr sz="1300" b="1" i="0">
-                <a:solidFill>
-                  <a:srgbClr val="FFFFFF"/>
-                </a:solidFill>
-                <a:latin typeface="Calibri"/>
-              </a:rPr>
-              <a:t>Key Feature</a:t>
-            </a:r>
-          </a:p>
-        </p:txBody>
-      </p:sp>
-      <p:sp>
-        <p:nvSpPr>
-          <p:cNvPr id="16" name="Rectangle 15"/>
+          <p:cNvPr id="40" name="TextBox 39"/>
+          <p:cNvSpPr txBox="1"/>
+          <p:nvPr/>
+        </p:nvSpPr>
+        <p:spPr>
+          <a:xfrm>
+            <a:off x="5440680" y="1600200"/>
+            <a:ext cx="6263640" cy="3977639"/>
+          </a:xfrm>
+          <a:prstGeom prst="rect">
+            <a:avLst/>
+          </a:prstGeom>
+          <a:noFill/>
+        </p:spPr>
+        <p:txBody>
+          <a:bodyPr wrap="square">
+            <a:spAutoFit/>
+          </a:bodyPr>
+          <a:lstStyle/>
+          <a:p>
+            <a:pPr>
+              <a:spcBef>
+                <a:spcPts val="600"/>
+              </a:spcBef>
+            </a:pPr>
+            <a:r>
+              <a:rPr sz="1700">
+                <a:solidFill>
+                  <a:srgbClr val="FFFFFF"/>
+                </a:solidFill>
+                <a:latin typeface="Calibri"/>
+              </a:rPr>
+              <a:t>▸ Harder questions = bigger gap</a:t>
+            </a:r>
+          </a:p>
+          <a:p>
+            <a:pPr>
+              <a:spcBef>
+                <a:spcPts val="600"/>
+              </a:spcBef>
+            </a:pPr>
+            <a:r>
+              <a:rPr sz="1700">
+                <a:solidFill>
+                  <a:srgbClr val="FFFFFF"/>
+                </a:solidFill>
+                <a:latin typeface="Calibri"/>
+              </a:rPr>
+              <a:t>▸ Pattern discovery: 88-point gap</a:t>
+            </a:r>
+          </a:p>
+          <a:p>
+            <a:pPr>
+              <a:spcBef>
+                <a:spcPts val="600"/>
+              </a:spcBef>
+            </a:pPr>
+            <a:r>
+              <a:rPr sz="1700">
+                <a:solidFill>
+                  <a:srgbClr val="FFFFFF"/>
+                </a:solidFill>
+                <a:latin typeface="Calibri"/>
+              </a:rPr>
+              <a:t>▸ Fact retrieval: 58-point gap</a:t>
+            </a:r>
+          </a:p>
+          <a:p>
+            <a:pPr>
+              <a:spcBef>
+                <a:spcPts val="600"/>
+              </a:spcBef>
+            </a:pPr>
+            <a:r>
+              <a:rPr sz="1700">
+                <a:solidFill>
+                  <a:srgbClr val="FFFFFF"/>
+                </a:solidFill>
+                <a:latin typeface="Calibri"/>
+              </a:rPr>
+              <a:t>▸ Symbolic computation advantage
+grows with question complexity</a:t>
+            </a:r>
+          </a:p>
+        </p:txBody>
+      </p:sp>
+      <p:sp>
+        <p:nvSpPr>
+          <p:cNvPr id="41" name="Rectangle 40"/>
           <p:cNvSpPr/>
           <p:nvPr/>
         </p:nvSpPr>
         <p:spPr>
           <a:xfrm>
-            <a:off x="365760" y="1572768"/>
-            <a:ext cx="1645920" cy="566928"/>
+            <a:off x="0" y="5833872"/>
+            <a:ext cx="12188952" cy="658368"/>
           </a:xfrm>
           <a:prstGeom prst="rect">
             <a:avLst/>
           </a:prstGeom>
           <a:solidFill>
-            <a:srgbClr val="0D274A"/>
+            <a:srgbClr val="0D142A"/>
           </a:solidFill>
           <a:ln>
             <a:noFill/>
@@ -6434,1457 +7425,33 @@
       </p:sp>
       <p:sp>
         <p:nvSpPr>
-          <p:cNvPr id="17" name="TextBox 16"/>
-          <p:cNvSpPr txBox="1"/>
-          <p:nvPr/>
-        </p:nvSpPr>
-        <p:spPr>
-          <a:xfrm>
-            <a:off x="411480" y="1682496"/>
-            <a:ext cx="1554480" cy="566928"/>
-          </a:xfrm>
-          <a:prstGeom prst="rect">
-            <a:avLst/>
-          </a:prstGeom>
-          <a:noFill/>
-        </p:spPr>
-        <p:txBody>
-          <a:bodyPr wrap="square"/>
-          <a:lstStyle/>
-          <a:p>
-            <a:pPr algn="l"/>
-            <a:r>
-              <a:rPr sz="1200" b="1" i="0">
-                <a:solidFill>
-                  <a:srgbClr val="FFFFFF"/>
-                </a:solidFill>
-                <a:latin typeface="Calibri"/>
-              </a:rPr>
-              <a:t>Star</a:t>
-            </a:r>
-          </a:p>
-        </p:txBody>
-      </p:sp>
-      <p:sp>
-        <p:nvSpPr>
-          <p:cNvPr id="18" name="Rectangle 17"/>
-          <p:cNvSpPr/>
-          <p:nvPr/>
-        </p:nvSpPr>
-        <p:spPr>
-          <a:xfrm>
-            <a:off x="2011680" y="1572768"/>
-            <a:ext cx="1645920" cy="566928"/>
-          </a:xfrm>
-          <a:prstGeom prst="rect">
-            <a:avLst/>
-          </a:prstGeom>
-          <a:solidFill>
-            <a:srgbClr val="0D274A"/>
-          </a:solidFill>
-          <a:ln>
-            <a:noFill/>
-          </a:ln>
-        </p:spPr>
-        <p:style>
-          <a:lnRef idx="1">
-            <a:schemeClr val="accent1"/>
-          </a:lnRef>
-          <a:fillRef idx="3">
-            <a:schemeClr val="accent1"/>
-          </a:fillRef>
-          <a:effectRef idx="2">
-            <a:schemeClr val="accent1"/>
-          </a:effectRef>
-          <a:fontRef idx="minor">
-            <a:schemeClr val="lt1"/>
-          </a:fontRef>
-        </p:style>
-        <p:txBody>
-          <a:bodyPr rtlCol="0" anchor="ctr"/>
-          <a:lstStyle/>
-          <a:p>
-            <a:pPr algn="ctr"/>
-          </a:p>
-        </p:txBody>
-      </p:sp>
-      <p:sp>
-        <p:nvSpPr>
-          <p:cNvPr id="19" name="TextBox 18"/>
-          <p:cNvSpPr txBox="1"/>
-          <p:nvPr/>
-        </p:nvSpPr>
-        <p:spPr>
-          <a:xfrm>
-            <a:off x="2057400" y="1682496"/>
-            <a:ext cx="1554480" cy="566928"/>
-          </a:xfrm>
-          <a:prstGeom prst="rect">
-            <a:avLst/>
-          </a:prstGeom>
-          <a:noFill/>
-        </p:spPr>
-        <p:txBody>
-          <a:bodyPr wrap="square"/>
-          <a:lstStyle/>
-          <a:p>
-            <a:pPr algn="l"/>
-            <a:r>
-              <a:rPr sz="1200" b="0" i="0">
-                <a:solidFill>
-                  <a:srgbClr val="FFFFFF"/>
-                </a:solidFill>
-                <a:latin typeface="Calibri"/>
-              </a:rPr>
-              <a:t>3f336702</a:t>
-            </a:r>
-          </a:p>
-        </p:txBody>
-      </p:sp>
-      <p:sp>
-        <p:nvSpPr>
-          <p:cNvPr id="20" name="Rectangle 19"/>
-          <p:cNvSpPr/>
-          <p:nvPr/>
-        </p:nvSpPr>
-        <p:spPr>
-          <a:xfrm>
-            <a:off x="3657600" y="1572768"/>
-            <a:ext cx="914400" cy="566928"/>
-          </a:xfrm>
-          <a:prstGeom prst="rect">
-            <a:avLst/>
-          </a:prstGeom>
-          <a:solidFill>
-            <a:srgbClr val="0D274A"/>
-          </a:solidFill>
-          <a:ln>
-            <a:noFill/>
-          </a:ln>
-        </p:spPr>
-        <p:style>
-          <a:lnRef idx="1">
-            <a:schemeClr val="accent1"/>
-          </a:lnRef>
-          <a:fillRef idx="3">
-            <a:schemeClr val="accent1"/>
-          </a:fillRef>
-          <a:effectRef idx="2">
-            <a:schemeClr val="accent1"/>
-          </a:effectRef>
-          <a:fontRef idx="minor">
-            <a:schemeClr val="lt1"/>
-          </a:fontRef>
-        </p:style>
-        <p:txBody>
-          <a:bodyPr rtlCol="0" anchor="ctr"/>
-          <a:lstStyle/>
-          <a:p>
-            <a:pPr algn="ctr"/>
-          </a:p>
-        </p:txBody>
-      </p:sp>
-      <p:sp>
-        <p:nvSpPr>
-          <p:cNvPr id="21" name="TextBox 20"/>
-          <p:cNvSpPr txBox="1"/>
-          <p:nvPr/>
-        </p:nvSpPr>
-        <p:spPr>
-          <a:xfrm>
-            <a:off x="3703320" y="1682496"/>
-            <a:ext cx="822960" cy="566928"/>
-          </a:xfrm>
-          <a:prstGeom prst="rect">
-            <a:avLst/>
-          </a:prstGeom>
-          <a:noFill/>
-        </p:spPr>
-        <p:txBody>
-          <a:bodyPr wrap="square"/>
-          <a:lstStyle/>
-          <a:p>
-            <a:pPr algn="l"/>
-            <a:r>
-              <a:rPr sz="1200" b="0" i="0">
-                <a:solidFill>
-                  <a:srgbClr val="FFFFFF"/>
-                </a:solidFill>
-                <a:latin typeface="Calibri"/>
-              </a:rPr>
-              <a:t>7</a:t>
-            </a:r>
-          </a:p>
-        </p:txBody>
-      </p:sp>
-      <p:sp>
-        <p:nvSpPr>
-          <p:cNvPr id="22" name="Rectangle 21"/>
-          <p:cNvSpPr/>
-          <p:nvPr/>
-        </p:nvSpPr>
-        <p:spPr>
-          <a:xfrm>
-            <a:off x="4572000" y="1572768"/>
-            <a:ext cx="1371600" cy="566928"/>
-          </a:xfrm>
-          <a:prstGeom prst="rect">
-            <a:avLst/>
-          </a:prstGeom>
-          <a:solidFill>
-            <a:srgbClr val="0D274A"/>
-          </a:solidFill>
-          <a:ln>
-            <a:noFill/>
-          </a:ln>
-        </p:spPr>
-        <p:style>
-          <a:lnRef idx="1">
-            <a:schemeClr val="accent1"/>
-          </a:lnRef>
-          <a:fillRef idx="3">
-            <a:schemeClr val="accent1"/>
-          </a:fillRef>
-          <a:effectRef idx="2">
-            <a:schemeClr val="accent1"/>
-          </a:effectRef>
-          <a:fontRef idx="minor">
-            <a:schemeClr val="lt1"/>
-          </a:fontRef>
-        </p:style>
-        <p:txBody>
-          <a:bodyPr rtlCol="0" anchor="ctr"/>
-          <a:lstStyle/>
-          <a:p>
-            <a:pPr algn="ctr"/>
-          </a:p>
-        </p:txBody>
-      </p:sp>
-      <p:sp>
-        <p:nvSpPr>
-          <p:cNvPr id="23" name="TextBox 22"/>
-          <p:cNvSpPr txBox="1"/>
-          <p:nvPr/>
-        </p:nvSpPr>
-        <p:spPr>
-          <a:xfrm>
-            <a:off x="4617720" y="1682496"/>
-            <a:ext cx="1280160" cy="566928"/>
-          </a:xfrm>
-          <a:prstGeom prst="rect">
-            <a:avLst/>
-          </a:prstGeom>
-          <a:noFill/>
-        </p:spPr>
-        <p:txBody>
-          <a:bodyPr wrap="square"/>
-          <a:lstStyle/>
-          <a:p>
-            <a:pPr algn="l"/>
-            <a:r>
-              <a:rPr sz="1200" b="0" i="0">
-                <a:solidFill>
-                  <a:srgbClr val="FFFFFF"/>
-                </a:solidFill>
-                <a:latin typeface="Calibri"/>
-              </a:rPr>
-              <a:t>22</a:t>
-            </a:r>
-          </a:p>
-        </p:txBody>
-      </p:sp>
-      <p:sp>
-        <p:nvSpPr>
-          <p:cNvPr id="24" name="Rectangle 23"/>
-          <p:cNvSpPr/>
-          <p:nvPr/>
-        </p:nvSpPr>
-        <p:spPr>
-          <a:xfrm>
-            <a:off x="5943600" y="1572768"/>
-            <a:ext cx="6035040" cy="566928"/>
-          </a:xfrm>
-          <a:prstGeom prst="rect">
-            <a:avLst/>
-          </a:prstGeom>
-          <a:solidFill>
-            <a:srgbClr val="0D274A"/>
-          </a:solidFill>
-          <a:ln>
-            <a:noFill/>
-          </a:ln>
-        </p:spPr>
-        <p:style>
-          <a:lnRef idx="1">
-            <a:schemeClr val="accent1"/>
-          </a:lnRef>
-          <a:fillRef idx="3">
-            <a:schemeClr val="accent1"/>
-          </a:fillRef>
-          <a:effectRef idx="2">
-            <a:schemeClr val="accent1"/>
-          </a:effectRef>
-          <a:fontRef idx="minor">
-            <a:schemeClr val="lt1"/>
-          </a:fontRef>
-        </p:style>
-        <p:txBody>
-          <a:bodyPr rtlCol="0" anchor="ctr"/>
-          <a:lstStyle/>
-          <a:p>
-            <a:pPr algn="ctr"/>
-          </a:p>
-        </p:txBody>
-      </p:sp>
-      <p:sp>
-        <p:nvSpPr>
-          <p:cNvPr id="25" name="TextBox 24"/>
-          <p:cNvSpPr txBox="1"/>
-          <p:nvPr/>
-        </p:nvSpPr>
-        <p:spPr>
-          <a:xfrm>
-            <a:off x="5989320" y="1682496"/>
-            <a:ext cx="5943600" cy="566928"/>
-          </a:xfrm>
-          <a:prstGeom prst="rect">
-            <a:avLst/>
-          </a:prstGeom>
-          <a:noFill/>
-        </p:spPr>
-        <p:txBody>
-          <a:bodyPr wrap="square"/>
-          <a:lstStyle/>
-          <a:p>
-            <a:pPr algn="l"/>
-            <a:r>
-              <a:rPr sz="1200" b="0" i="0">
-                <a:solidFill>
-                  <a:srgbClr val="FFFFFF"/>
-                </a:solidFill>
-                <a:latin typeface="Calibri"/>
-              </a:rPr>
-              <a:t>Coronary Heart Disease × 6 waves; 7× burden increase</a:t>
-            </a:r>
-          </a:p>
-        </p:txBody>
-      </p:sp>
-      <p:sp>
-        <p:nvSpPr>
-          <p:cNvPr id="26" name="Rectangle 25"/>
-          <p:cNvSpPr/>
-          <p:nvPr/>
-        </p:nvSpPr>
-        <p:spPr>
-          <a:xfrm>
-            <a:off x="365760" y="2139696"/>
-            <a:ext cx="1645920" cy="566928"/>
-          </a:xfrm>
-          <a:prstGeom prst="rect">
-            <a:avLst/>
-          </a:prstGeom>
-          <a:solidFill>
-            <a:srgbClr val="1B3A2A"/>
-          </a:solidFill>
-          <a:ln>
-            <a:noFill/>
-          </a:ln>
-        </p:spPr>
-        <p:style>
-          <a:lnRef idx="1">
-            <a:schemeClr val="accent1"/>
-          </a:lnRef>
-          <a:fillRef idx="3">
-            <a:schemeClr val="accent1"/>
-          </a:fillRef>
-          <a:effectRef idx="2">
-            <a:schemeClr val="accent1"/>
-          </a:effectRef>
-          <a:fontRef idx="minor">
-            <a:schemeClr val="lt1"/>
-          </a:fontRef>
-        </p:style>
-        <p:txBody>
-          <a:bodyPr rtlCol="0" anchor="ctr"/>
-          <a:lstStyle/>
-          <a:p>
-            <a:pPr algn="ctr"/>
-          </a:p>
-        </p:txBody>
-      </p:sp>
-      <p:sp>
-        <p:nvSpPr>
-          <p:cNvPr id="27" name="TextBox 26"/>
-          <p:cNvSpPr txBox="1"/>
-          <p:nvPr/>
-        </p:nvSpPr>
-        <p:spPr>
-          <a:xfrm>
-            <a:off x="411480" y="2249424"/>
-            <a:ext cx="1554480" cy="566928"/>
-          </a:xfrm>
-          <a:prstGeom prst="rect">
-            <a:avLst/>
-          </a:prstGeom>
-          <a:noFill/>
-        </p:spPr>
-        <p:txBody>
-          <a:bodyPr wrap="square"/>
-          <a:lstStyle/>
-          <a:p>
-            <a:pPr algn="l"/>
-            <a:r>
-              <a:rPr sz="1200" b="1" i="0">
-                <a:solidFill>
-                  <a:srgbClr val="FFFFFF"/>
-                </a:solidFill>
-                <a:latin typeface="Calibri"/>
-              </a:rPr>
-              <a:t>Contrast</a:t>
-            </a:r>
-          </a:p>
-        </p:txBody>
-      </p:sp>
-      <p:sp>
-        <p:nvSpPr>
-          <p:cNvPr id="28" name="Rectangle 27"/>
-          <p:cNvSpPr/>
-          <p:nvPr/>
-        </p:nvSpPr>
-        <p:spPr>
-          <a:xfrm>
-            <a:off x="2011680" y="2139696"/>
-            <a:ext cx="1645920" cy="566928"/>
-          </a:xfrm>
-          <a:prstGeom prst="rect">
-            <a:avLst/>
-          </a:prstGeom>
-          <a:solidFill>
-            <a:srgbClr val="1B3A2A"/>
-          </a:solidFill>
-          <a:ln>
-            <a:noFill/>
-          </a:ln>
-        </p:spPr>
-        <p:style>
-          <a:lnRef idx="1">
-            <a:schemeClr val="accent1"/>
-          </a:lnRef>
-          <a:fillRef idx="3">
-            <a:schemeClr val="accent1"/>
-          </a:fillRef>
-          <a:effectRef idx="2">
-            <a:schemeClr val="accent1"/>
-          </a:effectRef>
-          <a:fontRef idx="minor">
-            <a:schemeClr val="lt1"/>
-          </a:fontRef>
-        </p:style>
-        <p:txBody>
-          <a:bodyPr rtlCol="0" anchor="ctr"/>
-          <a:lstStyle/>
-          <a:p>
-            <a:pPr algn="ctr"/>
-          </a:p>
-        </p:txBody>
-      </p:sp>
-      <p:sp>
-        <p:nvSpPr>
-          <p:cNvPr id="29" name="TextBox 28"/>
-          <p:cNvSpPr txBox="1"/>
-          <p:nvPr/>
-        </p:nvSpPr>
-        <p:spPr>
-          <a:xfrm>
-            <a:off x="2057400" y="2249424"/>
-            <a:ext cx="1554480" cy="566928"/>
-          </a:xfrm>
-          <a:prstGeom prst="rect">
-            <a:avLst/>
-          </a:prstGeom>
-          <a:noFill/>
-        </p:spPr>
-        <p:txBody>
-          <a:bodyPr wrap="square"/>
-          <a:lstStyle/>
-          <a:p>
-            <a:pPr algn="l"/>
-            <a:r>
-              <a:rPr sz="1200" b="0" i="0">
-                <a:solidFill>
-                  <a:srgbClr val="FFFFFF"/>
-                </a:solidFill>
-                <a:latin typeface="Calibri"/>
-              </a:rPr>
-              <a:t>1930a1b6</a:t>
-            </a:r>
-          </a:p>
-        </p:txBody>
-      </p:sp>
-      <p:sp>
-        <p:nvSpPr>
-          <p:cNvPr id="30" name="Rectangle 29"/>
-          <p:cNvSpPr/>
-          <p:nvPr/>
-        </p:nvSpPr>
-        <p:spPr>
-          <a:xfrm>
-            <a:off x="3657600" y="2139696"/>
-            <a:ext cx="914400" cy="566928"/>
-          </a:xfrm>
-          <a:prstGeom prst="rect">
-            <a:avLst/>
-          </a:prstGeom>
-          <a:solidFill>
-            <a:srgbClr val="1B3A2A"/>
-          </a:solidFill>
-          <a:ln>
-            <a:noFill/>
-          </a:ln>
-        </p:spPr>
-        <p:style>
-          <a:lnRef idx="1">
-            <a:schemeClr val="accent1"/>
-          </a:lnRef>
-          <a:fillRef idx="3">
-            <a:schemeClr val="accent1"/>
-          </a:fillRef>
-          <a:effectRef idx="2">
-            <a:schemeClr val="accent1"/>
-          </a:effectRef>
-          <a:fontRef idx="minor">
-            <a:schemeClr val="lt1"/>
-          </a:fontRef>
-        </p:style>
-        <p:txBody>
-          <a:bodyPr rtlCol="0" anchor="ctr"/>
-          <a:lstStyle/>
-          <a:p>
-            <a:pPr algn="ctr"/>
-          </a:p>
-        </p:txBody>
-      </p:sp>
-      <p:sp>
-        <p:nvSpPr>
-          <p:cNvPr id="31" name="TextBox 30"/>
-          <p:cNvSpPr txBox="1"/>
-          <p:nvPr/>
-        </p:nvSpPr>
-        <p:spPr>
-          <a:xfrm>
-            <a:off x="3703320" y="2249424"/>
-            <a:ext cx="822960" cy="566928"/>
-          </a:xfrm>
-          <a:prstGeom prst="rect">
-            <a:avLst/>
-          </a:prstGeom>
-          <a:noFill/>
-        </p:spPr>
-        <p:txBody>
-          <a:bodyPr wrap="square"/>
-          <a:lstStyle/>
-          <a:p>
-            <a:pPr algn="l"/>
-            <a:r>
-              <a:rPr sz="1200" b="0" i="0">
-                <a:solidFill>
-                  <a:srgbClr val="FFFFFF"/>
-                </a:solidFill>
-                <a:latin typeface="Calibri"/>
-              </a:rPr>
-              <a:t>7</a:t>
-            </a:r>
-          </a:p>
-        </p:txBody>
-      </p:sp>
-      <p:sp>
-        <p:nvSpPr>
-          <p:cNvPr id="32" name="Rectangle 31"/>
-          <p:cNvSpPr/>
-          <p:nvPr/>
-        </p:nvSpPr>
-        <p:spPr>
-          <a:xfrm>
-            <a:off x="4572000" y="2139696"/>
-            <a:ext cx="1371600" cy="566928"/>
-          </a:xfrm>
-          <a:prstGeom prst="rect">
-            <a:avLst/>
-          </a:prstGeom>
-          <a:solidFill>
-            <a:srgbClr val="1B3A2A"/>
-          </a:solidFill>
-          <a:ln>
-            <a:noFill/>
-          </a:ln>
-        </p:spPr>
-        <p:style>
-          <a:lnRef idx="1">
-            <a:schemeClr val="accent1"/>
-          </a:lnRef>
-          <a:fillRef idx="3">
-            <a:schemeClr val="accent1"/>
-          </a:fillRef>
-          <a:effectRef idx="2">
-            <a:schemeClr val="accent1"/>
-          </a:effectRef>
-          <a:fontRef idx="minor">
-            <a:schemeClr val="lt1"/>
-          </a:fontRef>
-        </p:style>
-        <p:txBody>
-          <a:bodyPr rtlCol="0" anchor="ctr"/>
-          <a:lstStyle/>
-          <a:p>
-            <a:pPr algn="ctr"/>
-          </a:p>
-        </p:txBody>
-      </p:sp>
-      <p:sp>
-        <p:nvSpPr>
-          <p:cNvPr id="33" name="TextBox 32"/>
-          <p:cNvSpPr txBox="1"/>
-          <p:nvPr/>
-        </p:nvSpPr>
-        <p:spPr>
-          <a:xfrm>
-            <a:off x="4617720" y="2249424"/>
-            <a:ext cx="1280160" cy="566928"/>
-          </a:xfrm>
-          <a:prstGeom prst="rect">
-            <a:avLst/>
-          </a:prstGeom>
-          <a:noFill/>
-        </p:spPr>
-        <p:txBody>
-          <a:bodyPr wrap="square"/>
-          <a:lstStyle/>
-          <a:p>
-            <a:pPr algn="l"/>
-            <a:r>
-              <a:rPr sz="1200" b="0" i="0">
-                <a:solidFill>
-                  <a:srgbClr val="FFFFFF"/>
-                </a:solidFill>
-                <a:latin typeface="Calibri"/>
-              </a:rPr>
-              <a:t>1</a:t>
-            </a:r>
-          </a:p>
-        </p:txBody>
-      </p:sp>
-      <p:sp>
-        <p:nvSpPr>
-          <p:cNvPr id="34" name="Rectangle 33"/>
-          <p:cNvSpPr/>
-          <p:nvPr/>
-        </p:nvSpPr>
-        <p:spPr>
-          <a:xfrm>
-            <a:off x="5943600" y="2139696"/>
-            <a:ext cx="6035040" cy="566928"/>
-          </a:xfrm>
-          <a:prstGeom prst="rect">
-            <a:avLst/>
-          </a:prstGeom>
-          <a:solidFill>
-            <a:srgbClr val="1B3A2A"/>
-          </a:solidFill>
-          <a:ln>
-            <a:noFill/>
-          </a:ln>
-        </p:spPr>
-        <p:style>
-          <a:lnRef idx="1">
-            <a:schemeClr val="accent1"/>
-          </a:lnRef>
-          <a:fillRef idx="3">
-            <a:schemeClr val="accent1"/>
-          </a:fillRef>
-          <a:effectRef idx="2">
-            <a:schemeClr val="accent1"/>
-          </a:effectRef>
-          <a:fontRef idx="minor">
-            <a:schemeClr val="lt1"/>
-          </a:fontRef>
-        </p:style>
-        <p:txBody>
-          <a:bodyPr rtlCol="0" anchor="ctr"/>
-          <a:lstStyle/>
-          <a:p>
-            <a:pPr algn="ctr"/>
-          </a:p>
-        </p:txBody>
-      </p:sp>
-      <p:sp>
-        <p:nvSpPr>
-          <p:cNvPr id="35" name="TextBox 34"/>
-          <p:cNvSpPr txBox="1"/>
-          <p:nvPr/>
-        </p:nvSpPr>
-        <p:spPr>
-          <a:xfrm>
-            <a:off x="5989320" y="2249424"/>
-            <a:ext cx="5943600" cy="566928"/>
-          </a:xfrm>
-          <a:prstGeom prst="rect">
-            <a:avLst/>
-          </a:prstGeom>
-          <a:noFill/>
-        </p:spPr>
-        <p:txBody>
-          <a:bodyPr wrap="square"/>
-          <a:lstStyle/>
-          <a:p>
-            <a:pPr algn="l"/>
-            <a:r>
-              <a:rPr sz="1200" b="0" i="0">
-                <a:solidFill>
-                  <a:srgbClr val="FFFFFF"/>
-                </a:solidFill>
-                <a:latin typeface="Calibri"/>
-              </a:rPr>
-              <a:t>Most stable: 7 waves, 1 condition, maximum coverage</a:t>
-            </a:r>
-          </a:p>
-        </p:txBody>
-      </p:sp>
-      <p:sp>
-        <p:nvSpPr>
-          <p:cNvPr id="36" name="Rectangle 35"/>
-          <p:cNvSpPr/>
-          <p:nvPr/>
-        </p:nvSpPr>
-        <p:spPr>
-          <a:xfrm>
-            <a:off x="365760" y="2706624"/>
-            <a:ext cx="1645920" cy="566928"/>
-          </a:xfrm>
-          <a:prstGeom prst="rect">
-            <a:avLst/>
-          </a:prstGeom>
-          <a:solidFill>
-            <a:srgbClr val="3E1A1A"/>
-          </a:solidFill>
-          <a:ln>
-            <a:noFill/>
-          </a:ln>
-        </p:spPr>
-        <p:style>
-          <a:lnRef idx="1">
-            <a:schemeClr val="accent1"/>
-          </a:lnRef>
-          <a:fillRef idx="3">
-            <a:schemeClr val="accent1"/>
-          </a:fillRef>
-          <a:effectRef idx="2">
-            <a:schemeClr val="accent1"/>
-          </a:effectRef>
-          <a:fontRef idx="minor">
-            <a:schemeClr val="lt1"/>
-          </a:fontRef>
-        </p:style>
-        <p:txBody>
-          <a:bodyPr rtlCol="0" anchor="ctr"/>
-          <a:lstStyle/>
-          <a:p>
-            <a:pPr algn="ctr"/>
-          </a:p>
-        </p:txBody>
-      </p:sp>
-      <p:sp>
-        <p:nvSpPr>
-          <p:cNvPr id="37" name="TextBox 36"/>
-          <p:cNvSpPr txBox="1"/>
-          <p:nvPr/>
-        </p:nvSpPr>
-        <p:spPr>
-          <a:xfrm>
-            <a:off x="411480" y="2816352"/>
-            <a:ext cx="1554480" cy="566928"/>
-          </a:xfrm>
-          <a:prstGeom prst="rect">
-            <a:avLst/>
-          </a:prstGeom>
-          <a:noFill/>
-        </p:spPr>
-        <p:txBody>
-          <a:bodyPr wrap="square"/>
-          <a:lstStyle/>
-          <a:p>
-            <a:pPr algn="l"/>
-            <a:r>
-              <a:rPr sz="1200" b="1" i="0">
-                <a:solidFill>
-                  <a:srgbClr val="FFFFFF"/>
-                </a:solidFill>
-                <a:latin typeface="Calibri"/>
-              </a:rPr>
-              <a:t>Comorbid</a:t>
-            </a:r>
-          </a:p>
-        </p:txBody>
-      </p:sp>
-      <p:sp>
-        <p:nvSpPr>
-          <p:cNvPr id="38" name="Rectangle 37"/>
-          <p:cNvSpPr/>
-          <p:nvPr/>
-        </p:nvSpPr>
-        <p:spPr>
-          <a:xfrm>
-            <a:off x="2011680" y="2706624"/>
-            <a:ext cx="1645920" cy="566928"/>
-          </a:xfrm>
-          <a:prstGeom prst="rect">
-            <a:avLst/>
-          </a:prstGeom>
-          <a:solidFill>
-            <a:srgbClr val="3E1A1A"/>
-          </a:solidFill>
-          <a:ln>
-            <a:noFill/>
-          </a:ln>
-        </p:spPr>
-        <p:style>
-          <a:lnRef idx="1">
-            <a:schemeClr val="accent1"/>
-          </a:lnRef>
-          <a:fillRef idx="3">
-            <a:schemeClr val="accent1"/>
-          </a:fillRef>
-          <a:effectRef idx="2">
-            <a:schemeClr val="accent1"/>
-          </a:effectRef>
-          <a:fontRef idx="minor">
-            <a:schemeClr val="lt1"/>
-          </a:fontRef>
-        </p:style>
-        <p:txBody>
-          <a:bodyPr rtlCol="0" anchor="ctr"/>
-          <a:lstStyle/>
-          <a:p>
-            <a:pPr algn="ctr"/>
-          </a:p>
-        </p:txBody>
-      </p:sp>
-      <p:sp>
-        <p:nvSpPr>
-          <p:cNvPr id="39" name="TextBox 38"/>
-          <p:cNvSpPr txBox="1"/>
-          <p:nvPr/>
-        </p:nvSpPr>
-        <p:spPr>
-          <a:xfrm>
-            <a:off x="2057400" y="2816352"/>
-            <a:ext cx="1554480" cy="566928"/>
-          </a:xfrm>
-          <a:prstGeom prst="rect">
-            <a:avLst/>
-          </a:prstGeom>
-          <a:noFill/>
-        </p:spPr>
-        <p:txBody>
-          <a:bodyPr wrap="square"/>
-          <a:lstStyle/>
-          <a:p>
-            <a:pPr algn="l"/>
-            <a:r>
-              <a:rPr sz="1200" b="0" i="0">
-                <a:solidFill>
-                  <a:srgbClr val="FFFFFF"/>
-                </a:solidFill>
-                <a:latin typeface="Calibri"/>
-              </a:rPr>
-              <a:t>3b95da79</a:t>
-            </a:r>
-          </a:p>
-        </p:txBody>
-      </p:sp>
-      <p:sp>
-        <p:nvSpPr>
-          <p:cNvPr id="40" name="Rectangle 39"/>
-          <p:cNvSpPr/>
-          <p:nvPr/>
-        </p:nvSpPr>
-        <p:spPr>
-          <a:xfrm>
-            <a:off x="3657600" y="2706624"/>
-            <a:ext cx="914400" cy="566928"/>
-          </a:xfrm>
-          <a:prstGeom prst="rect">
-            <a:avLst/>
-          </a:prstGeom>
-          <a:solidFill>
-            <a:srgbClr val="3E1A1A"/>
-          </a:solidFill>
-          <a:ln>
-            <a:noFill/>
-          </a:ln>
-        </p:spPr>
-        <p:style>
-          <a:lnRef idx="1">
-            <a:schemeClr val="accent1"/>
-          </a:lnRef>
-          <a:fillRef idx="3">
-            <a:schemeClr val="accent1"/>
-          </a:fillRef>
-          <a:effectRef idx="2">
-            <a:schemeClr val="accent1"/>
-          </a:effectRef>
-          <a:fontRef idx="minor">
-            <a:schemeClr val="lt1"/>
-          </a:fontRef>
-        </p:style>
-        <p:txBody>
-          <a:bodyPr rtlCol="0" anchor="ctr"/>
-          <a:lstStyle/>
-          <a:p>
-            <a:pPr algn="ctr"/>
-          </a:p>
-        </p:txBody>
-      </p:sp>
-      <p:sp>
-        <p:nvSpPr>
-          <p:cNvPr id="41" name="TextBox 40"/>
-          <p:cNvSpPr txBox="1"/>
-          <p:nvPr/>
-        </p:nvSpPr>
-        <p:spPr>
-          <a:xfrm>
-            <a:off x="3703320" y="2816352"/>
-            <a:ext cx="822960" cy="566928"/>
-          </a:xfrm>
-          <a:prstGeom prst="rect">
-            <a:avLst/>
-          </a:prstGeom>
-          <a:noFill/>
-        </p:spPr>
-        <p:txBody>
-          <a:bodyPr wrap="square"/>
-          <a:lstStyle/>
-          <a:p>
-            <a:pPr algn="l"/>
-            <a:r>
-              <a:rPr sz="1200" b="0" i="0">
-                <a:solidFill>
-                  <a:srgbClr val="FFFFFF"/>
-                </a:solidFill>
-                <a:latin typeface="Calibri"/>
-              </a:rPr>
-              <a:t>7</a:t>
-            </a:r>
-          </a:p>
-        </p:txBody>
-      </p:sp>
-      <p:sp>
-        <p:nvSpPr>
-          <p:cNvPr id="42" name="Rectangle 41"/>
-          <p:cNvSpPr/>
-          <p:nvPr/>
-        </p:nvSpPr>
-        <p:spPr>
-          <a:xfrm>
-            <a:off x="4572000" y="2706624"/>
-            <a:ext cx="1371600" cy="566928"/>
-          </a:xfrm>
-          <a:prstGeom prst="rect">
-            <a:avLst/>
-          </a:prstGeom>
-          <a:solidFill>
-            <a:srgbClr val="3E1A1A"/>
-          </a:solidFill>
-          <a:ln>
-            <a:noFill/>
-          </a:ln>
-        </p:spPr>
-        <p:style>
-          <a:lnRef idx="1">
-            <a:schemeClr val="accent1"/>
-          </a:lnRef>
-          <a:fillRef idx="3">
-            <a:schemeClr val="accent1"/>
-          </a:fillRef>
-          <a:effectRef idx="2">
-            <a:schemeClr val="accent1"/>
-          </a:effectRef>
-          <a:fontRef idx="minor">
-            <a:schemeClr val="lt1"/>
-          </a:fontRef>
-        </p:style>
-        <p:txBody>
-          <a:bodyPr rtlCol="0" anchor="ctr"/>
-          <a:lstStyle/>
-          <a:p>
-            <a:pPr algn="ctr"/>
-          </a:p>
-        </p:txBody>
-      </p:sp>
-      <p:sp>
-        <p:nvSpPr>
-          <p:cNvPr id="43" name="TextBox 42"/>
-          <p:cNvSpPr txBox="1"/>
-          <p:nvPr/>
-        </p:nvSpPr>
-        <p:spPr>
-          <a:xfrm>
-            <a:off x="4617720" y="2816352"/>
-            <a:ext cx="1280160" cy="566928"/>
-          </a:xfrm>
-          <a:prstGeom prst="rect">
-            <a:avLst/>
-          </a:prstGeom>
-          <a:noFill/>
-        </p:spPr>
-        <p:txBody>
-          <a:bodyPr wrap="square"/>
-          <a:lstStyle/>
-          <a:p>
-            <a:pPr algn="l"/>
-            <a:r>
-              <a:rPr sz="1200" b="0" i="0">
-                <a:solidFill>
-                  <a:srgbClr val="FFFFFF"/>
-                </a:solidFill>
-                <a:latin typeface="Calibri"/>
-              </a:rPr>
-              <a:t>14</a:t>
-            </a:r>
-          </a:p>
-        </p:txBody>
-      </p:sp>
-      <p:sp>
-        <p:nvSpPr>
-          <p:cNvPr id="44" name="Rectangle 43"/>
-          <p:cNvSpPr/>
-          <p:nvPr/>
-        </p:nvSpPr>
-        <p:spPr>
-          <a:xfrm>
-            <a:off x="5943600" y="2706624"/>
-            <a:ext cx="6035040" cy="566928"/>
-          </a:xfrm>
-          <a:prstGeom prst="rect">
-            <a:avLst/>
-          </a:prstGeom>
-          <a:solidFill>
-            <a:srgbClr val="3E1A1A"/>
-          </a:solidFill>
-          <a:ln>
-            <a:noFill/>
-          </a:ln>
-        </p:spPr>
-        <p:style>
-          <a:lnRef idx="1">
-            <a:schemeClr val="accent1"/>
-          </a:lnRef>
-          <a:fillRef idx="3">
-            <a:schemeClr val="accent1"/>
-          </a:fillRef>
-          <a:effectRef idx="2">
-            <a:schemeClr val="accent1"/>
-          </a:effectRef>
-          <a:fontRef idx="minor">
-            <a:schemeClr val="lt1"/>
-          </a:fontRef>
-        </p:style>
-        <p:txBody>
-          <a:bodyPr rtlCol="0" anchor="ctr"/>
-          <a:lstStyle/>
-          <a:p>
-            <a:pPr algn="ctr"/>
-          </a:p>
-        </p:txBody>
-      </p:sp>
-      <p:sp>
-        <p:nvSpPr>
-          <p:cNvPr id="45" name="TextBox 44"/>
-          <p:cNvSpPr txBox="1"/>
-          <p:nvPr/>
-        </p:nvSpPr>
-        <p:spPr>
-          <a:xfrm>
-            <a:off x="5989320" y="2816352"/>
-            <a:ext cx="5943600" cy="566928"/>
-          </a:xfrm>
-          <a:prstGeom prst="rect">
-            <a:avLst/>
-          </a:prstGeom>
-          <a:noFill/>
-        </p:spPr>
-        <p:txBody>
-          <a:bodyPr wrap="square"/>
-          <a:lstStyle/>
-          <a:p>
-            <a:pPr algn="l"/>
-            <a:r>
-              <a:rPr sz="1200" b="0" i="0">
-                <a:solidFill>
-                  <a:srgbClr val="FFFFFF"/>
-                </a:solidFill>
-                <a:latin typeface="Calibri"/>
-              </a:rPr>
-              <a:t>HTN + Diabetes from Wave 2; monotonic burden increase</a:t>
-            </a:r>
-          </a:p>
-        </p:txBody>
-      </p:sp>
-      <p:sp>
-        <p:nvSpPr>
-          <p:cNvPr id="46" name="TextBox 45"/>
-          <p:cNvSpPr txBox="1"/>
-          <p:nvPr/>
-        </p:nvSpPr>
-        <p:spPr>
-          <a:xfrm>
-            <a:off x="365760" y="2926080"/>
-            <a:ext cx="11430000" cy="365760"/>
-          </a:xfrm>
-          <a:prstGeom prst="rect">
-            <a:avLst/>
-          </a:prstGeom>
-          <a:noFill/>
-        </p:spPr>
-        <p:txBody>
-          <a:bodyPr wrap="square"/>
-          <a:lstStyle/>
-          <a:p>
-            <a:pPr algn="l"/>
-            <a:r>
-              <a:rPr sz="1600" b="1" i="0">
-                <a:solidFill>
-                  <a:srgbClr val="2196F3"/>
-                </a:solidFill>
-                <a:latin typeface="Calibri"/>
-              </a:rPr>
-              <a:t>Patient Selection Criteria</a:t>
-            </a:r>
-          </a:p>
-        </p:txBody>
-      </p:sp>
-      <p:sp>
-        <p:nvSpPr>
-          <p:cNvPr id="47" name="Rectangle 46"/>
-          <p:cNvSpPr/>
-          <p:nvPr/>
-        </p:nvSpPr>
-        <p:spPr>
-          <a:xfrm>
-            <a:off x="365760" y="3383280"/>
-            <a:ext cx="11430000" cy="594360"/>
-          </a:xfrm>
-          <a:prstGeom prst="rect">
-            <a:avLst/>
-          </a:prstGeom>
-          <a:solidFill>
-            <a:srgbClr val="1E335E"/>
-          </a:solidFill>
-          <a:ln>
-            <a:noFill/>
-          </a:ln>
-        </p:spPr>
-        <p:style>
-          <a:lnRef idx="1">
-            <a:schemeClr val="accent1"/>
-          </a:lnRef>
-          <a:fillRef idx="3">
-            <a:schemeClr val="accent1"/>
-          </a:fillRef>
-          <a:effectRef idx="2">
-            <a:schemeClr val="accent1"/>
-          </a:effectRef>
-          <a:fontRef idx="minor">
-            <a:schemeClr val="lt1"/>
-          </a:fontRef>
-        </p:style>
-        <p:txBody>
-          <a:bodyPr rtlCol="0" anchor="ctr"/>
-          <a:lstStyle/>
-          <a:p>
-            <a:pPr algn="ctr"/>
-          </a:p>
-        </p:txBody>
-      </p:sp>
-      <p:sp>
-        <p:nvSpPr>
-          <p:cNvPr id="48" name="TextBox 47"/>
-          <p:cNvSpPr txBox="1"/>
-          <p:nvPr/>
-        </p:nvSpPr>
-        <p:spPr>
-          <a:xfrm>
-            <a:off x="502920" y="3493008"/>
-            <a:ext cx="1645920" cy="384048"/>
-          </a:xfrm>
-          <a:prstGeom prst="rect">
-            <a:avLst/>
-          </a:prstGeom>
-          <a:noFill/>
-        </p:spPr>
-        <p:txBody>
-          <a:bodyPr wrap="square"/>
-          <a:lstStyle/>
-          <a:p>
-            <a:pPr algn="l"/>
-            <a:r>
-              <a:rPr sz="1300" b="1" i="0">
-                <a:solidFill>
-                  <a:srgbClr val="2196F3"/>
-                </a:solidFill>
-                <a:latin typeface="Calibri"/>
-              </a:rPr>
-              <a:t>Star</a:t>
-            </a:r>
-          </a:p>
-        </p:txBody>
-      </p:sp>
-      <p:sp>
-        <p:nvSpPr>
-          <p:cNvPr id="49" name="TextBox 48"/>
-          <p:cNvSpPr txBox="1"/>
-          <p:nvPr/>
-        </p:nvSpPr>
-        <p:spPr>
-          <a:xfrm>
-            <a:off x="2103120" y="3493008"/>
-            <a:ext cx="9601200" cy="384048"/>
-          </a:xfrm>
-          <a:prstGeom prst="rect">
-            <a:avLst/>
-          </a:prstGeom>
-          <a:noFill/>
-        </p:spPr>
-        <p:txBody>
-          <a:bodyPr wrap="square"/>
-          <a:lstStyle/>
-          <a:p>
-            <a:pPr algn="l"/>
-            <a:r>
-              <a:rPr sz="1300" b="0" i="0">
-                <a:solidFill>
-                  <a:srgbClr val="FFFFFF"/>
-                </a:solidFill>
-                <a:latin typeface="Calibri"/>
-              </a:rPr>
-              <a:t>Highest Star score: max conditions × max waves × rare CHD</a:t>
-            </a:r>
-          </a:p>
-        </p:txBody>
-      </p:sp>
-      <p:sp>
-        <p:nvSpPr>
-          <p:cNvPr id="50" name="Rectangle 49"/>
-          <p:cNvSpPr/>
-          <p:nvPr/>
-        </p:nvSpPr>
-        <p:spPr>
-          <a:xfrm>
-            <a:off x="365760" y="4069080"/>
-            <a:ext cx="11430000" cy="594360"/>
-          </a:xfrm>
-          <a:prstGeom prst="rect">
-            <a:avLst/>
-          </a:prstGeom>
-          <a:solidFill>
-            <a:srgbClr val="1E335E"/>
-          </a:solidFill>
-          <a:ln>
-            <a:noFill/>
-          </a:ln>
-        </p:spPr>
-        <p:style>
-          <a:lnRef idx="1">
-            <a:schemeClr val="accent1"/>
-          </a:lnRef>
-          <a:fillRef idx="3">
-            <a:schemeClr val="accent1"/>
-          </a:fillRef>
-          <a:effectRef idx="2">
-            <a:schemeClr val="accent1"/>
-          </a:effectRef>
-          <a:fontRef idx="minor">
-            <a:schemeClr val="lt1"/>
-          </a:fontRef>
-        </p:style>
-        <p:txBody>
-          <a:bodyPr rtlCol="0" anchor="ctr"/>
-          <a:lstStyle/>
-          <a:p>
-            <a:pPr algn="ctr"/>
-          </a:p>
-        </p:txBody>
-      </p:sp>
-      <p:sp>
-        <p:nvSpPr>
-          <p:cNvPr id="51" name="TextBox 50"/>
-          <p:cNvSpPr txBox="1"/>
-          <p:nvPr/>
-        </p:nvSpPr>
-        <p:spPr>
-          <a:xfrm>
-            <a:off x="502920" y="4178808"/>
-            <a:ext cx="1645920" cy="384048"/>
-          </a:xfrm>
-          <a:prstGeom prst="rect">
-            <a:avLst/>
-          </a:prstGeom>
-          <a:noFill/>
-        </p:spPr>
-        <p:txBody>
-          <a:bodyPr wrap="square"/>
-          <a:lstStyle/>
-          <a:p>
-            <a:pPr algn="l"/>
-            <a:r>
-              <a:rPr sz="1300" b="1" i="0">
-                <a:solidFill>
-                  <a:srgbClr val="2196F3"/>
-                </a:solidFill>
-                <a:latin typeface="Calibri"/>
-              </a:rPr>
-              <a:t>Contrast</a:t>
-            </a:r>
-          </a:p>
-        </p:txBody>
-      </p:sp>
-      <p:sp>
-        <p:nvSpPr>
-          <p:cNvPr id="52" name="TextBox 51"/>
-          <p:cNvSpPr txBox="1"/>
-          <p:nvPr/>
-        </p:nvSpPr>
-        <p:spPr>
-          <a:xfrm>
-            <a:off x="2103120" y="4178808"/>
-            <a:ext cx="9601200" cy="384048"/>
-          </a:xfrm>
-          <a:prstGeom prst="rect">
-            <a:avLst/>
-          </a:prstGeom>
-          <a:noFill/>
-        </p:spPr>
-        <p:txBody>
-          <a:bodyPr wrap="square"/>
-          <a:lstStyle/>
-          <a:p>
-            <a:pPr algn="l"/>
-            <a:r>
-              <a:rPr sz="1300" b="0" i="0">
-                <a:solidFill>
-                  <a:srgbClr val="FFFFFF"/>
-                </a:solidFill>
-                <a:latin typeface="Calibri"/>
-              </a:rPr>
-              <a:t>Highest Contrast score: most waves with fewest conditions</a:t>
-            </a:r>
-          </a:p>
-        </p:txBody>
-      </p:sp>
-      <p:sp>
-        <p:nvSpPr>
-          <p:cNvPr id="53" name="Rectangle 52"/>
-          <p:cNvSpPr/>
-          <p:nvPr/>
-        </p:nvSpPr>
-        <p:spPr>
-          <a:xfrm>
-            <a:off x="365760" y="4754880"/>
-            <a:ext cx="11430000" cy="594360"/>
-          </a:xfrm>
-          <a:prstGeom prst="rect">
-            <a:avLst/>
-          </a:prstGeom>
-          <a:solidFill>
-            <a:srgbClr val="1E335E"/>
-          </a:solidFill>
-          <a:ln>
-            <a:noFill/>
-          </a:ln>
-        </p:spPr>
-        <p:style>
-          <a:lnRef idx="1">
-            <a:schemeClr val="accent1"/>
-          </a:lnRef>
-          <a:fillRef idx="3">
-            <a:schemeClr val="accent1"/>
-          </a:fillRef>
-          <a:effectRef idx="2">
-            <a:schemeClr val="accent1"/>
-          </a:effectRef>
-          <a:fontRef idx="minor">
-            <a:schemeClr val="lt1"/>
-          </a:fontRef>
-        </p:style>
-        <p:txBody>
-          <a:bodyPr rtlCol="0" anchor="ctr"/>
-          <a:lstStyle/>
-          <a:p>
-            <a:pPr algn="ctr"/>
-          </a:p>
-        </p:txBody>
-      </p:sp>
-      <p:sp>
-        <p:nvSpPr>
-          <p:cNvPr id="54" name="TextBox 53"/>
-          <p:cNvSpPr txBox="1"/>
-          <p:nvPr/>
-        </p:nvSpPr>
-        <p:spPr>
-          <a:xfrm>
-            <a:off x="502920" y="4864608"/>
-            <a:ext cx="1645920" cy="384048"/>
-          </a:xfrm>
-          <a:prstGeom prst="rect">
-            <a:avLst/>
-          </a:prstGeom>
-          <a:noFill/>
-        </p:spPr>
-        <p:txBody>
-          <a:bodyPr wrap="square"/>
-          <a:lstStyle/>
-          <a:p>
-            <a:pPr algn="l"/>
-            <a:r>
-              <a:rPr sz="1300" b="1" i="0">
-                <a:solidFill>
-                  <a:srgbClr val="2196F3"/>
-                </a:solidFill>
-                <a:latin typeface="Calibri"/>
-              </a:rPr>
-              <a:t>Comorbid</a:t>
-            </a:r>
-          </a:p>
-        </p:txBody>
-      </p:sp>
-      <p:sp>
-        <p:nvSpPr>
-          <p:cNvPr id="55" name="TextBox 54"/>
-          <p:cNvSpPr txBox="1"/>
-          <p:nvPr/>
-        </p:nvSpPr>
-        <p:spPr>
-          <a:xfrm>
-            <a:off x="2103120" y="4864608"/>
-            <a:ext cx="9601200" cy="384048"/>
-          </a:xfrm>
-          <a:prstGeom prst="rect">
-            <a:avLst/>
-          </a:prstGeom>
-          <a:noFill/>
-        </p:spPr>
-        <p:txBody>
-          <a:bodyPr wrap="square"/>
-          <a:lstStyle/>
-          <a:p>
-            <a:pPr algn="l"/>
-            <a:r>
-              <a:rPr sz="1300" b="0" i="0">
-                <a:solidFill>
-                  <a:srgbClr val="FFFFFF"/>
-                </a:solidFill>
-                <a:latin typeface="Calibri"/>
-              </a:rPr>
-              <a:t>Highest Comorbid score: both HTN and Diabetes from earliest wave</a:t>
+          <p:cNvPr id="42" name="TextBox 41"/>
+          <p:cNvSpPr txBox="1"/>
+          <p:nvPr/>
+        </p:nvSpPr>
+        <p:spPr>
+          <a:xfrm>
+            <a:off x="365760" y="5888736"/>
+            <a:ext cx="11430000" cy="530352"/>
+          </a:xfrm>
+          <a:prstGeom prst="rect">
+            <a:avLst/>
+          </a:prstGeom>
+          <a:noFill/>
+        </p:spPr>
+        <p:txBody>
+          <a:bodyPr wrap="square"/>
+          <a:lstStyle/>
+          <a:p>
+            <a:pPr algn="ctr"/>
+            <a:r>
+              <a:rPr sz="1400" b="0" i="1">
+                <a:solidFill>
+                  <a:srgbClr val="E3F2FD"/>
+                </a:solidFill>
+                <a:latin typeface="Calibri"/>
+              </a:rPr>
+              <a:t>Extended benchmark deliberately tests co-occurrence, trajectory, medication patterns — the questions clinicians actually ask</a:t>
             </a:r>
           </a:p>
         </p:txBody>
@@ -8009,7 +7576,7 @@
                 </a:solidFill>
                 <a:latin typeface="Calibri"/>
               </a:rPr>
-              <a:t>Patient Deep Dive: Key Findings</a:t>
+              <a:t>Patient Cohort: Deep Dive</a:t>
             </a:r>
           </a:p>
         </p:txBody>
@@ -8023,7 +7590,7 @@
         <p:spPr>
           <a:xfrm>
             <a:off x="365760" y="749808"/>
-            <a:ext cx="5029200" cy="36576"/>
+            <a:ext cx="3657600" cy="36576"/>
           </a:xfrm>
           <a:prstGeom prst="rect">
             <a:avLst/>
@@ -8065,8 +7632,8 @@
         </p:nvSpPr>
         <p:spPr>
           <a:xfrm>
-            <a:off x="274320" y="960120"/>
-            <a:ext cx="3794760" cy="5120640"/>
+            <a:off x="365760" y="1005840"/>
+            <a:ext cx="1645920" cy="566928"/>
           </a:xfrm>
           <a:prstGeom prst="rect">
             <a:avLst/>
@@ -8108,8 +7675,8 @@
         </p:nvSpPr>
         <p:spPr>
           <a:xfrm>
-            <a:off x="365760" y="1024128"/>
-            <a:ext cx="3611880" cy="457200"/>
+            <a:off x="411480" y="1133856"/>
+            <a:ext cx="1554480" cy="566928"/>
           </a:xfrm>
           <a:prstGeom prst="rect">
             <a:avLst/>
@@ -8122,136 +7689,33 @@
           <a:p>
             <a:pPr algn="l"/>
             <a:r>
-              <a:rPr sz="1400" b="1" i="0">
-                <a:solidFill>
-                  <a:srgbClr val="FFFFFF"/>
-                </a:solidFill>
-                <a:latin typeface="Calibri"/>
-              </a:rPr>
-              <a:t>Star — 3f336702</a:t>
-            </a:r>
-          </a:p>
-        </p:txBody>
-      </p:sp>
-      <p:sp>
-        <p:nvSpPr>
-          <p:cNvPr id="8" name="TextBox 7"/>
-          <p:cNvSpPr txBox="1"/>
-          <p:nvPr/>
-        </p:nvSpPr>
-        <p:spPr>
-          <a:xfrm>
-            <a:off x="365760" y="1554480"/>
-            <a:ext cx="3611880" cy="4114800"/>
-          </a:xfrm>
-          <a:prstGeom prst="rect">
-            <a:avLst/>
-          </a:prstGeom>
-          <a:noFill/>
-        </p:spPr>
-        <p:txBody>
-          <a:bodyPr wrap="square">
-            <a:spAutoFit/>
-          </a:bodyPr>
-          <a:lstStyle/>
-          <a:p>
-            <a:pPr>
-              <a:spcBef>
-                <a:spcPts val="600"/>
-              </a:spcBef>
-            </a:pPr>
-            <a:r>
-              <a:rPr sz="1200">
-                <a:solidFill>
-                  <a:srgbClr val="FFFFFF"/>
-                </a:solidFill>
-                <a:latin typeface="Calibri"/>
-              </a:rPr>
-              <a:t>▸ 22 unique conditions across all waves</a:t>
-            </a:r>
-          </a:p>
-          <a:p>
-            <a:pPr>
-              <a:spcBef>
-                <a:spcPts val="600"/>
-              </a:spcBef>
-            </a:pPr>
-            <a:r>
-              <a:rPr sz="1200">
-                <a:solidFill>
-                  <a:srgbClr val="FFFFFF"/>
-                </a:solidFill>
-                <a:latin typeface="Calibri"/>
-              </a:rPr>
-              <a:t>▸ CHD persistent in 6 of 7 waves</a:t>
-            </a:r>
-          </a:p>
-          <a:p>
-            <a:pPr>
-              <a:spcBef>
-                <a:spcPts val="600"/>
-              </a:spcBef>
-            </a:pPr>
-            <a:r>
-              <a:rPr sz="1200">
-                <a:solidFill>
-                  <a:srgbClr val="FFFFFF"/>
-                </a:solidFill>
-                <a:latin typeface="Calibri"/>
-              </a:rPr>
-              <a:t>▸ Wave 1: 3 conditions → Wave 7: 22 conditions (7× growth)</a:t>
-            </a:r>
-          </a:p>
-          <a:p>
-            <a:pPr>
-              <a:spcBef>
-                <a:spcPts val="600"/>
-              </a:spcBef>
-            </a:pPr>
-            <a:r>
-              <a:rPr sz="1200">
-                <a:solidFill>
-                  <a:srgbClr val="FFFFFF"/>
-                </a:solidFill>
-                <a:latin typeface="Calibri"/>
-              </a:rPr>
-              <a:t>▸ Avg SBP Wave 5→6: +4 mmHg trend detectable</a:t>
-            </a:r>
-          </a:p>
-          <a:p>
-            <a:pPr>
-              <a:spcBef>
-                <a:spcPts val="600"/>
-              </a:spcBef>
-            </a:pPr>
-            <a:r>
-              <a:rPr sz="1200">
-                <a:solidFill>
-                  <a:srgbClr val="FFFFFF"/>
-                </a:solidFill>
-                <a:latin typeface="Calibri"/>
-              </a:rPr>
-              <a:t>▸ Greatest diagnostic complexity in cohort</a:t>
-            </a:r>
-          </a:p>
-        </p:txBody>
-      </p:sp>
-      <p:sp>
-        <p:nvSpPr>
-          <p:cNvPr id="9" name="Rectangle 8"/>
+              <a:rPr sz="1300" b="1" i="0">
+                <a:solidFill>
+                  <a:srgbClr val="FFFFFF"/>
+                </a:solidFill>
+                <a:latin typeface="Calibri"/>
+              </a:rPr>
+              <a:t>Role</a:t>
+            </a:r>
+          </a:p>
+        </p:txBody>
+      </p:sp>
+      <p:sp>
+        <p:nvSpPr>
+          <p:cNvPr id="8" name="Rectangle 7"/>
           <p:cNvSpPr/>
           <p:nvPr/>
         </p:nvSpPr>
         <p:spPr>
           <a:xfrm>
-            <a:off x="4251959" y="960120"/>
-            <a:ext cx="3794760" cy="5120640"/>
+            <a:off x="2011680" y="1005840"/>
+            <a:ext cx="1645920" cy="566928"/>
           </a:xfrm>
           <a:prstGeom prst="rect">
             <a:avLst/>
           </a:prstGeom>
           <a:solidFill>
-            <a:srgbClr val="4CAF50"/>
+            <a:srgbClr val="2196F3"/>
           </a:solidFill>
           <a:ln>
             <a:noFill/>
@@ -8281,14 +7745,14 @@
       </p:sp>
       <p:sp>
         <p:nvSpPr>
-          <p:cNvPr id="10" name="TextBox 9"/>
-          <p:cNvSpPr txBox="1"/>
-          <p:nvPr/>
-        </p:nvSpPr>
-        <p:spPr>
-          <a:xfrm>
-            <a:off x="4343399" y="1024128"/>
-            <a:ext cx="3611880" cy="457200"/>
+          <p:cNvPr id="9" name="TextBox 8"/>
+          <p:cNvSpPr txBox="1"/>
+          <p:nvPr/>
+        </p:nvSpPr>
+        <p:spPr>
+          <a:xfrm>
+            <a:off x="2057400" y="1133856"/>
+            <a:ext cx="1554480" cy="566928"/>
           </a:xfrm>
           <a:prstGeom prst="rect">
             <a:avLst/>
@@ -8301,136 +7765,33 @@
           <a:p>
             <a:pPr algn="l"/>
             <a:r>
-              <a:rPr sz="1400" b="1" i="0">
-                <a:solidFill>
-                  <a:srgbClr val="FFFFFF"/>
-                </a:solidFill>
-                <a:latin typeface="Calibri"/>
-              </a:rPr>
-              <a:t>Contrast — 1930a1b6</a:t>
-            </a:r>
-          </a:p>
-        </p:txBody>
-      </p:sp>
-      <p:sp>
-        <p:nvSpPr>
-          <p:cNvPr id="11" name="TextBox 10"/>
-          <p:cNvSpPr txBox="1"/>
-          <p:nvPr/>
-        </p:nvSpPr>
-        <p:spPr>
-          <a:xfrm>
-            <a:off x="4343399" y="1554480"/>
-            <a:ext cx="3611880" cy="4114800"/>
-          </a:xfrm>
-          <a:prstGeom prst="rect">
-            <a:avLst/>
-          </a:prstGeom>
-          <a:noFill/>
-        </p:spPr>
-        <p:txBody>
-          <a:bodyPr wrap="square">
-            <a:spAutoFit/>
-          </a:bodyPr>
-          <a:lstStyle/>
-          <a:p>
-            <a:pPr>
-              <a:spcBef>
-                <a:spcPts val="600"/>
-              </a:spcBef>
-            </a:pPr>
-            <a:r>
-              <a:rPr sz="1200">
-                <a:solidFill>
-                  <a:srgbClr val="FFFFFF"/>
-                </a:solidFill>
-                <a:latin typeface="Calibri"/>
-              </a:rPr>
-              <a:t>▸ Only 1 condition (Prediabetes) across all 7 waves</a:t>
-            </a:r>
-          </a:p>
-          <a:p>
-            <a:pPr>
-              <a:spcBef>
-                <a:spcPts val="600"/>
-              </a:spcBef>
-            </a:pPr>
-            <a:r>
-              <a:rPr sz="1200">
-                <a:solidFill>
-                  <a:srgbClr val="FFFFFF"/>
-                </a:solidFill>
-                <a:latin typeface="Calibri"/>
-              </a:rPr>
-              <a:t>▸ Full 7-wave longitudinal coverage achieved</a:t>
-            </a:r>
-          </a:p>
-          <a:p>
-            <a:pPr>
-              <a:spcBef>
-                <a:spcPts val="600"/>
-              </a:spcBef>
-            </a:pPr>
-            <a:r>
-              <a:rPr sz="1200">
-                <a:solidFill>
-                  <a:srgbClr val="FFFFFF"/>
-                </a:solidFill>
-                <a:latin typeface="Calibri"/>
-              </a:rPr>
-              <a:t>▸ Zero comorbidity — clinical baseline patient</a:t>
-            </a:r>
-          </a:p>
-          <a:p>
-            <a:pPr>
-              <a:spcBef>
-                <a:spcPts val="600"/>
-              </a:spcBef>
-            </a:pPr>
-            <a:r>
-              <a:rPr sz="1200">
-                <a:solidFill>
-                  <a:srgbClr val="FFFFFF"/>
-                </a:solidFill>
-                <a:latin typeface="Calibri"/>
-              </a:rPr>
-              <a:t>▸ Demonstrates max wave coverage is achievable</a:t>
-            </a:r>
-          </a:p>
-          <a:p>
-            <a:pPr>
-              <a:spcBef>
-                <a:spcPts val="600"/>
-              </a:spcBef>
-            </a:pPr>
-            <a:r>
-              <a:rPr sz="1200">
-                <a:solidFill>
-                  <a:srgbClr val="FFFFFF"/>
-                </a:solidFill>
-                <a:latin typeface="Calibri"/>
-              </a:rPr>
-              <a:t>▸ No medication records at any wave</a:t>
-            </a:r>
-          </a:p>
-        </p:txBody>
-      </p:sp>
-      <p:sp>
-        <p:nvSpPr>
-          <p:cNvPr id="12" name="Rectangle 11"/>
+              <a:rPr sz="1300" b="1" i="0">
+                <a:solidFill>
+                  <a:srgbClr val="FFFFFF"/>
+                </a:solidFill>
+                <a:latin typeface="Calibri"/>
+              </a:rPr>
+              <a:t>Patient ID</a:t>
+            </a:r>
+          </a:p>
+        </p:txBody>
+      </p:sp>
+      <p:sp>
+        <p:nvSpPr>
+          <p:cNvPr id="10" name="Rectangle 9"/>
           <p:cNvSpPr/>
           <p:nvPr/>
         </p:nvSpPr>
         <p:spPr>
           <a:xfrm>
-            <a:off x="8229598" y="960120"/>
-            <a:ext cx="3794760" cy="5120640"/>
+            <a:off x="3657600" y="1005840"/>
+            <a:ext cx="914400" cy="566928"/>
           </a:xfrm>
           <a:prstGeom prst="rect">
             <a:avLst/>
           </a:prstGeom>
           <a:solidFill>
-            <a:srgbClr val="FF9800"/>
+            <a:srgbClr val="2196F3"/>
           </a:solidFill>
           <a:ln>
             <a:noFill/>
@@ -8460,14 +7821,90 @@
       </p:sp>
       <p:sp>
         <p:nvSpPr>
+          <p:cNvPr id="11" name="TextBox 10"/>
+          <p:cNvSpPr txBox="1"/>
+          <p:nvPr/>
+        </p:nvSpPr>
+        <p:spPr>
+          <a:xfrm>
+            <a:off x="3703320" y="1133856"/>
+            <a:ext cx="822960" cy="566928"/>
+          </a:xfrm>
+          <a:prstGeom prst="rect">
+            <a:avLst/>
+          </a:prstGeom>
+          <a:noFill/>
+        </p:spPr>
+        <p:txBody>
+          <a:bodyPr wrap="square"/>
+          <a:lstStyle/>
+          <a:p>
+            <a:pPr algn="l"/>
+            <a:r>
+              <a:rPr sz="1300" b="1" i="0">
+                <a:solidFill>
+                  <a:srgbClr val="FFFFFF"/>
+                </a:solidFill>
+                <a:latin typeface="Calibri"/>
+              </a:rPr>
+              <a:t>Waves</a:t>
+            </a:r>
+          </a:p>
+        </p:txBody>
+      </p:sp>
+      <p:sp>
+        <p:nvSpPr>
+          <p:cNvPr id="12" name="Rectangle 11"/>
+          <p:cNvSpPr/>
+          <p:nvPr/>
+        </p:nvSpPr>
+        <p:spPr>
+          <a:xfrm>
+            <a:off x="4572000" y="1005840"/>
+            <a:ext cx="1371600" cy="566928"/>
+          </a:xfrm>
+          <a:prstGeom prst="rect">
+            <a:avLst/>
+          </a:prstGeom>
+          <a:solidFill>
+            <a:srgbClr val="2196F3"/>
+          </a:solidFill>
+          <a:ln>
+            <a:noFill/>
+          </a:ln>
+        </p:spPr>
+        <p:style>
+          <a:lnRef idx="1">
+            <a:schemeClr val="accent1"/>
+          </a:lnRef>
+          <a:fillRef idx="3">
+            <a:schemeClr val="accent1"/>
+          </a:fillRef>
+          <a:effectRef idx="2">
+            <a:schemeClr val="accent1"/>
+          </a:effectRef>
+          <a:fontRef idx="minor">
+            <a:schemeClr val="lt1"/>
+          </a:fontRef>
+        </p:style>
+        <p:txBody>
+          <a:bodyPr rtlCol="0" anchor="ctr"/>
+          <a:lstStyle/>
+          <a:p>
+            <a:pPr algn="ctr"/>
+          </a:p>
+        </p:txBody>
+      </p:sp>
+      <p:sp>
+        <p:nvSpPr>
           <p:cNvPr id="13" name="TextBox 12"/>
           <p:cNvSpPr txBox="1"/>
           <p:nvPr/>
         </p:nvSpPr>
         <p:spPr>
           <a:xfrm>
-            <a:off x="8321038" y="1024128"/>
-            <a:ext cx="3611880" cy="457200"/>
+            <a:off x="4617720" y="1133856"/>
+            <a:ext cx="1280160" cy="566928"/>
           </a:xfrm>
           <a:prstGeom prst="rect">
             <a:avLst/>
@@ -8480,116 +7917,1589 @@
           <a:p>
             <a:pPr algn="l"/>
             <a:r>
-              <a:rPr sz="1400" b="1" i="0">
-                <a:solidFill>
-                  <a:srgbClr val="FFFFFF"/>
-                </a:solidFill>
-                <a:latin typeface="Calibri"/>
-              </a:rPr>
-              <a:t>Comorbid — 3b95da79</a:t>
-            </a:r>
-          </a:p>
-        </p:txBody>
-      </p:sp>
-      <p:sp>
-        <p:nvSpPr>
-          <p:cNvPr id="14" name="TextBox 13"/>
-          <p:cNvSpPr txBox="1"/>
-          <p:nvPr/>
-        </p:nvSpPr>
-        <p:spPr>
-          <a:xfrm>
-            <a:off x="8321038" y="1554480"/>
-            <a:ext cx="3611880" cy="4114800"/>
-          </a:xfrm>
-          <a:prstGeom prst="rect">
-            <a:avLst/>
-          </a:prstGeom>
-          <a:noFill/>
-        </p:spPr>
-        <p:txBody>
-          <a:bodyPr wrap="square">
-            <a:spAutoFit/>
-          </a:bodyPr>
-          <a:lstStyle/>
-          <a:p>
-            <a:pPr>
-              <a:spcBef>
-                <a:spcPts val="600"/>
-              </a:spcBef>
-            </a:pPr>
-            <a:r>
-              <a:rPr sz="1200">
-                <a:solidFill>
-                  <a:srgbClr val="FFFFFF"/>
-                </a:solidFill>
-                <a:latin typeface="Calibri"/>
-              </a:rPr>
-              <a:t>▸ 14 conditions; HTN + T2D from Wave 2 onward</a:t>
-            </a:r>
-          </a:p>
-          <a:p>
-            <a:pPr>
-              <a:spcBef>
-                <a:spcPts val="600"/>
-              </a:spcBef>
-            </a:pPr>
-            <a:r>
-              <a:rPr sz="1200">
-                <a:solidFill>
-                  <a:srgbClr val="FFFFFF"/>
-                </a:solidFill>
-                <a:latin typeface="Calibri"/>
-              </a:rPr>
-              <a:t>▸ Monotonically increasing condition burden</a:t>
-            </a:r>
-          </a:p>
-          <a:p>
-            <a:pPr>
-              <a:spcBef>
-                <a:spcPts val="600"/>
-              </a:spcBef>
-            </a:pPr>
-            <a:r>
-              <a:rPr sz="1200">
-                <a:solidFill>
-                  <a:srgbClr val="FFFFFF"/>
-                </a:solidFill>
-                <a:latin typeface="Calibri"/>
-              </a:rPr>
-              <a:t>▸ Antihypertensives prescribed Wave 2–7</a:t>
-            </a:r>
-          </a:p>
-          <a:p>
-            <a:pPr>
-              <a:spcBef>
-                <a:spcPts val="600"/>
-              </a:spcBef>
-            </a:pPr>
-            <a:r>
-              <a:rPr sz="1200">
-                <a:solidFill>
-                  <a:srgbClr val="FFFFFF"/>
-                </a:solidFill>
-                <a:latin typeface="Calibri"/>
-              </a:rPr>
-              <a:t>▸ Pre/post-HTN SBP comparison: multi-hop benchmark query</a:t>
-            </a:r>
-          </a:p>
-          <a:p>
-            <a:pPr>
-              <a:spcBef>
-                <a:spcPts val="600"/>
-              </a:spcBef>
-            </a:pPr>
-            <a:r>
-              <a:rPr sz="1200">
-                <a:solidFill>
-                  <a:srgbClr val="FFFFFF"/>
-                </a:solidFill>
-                <a:latin typeface="Calibri"/>
-              </a:rPr>
-              <a:t>▸ Highest comorbidity complexity of any patient</a:t>
+              <a:rPr sz="1300" b="1" i="0">
+                <a:solidFill>
+                  <a:srgbClr val="FFFFFF"/>
+                </a:solidFill>
+                <a:latin typeface="Calibri"/>
+              </a:rPr>
+              <a:t>Conditions</a:t>
+            </a:r>
+          </a:p>
+        </p:txBody>
+      </p:sp>
+      <p:sp>
+        <p:nvSpPr>
+          <p:cNvPr id="14" name="Rectangle 13"/>
+          <p:cNvSpPr/>
+          <p:nvPr/>
+        </p:nvSpPr>
+        <p:spPr>
+          <a:xfrm>
+            <a:off x="5943600" y="1005840"/>
+            <a:ext cx="6035040" cy="566928"/>
+          </a:xfrm>
+          <a:prstGeom prst="rect">
+            <a:avLst/>
+          </a:prstGeom>
+          <a:solidFill>
+            <a:srgbClr val="2196F3"/>
+          </a:solidFill>
+          <a:ln>
+            <a:noFill/>
+          </a:ln>
+        </p:spPr>
+        <p:style>
+          <a:lnRef idx="1">
+            <a:schemeClr val="accent1"/>
+          </a:lnRef>
+          <a:fillRef idx="3">
+            <a:schemeClr val="accent1"/>
+          </a:fillRef>
+          <a:effectRef idx="2">
+            <a:schemeClr val="accent1"/>
+          </a:effectRef>
+          <a:fontRef idx="minor">
+            <a:schemeClr val="lt1"/>
+          </a:fontRef>
+        </p:style>
+        <p:txBody>
+          <a:bodyPr rtlCol="0" anchor="ctr"/>
+          <a:lstStyle/>
+          <a:p>
+            <a:pPr algn="ctr"/>
+          </a:p>
+        </p:txBody>
+      </p:sp>
+      <p:sp>
+        <p:nvSpPr>
+          <p:cNvPr id="15" name="TextBox 14"/>
+          <p:cNvSpPr txBox="1"/>
+          <p:nvPr/>
+        </p:nvSpPr>
+        <p:spPr>
+          <a:xfrm>
+            <a:off x="5989320" y="1133856"/>
+            <a:ext cx="5943600" cy="566928"/>
+          </a:xfrm>
+          <a:prstGeom prst="rect">
+            <a:avLst/>
+          </a:prstGeom>
+          <a:noFill/>
+        </p:spPr>
+        <p:txBody>
+          <a:bodyPr wrap="square"/>
+          <a:lstStyle/>
+          <a:p>
+            <a:pPr algn="l"/>
+            <a:r>
+              <a:rPr sz="1300" b="1" i="0">
+                <a:solidFill>
+                  <a:srgbClr val="FFFFFF"/>
+                </a:solidFill>
+                <a:latin typeface="Calibri"/>
+              </a:rPr>
+              <a:t>Key Feature</a:t>
+            </a:r>
+          </a:p>
+        </p:txBody>
+      </p:sp>
+      <p:sp>
+        <p:nvSpPr>
+          <p:cNvPr id="16" name="Rectangle 15"/>
+          <p:cNvSpPr/>
+          <p:nvPr/>
+        </p:nvSpPr>
+        <p:spPr>
+          <a:xfrm>
+            <a:off x="365760" y="1572768"/>
+            <a:ext cx="1645920" cy="566928"/>
+          </a:xfrm>
+          <a:prstGeom prst="rect">
+            <a:avLst/>
+          </a:prstGeom>
+          <a:solidFill>
+            <a:srgbClr val="0D274A"/>
+          </a:solidFill>
+          <a:ln>
+            <a:noFill/>
+          </a:ln>
+        </p:spPr>
+        <p:style>
+          <a:lnRef idx="1">
+            <a:schemeClr val="accent1"/>
+          </a:lnRef>
+          <a:fillRef idx="3">
+            <a:schemeClr val="accent1"/>
+          </a:fillRef>
+          <a:effectRef idx="2">
+            <a:schemeClr val="accent1"/>
+          </a:effectRef>
+          <a:fontRef idx="minor">
+            <a:schemeClr val="lt1"/>
+          </a:fontRef>
+        </p:style>
+        <p:txBody>
+          <a:bodyPr rtlCol="0" anchor="ctr"/>
+          <a:lstStyle/>
+          <a:p>
+            <a:pPr algn="ctr"/>
+          </a:p>
+        </p:txBody>
+      </p:sp>
+      <p:sp>
+        <p:nvSpPr>
+          <p:cNvPr id="17" name="TextBox 16"/>
+          <p:cNvSpPr txBox="1"/>
+          <p:nvPr/>
+        </p:nvSpPr>
+        <p:spPr>
+          <a:xfrm>
+            <a:off x="411480" y="1682496"/>
+            <a:ext cx="1554480" cy="566928"/>
+          </a:xfrm>
+          <a:prstGeom prst="rect">
+            <a:avLst/>
+          </a:prstGeom>
+          <a:noFill/>
+        </p:spPr>
+        <p:txBody>
+          <a:bodyPr wrap="square"/>
+          <a:lstStyle/>
+          <a:p>
+            <a:pPr algn="l"/>
+            <a:r>
+              <a:rPr sz="1200" b="1" i="0">
+                <a:solidFill>
+                  <a:srgbClr val="FFFFFF"/>
+                </a:solidFill>
+                <a:latin typeface="Calibri"/>
+              </a:rPr>
+              <a:t>Star</a:t>
+            </a:r>
+          </a:p>
+        </p:txBody>
+      </p:sp>
+      <p:sp>
+        <p:nvSpPr>
+          <p:cNvPr id="18" name="Rectangle 17"/>
+          <p:cNvSpPr/>
+          <p:nvPr/>
+        </p:nvSpPr>
+        <p:spPr>
+          <a:xfrm>
+            <a:off x="2011680" y="1572768"/>
+            <a:ext cx="1645920" cy="566928"/>
+          </a:xfrm>
+          <a:prstGeom prst="rect">
+            <a:avLst/>
+          </a:prstGeom>
+          <a:solidFill>
+            <a:srgbClr val="0D274A"/>
+          </a:solidFill>
+          <a:ln>
+            <a:noFill/>
+          </a:ln>
+        </p:spPr>
+        <p:style>
+          <a:lnRef idx="1">
+            <a:schemeClr val="accent1"/>
+          </a:lnRef>
+          <a:fillRef idx="3">
+            <a:schemeClr val="accent1"/>
+          </a:fillRef>
+          <a:effectRef idx="2">
+            <a:schemeClr val="accent1"/>
+          </a:effectRef>
+          <a:fontRef idx="minor">
+            <a:schemeClr val="lt1"/>
+          </a:fontRef>
+        </p:style>
+        <p:txBody>
+          <a:bodyPr rtlCol="0" anchor="ctr"/>
+          <a:lstStyle/>
+          <a:p>
+            <a:pPr algn="ctr"/>
+          </a:p>
+        </p:txBody>
+      </p:sp>
+      <p:sp>
+        <p:nvSpPr>
+          <p:cNvPr id="19" name="TextBox 18"/>
+          <p:cNvSpPr txBox="1"/>
+          <p:nvPr/>
+        </p:nvSpPr>
+        <p:spPr>
+          <a:xfrm>
+            <a:off x="2057400" y="1682496"/>
+            <a:ext cx="1554480" cy="566928"/>
+          </a:xfrm>
+          <a:prstGeom prst="rect">
+            <a:avLst/>
+          </a:prstGeom>
+          <a:noFill/>
+        </p:spPr>
+        <p:txBody>
+          <a:bodyPr wrap="square"/>
+          <a:lstStyle/>
+          <a:p>
+            <a:pPr algn="l"/>
+            <a:r>
+              <a:rPr sz="1200" b="0" i="0">
+                <a:solidFill>
+                  <a:srgbClr val="FFFFFF"/>
+                </a:solidFill>
+                <a:latin typeface="Calibri"/>
+              </a:rPr>
+              <a:t>3f336702</a:t>
+            </a:r>
+          </a:p>
+        </p:txBody>
+      </p:sp>
+      <p:sp>
+        <p:nvSpPr>
+          <p:cNvPr id="20" name="Rectangle 19"/>
+          <p:cNvSpPr/>
+          <p:nvPr/>
+        </p:nvSpPr>
+        <p:spPr>
+          <a:xfrm>
+            <a:off x="3657600" y="1572768"/>
+            <a:ext cx="914400" cy="566928"/>
+          </a:xfrm>
+          <a:prstGeom prst="rect">
+            <a:avLst/>
+          </a:prstGeom>
+          <a:solidFill>
+            <a:srgbClr val="0D274A"/>
+          </a:solidFill>
+          <a:ln>
+            <a:noFill/>
+          </a:ln>
+        </p:spPr>
+        <p:style>
+          <a:lnRef idx="1">
+            <a:schemeClr val="accent1"/>
+          </a:lnRef>
+          <a:fillRef idx="3">
+            <a:schemeClr val="accent1"/>
+          </a:fillRef>
+          <a:effectRef idx="2">
+            <a:schemeClr val="accent1"/>
+          </a:effectRef>
+          <a:fontRef idx="minor">
+            <a:schemeClr val="lt1"/>
+          </a:fontRef>
+        </p:style>
+        <p:txBody>
+          <a:bodyPr rtlCol="0" anchor="ctr"/>
+          <a:lstStyle/>
+          <a:p>
+            <a:pPr algn="ctr"/>
+          </a:p>
+        </p:txBody>
+      </p:sp>
+      <p:sp>
+        <p:nvSpPr>
+          <p:cNvPr id="21" name="TextBox 20"/>
+          <p:cNvSpPr txBox="1"/>
+          <p:nvPr/>
+        </p:nvSpPr>
+        <p:spPr>
+          <a:xfrm>
+            <a:off x="3703320" y="1682496"/>
+            <a:ext cx="822960" cy="566928"/>
+          </a:xfrm>
+          <a:prstGeom prst="rect">
+            <a:avLst/>
+          </a:prstGeom>
+          <a:noFill/>
+        </p:spPr>
+        <p:txBody>
+          <a:bodyPr wrap="square"/>
+          <a:lstStyle/>
+          <a:p>
+            <a:pPr algn="l"/>
+            <a:r>
+              <a:rPr sz="1200" b="0" i="0">
+                <a:solidFill>
+                  <a:srgbClr val="FFFFFF"/>
+                </a:solidFill>
+                <a:latin typeface="Calibri"/>
+              </a:rPr>
+              <a:t>7</a:t>
+            </a:r>
+          </a:p>
+        </p:txBody>
+      </p:sp>
+      <p:sp>
+        <p:nvSpPr>
+          <p:cNvPr id="22" name="Rectangle 21"/>
+          <p:cNvSpPr/>
+          <p:nvPr/>
+        </p:nvSpPr>
+        <p:spPr>
+          <a:xfrm>
+            <a:off x="4572000" y="1572768"/>
+            <a:ext cx="1371600" cy="566928"/>
+          </a:xfrm>
+          <a:prstGeom prst="rect">
+            <a:avLst/>
+          </a:prstGeom>
+          <a:solidFill>
+            <a:srgbClr val="0D274A"/>
+          </a:solidFill>
+          <a:ln>
+            <a:noFill/>
+          </a:ln>
+        </p:spPr>
+        <p:style>
+          <a:lnRef idx="1">
+            <a:schemeClr val="accent1"/>
+          </a:lnRef>
+          <a:fillRef idx="3">
+            <a:schemeClr val="accent1"/>
+          </a:fillRef>
+          <a:effectRef idx="2">
+            <a:schemeClr val="accent1"/>
+          </a:effectRef>
+          <a:fontRef idx="minor">
+            <a:schemeClr val="lt1"/>
+          </a:fontRef>
+        </p:style>
+        <p:txBody>
+          <a:bodyPr rtlCol="0" anchor="ctr"/>
+          <a:lstStyle/>
+          <a:p>
+            <a:pPr algn="ctr"/>
+          </a:p>
+        </p:txBody>
+      </p:sp>
+      <p:sp>
+        <p:nvSpPr>
+          <p:cNvPr id="23" name="TextBox 22"/>
+          <p:cNvSpPr txBox="1"/>
+          <p:nvPr/>
+        </p:nvSpPr>
+        <p:spPr>
+          <a:xfrm>
+            <a:off x="4617720" y="1682496"/>
+            <a:ext cx="1280160" cy="566928"/>
+          </a:xfrm>
+          <a:prstGeom prst="rect">
+            <a:avLst/>
+          </a:prstGeom>
+          <a:noFill/>
+        </p:spPr>
+        <p:txBody>
+          <a:bodyPr wrap="square"/>
+          <a:lstStyle/>
+          <a:p>
+            <a:pPr algn="l"/>
+            <a:r>
+              <a:rPr sz="1200" b="0" i="0">
+                <a:solidFill>
+                  <a:srgbClr val="FFFFFF"/>
+                </a:solidFill>
+                <a:latin typeface="Calibri"/>
+              </a:rPr>
+              <a:t>22</a:t>
+            </a:r>
+          </a:p>
+        </p:txBody>
+      </p:sp>
+      <p:sp>
+        <p:nvSpPr>
+          <p:cNvPr id="24" name="Rectangle 23"/>
+          <p:cNvSpPr/>
+          <p:nvPr/>
+        </p:nvSpPr>
+        <p:spPr>
+          <a:xfrm>
+            <a:off x="5943600" y="1572768"/>
+            <a:ext cx="6035040" cy="566928"/>
+          </a:xfrm>
+          <a:prstGeom prst="rect">
+            <a:avLst/>
+          </a:prstGeom>
+          <a:solidFill>
+            <a:srgbClr val="0D274A"/>
+          </a:solidFill>
+          <a:ln>
+            <a:noFill/>
+          </a:ln>
+        </p:spPr>
+        <p:style>
+          <a:lnRef idx="1">
+            <a:schemeClr val="accent1"/>
+          </a:lnRef>
+          <a:fillRef idx="3">
+            <a:schemeClr val="accent1"/>
+          </a:fillRef>
+          <a:effectRef idx="2">
+            <a:schemeClr val="accent1"/>
+          </a:effectRef>
+          <a:fontRef idx="minor">
+            <a:schemeClr val="lt1"/>
+          </a:fontRef>
+        </p:style>
+        <p:txBody>
+          <a:bodyPr rtlCol="0" anchor="ctr"/>
+          <a:lstStyle/>
+          <a:p>
+            <a:pPr algn="ctr"/>
+          </a:p>
+        </p:txBody>
+      </p:sp>
+      <p:sp>
+        <p:nvSpPr>
+          <p:cNvPr id="25" name="TextBox 24"/>
+          <p:cNvSpPr txBox="1"/>
+          <p:nvPr/>
+        </p:nvSpPr>
+        <p:spPr>
+          <a:xfrm>
+            <a:off x="5989320" y="1682496"/>
+            <a:ext cx="5943600" cy="566928"/>
+          </a:xfrm>
+          <a:prstGeom prst="rect">
+            <a:avLst/>
+          </a:prstGeom>
+          <a:noFill/>
+        </p:spPr>
+        <p:txBody>
+          <a:bodyPr wrap="square"/>
+          <a:lstStyle/>
+          <a:p>
+            <a:pPr algn="l"/>
+            <a:r>
+              <a:rPr sz="1200" b="0" i="0">
+                <a:solidFill>
+                  <a:srgbClr val="FFFFFF"/>
+                </a:solidFill>
+                <a:latin typeface="Calibri"/>
+              </a:rPr>
+              <a:t>Coronary Heart Disease × 6 waves; 7× burden increase</a:t>
+            </a:r>
+          </a:p>
+        </p:txBody>
+      </p:sp>
+      <p:sp>
+        <p:nvSpPr>
+          <p:cNvPr id="26" name="Rectangle 25"/>
+          <p:cNvSpPr/>
+          <p:nvPr/>
+        </p:nvSpPr>
+        <p:spPr>
+          <a:xfrm>
+            <a:off x="365760" y="2139696"/>
+            <a:ext cx="1645920" cy="566928"/>
+          </a:xfrm>
+          <a:prstGeom prst="rect">
+            <a:avLst/>
+          </a:prstGeom>
+          <a:solidFill>
+            <a:srgbClr val="1B3A2A"/>
+          </a:solidFill>
+          <a:ln>
+            <a:noFill/>
+          </a:ln>
+        </p:spPr>
+        <p:style>
+          <a:lnRef idx="1">
+            <a:schemeClr val="accent1"/>
+          </a:lnRef>
+          <a:fillRef idx="3">
+            <a:schemeClr val="accent1"/>
+          </a:fillRef>
+          <a:effectRef idx="2">
+            <a:schemeClr val="accent1"/>
+          </a:effectRef>
+          <a:fontRef idx="minor">
+            <a:schemeClr val="lt1"/>
+          </a:fontRef>
+        </p:style>
+        <p:txBody>
+          <a:bodyPr rtlCol="0" anchor="ctr"/>
+          <a:lstStyle/>
+          <a:p>
+            <a:pPr algn="ctr"/>
+          </a:p>
+        </p:txBody>
+      </p:sp>
+      <p:sp>
+        <p:nvSpPr>
+          <p:cNvPr id="27" name="TextBox 26"/>
+          <p:cNvSpPr txBox="1"/>
+          <p:nvPr/>
+        </p:nvSpPr>
+        <p:spPr>
+          <a:xfrm>
+            <a:off x="411480" y="2249424"/>
+            <a:ext cx="1554480" cy="566928"/>
+          </a:xfrm>
+          <a:prstGeom prst="rect">
+            <a:avLst/>
+          </a:prstGeom>
+          <a:noFill/>
+        </p:spPr>
+        <p:txBody>
+          <a:bodyPr wrap="square"/>
+          <a:lstStyle/>
+          <a:p>
+            <a:pPr algn="l"/>
+            <a:r>
+              <a:rPr sz="1200" b="1" i="0">
+                <a:solidFill>
+                  <a:srgbClr val="FFFFFF"/>
+                </a:solidFill>
+                <a:latin typeface="Calibri"/>
+              </a:rPr>
+              <a:t>Contrast</a:t>
+            </a:r>
+          </a:p>
+        </p:txBody>
+      </p:sp>
+      <p:sp>
+        <p:nvSpPr>
+          <p:cNvPr id="28" name="Rectangle 27"/>
+          <p:cNvSpPr/>
+          <p:nvPr/>
+        </p:nvSpPr>
+        <p:spPr>
+          <a:xfrm>
+            <a:off x="2011680" y="2139696"/>
+            <a:ext cx="1645920" cy="566928"/>
+          </a:xfrm>
+          <a:prstGeom prst="rect">
+            <a:avLst/>
+          </a:prstGeom>
+          <a:solidFill>
+            <a:srgbClr val="1B3A2A"/>
+          </a:solidFill>
+          <a:ln>
+            <a:noFill/>
+          </a:ln>
+        </p:spPr>
+        <p:style>
+          <a:lnRef idx="1">
+            <a:schemeClr val="accent1"/>
+          </a:lnRef>
+          <a:fillRef idx="3">
+            <a:schemeClr val="accent1"/>
+          </a:fillRef>
+          <a:effectRef idx="2">
+            <a:schemeClr val="accent1"/>
+          </a:effectRef>
+          <a:fontRef idx="minor">
+            <a:schemeClr val="lt1"/>
+          </a:fontRef>
+        </p:style>
+        <p:txBody>
+          <a:bodyPr rtlCol="0" anchor="ctr"/>
+          <a:lstStyle/>
+          <a:p>
+            <a:pPr algn="ctr"/>
+          </a:p>
+        </p:txBody>
+      </p:sp>
+      <p:sp>
+        <p:nvSpPr>
+          <p:cNvPr id="29" name="TextBox 28"/>
+          <p:cNvSpPr txBox="1"/>
+          <p:nvPr/>
+        </p:nvSpPr>
+        <p:spPr>
+          <a:xfrm>
+            <a:off x="2057400" y="2249424"/>
+            <a:ext cx="1554480" cy="566928"/>
+          </a:xfrm>
+          <a:prstGeom prst="rect">
+            <a:avLst/>
+          </a:prstGeom>
+          <a:noFill/>
+        </p:spPr>
+        <p:txBody>
+          <a:bodyPr wrap="square"/>
+          <a:lstStyle/>
+          <a:p>
+            <a:pPr algn="l"/>
+            <a:r>
+              <a:rPr sz="1200" b="0" i="0">
+                <a:solidFill>
+                  <a:srgbClr val="FFFFFF"/>
+                </a:solidFill>
+                <a:latin typeface="Calibri"/>
+              </a:rPr>
+              <a:t>1930a1b6</a:t>
+            </a:r>
+          </a:p>
+        </p:txBody>
+      </p:sp>
+      <p:sp>
+        <p:nvSpPr>
+          <p:cNvPr id="30" name="Rectangle 29"/>
+          <p:cNvSpPr/>
+          <p:nvPr/>
+        </p:nvSpPr>
+        <p:spPr>
+          <a:xfrm>
+            <a:off x="3657600" y="2139696"/>
+            <a:ext cx="914400" cy="566928"/>
+          </a:xfrm>
+          <a:prstGeom prst="rect">
+            <a:avLst/>
+          </a:prstGeom>
+          <a:solidFill>
+            <a:srgbClr val="1B3A2A"/>
+          </a:solidFill>
+          <a:ln>
+            <a:noFill/>
+          </a:ln>
+        </p:spPr>
+        <p:style>
+          <a:lnRef idx="1">
+            <a:schemeClr val="accent1"/>
+          </a:lnRef>
+          <a:fillRef idx="3">
+            <a:schemeClr val="accent1"/>
+          </a:fillRef>
+          <a:effectRef idx="2">
+            <a:schemeClr val="accent1"/>
+          </a:effectRef>
+          <a:fontRef idx="minor">
+            <a:schemeClr val="lt1"/>
+          </a:fontRef>
+        </p:style>
+        <p:txBody>
+          <a:bodyPr rtlCol="0" anchor="ctr"/>
+          <a:lstStyle/>
+          <a:p>
+            <a:pPr algn="ctr"/>
+          </a:p>
+        </p:txBody>
+      </p:sp>
+      <p:sp>
+        <p:nvSpPr>
+          <p:cNvPr id="31" name="TextBox 30"/>
+          <p:cNvSpPr txBox="1"/>
+          <p:nvPr/>
+        </p:nvSpPr>
+        <p:spPr>
+          <a:xfrm>
+            <a:off x="3703320" y="2249424"/>
+            <a:ext cx="822960" cy="566928"/>
+          </a:xfrm>
+          <a:prstGeom prst="rect">
+            <a:avLst/>
+          </a:prstGeom>
+          <a:noFill/>
+        </p:spPr>
+        <p:txBody>
+          <a:bodyPr wrap="square"/>
+          <a:lstStyle/>
+          <a:p>
+            <a:pPr algn="l"/>
+            <a:r>
+              <a:rPr sz="1200" b="0" i="0">
+                <a:solidFill>
+                  <a:srgbClr val="FFFFFF"/>
+                </a:solidFill>
+                <a:latin typeface="Calibri"/>
+              </a:rPr>
+              <a:t>7</a:t>
+            </a:r>
+          </a:p>
+        </p:txBody>
+      </p:sp>
+      <p:sp>
+        <p:nvSpPr>
+          <p:cNvPr id="32" name="Rectangle 31"/>
+          <p:cNvSpPr/>
+          <p:nvPr/>
+        </p:nvSpPr>
+        <p:spPr>
+          <a:xfrm>
+            <a:off x="4572000" y="2139696"/>
+            <a:ext cx="1371600" cy="566928"/>
+          </a:xfrm>
+          <a:prstGeom prst="rect">
+            <a:avLst/>
+          </a:prstGeom>
+          <a:solidFill>
+            <a:srgbClr val="1B3A2A"/>
+          </a:solidFill>
+          <a:ln>
+            <a:noFill/>
+          </a:ln>
+        </p:spPr>
+        <p:style>
+          <a:lnRef idx="1">
+            <a:schemeClr val="accent1"/>
+          </a:lnRef>
+          <a:fillRef idx="3">
+            <a:schemeClr val="accent1"/>
+          </a:fillRef>
+          <a:effectRef idx="2">
+            <a:schemeClr val="accent1"/>
+          </a:effectRef>
+          <a:fontRef idx="minor">
+            <a:schemeClr val="lt1"/>
+          </a:fontRef>
+        </p:style>
+        <p:txBody>
+          <a:bodyPr rtlCol="0" anchor="ctr"/>
+          <a:lstStyle/>
+          <a:p>
+            <a:pPr algn="ctr"/>
+          </a:p>
+        </p:txBody>
+      </p:sp>
+      <p:sp>
+        <p:nvSpPr>
+          <p:cNvPr id="33" name="TextBox 32"/>
+          <p:cNvSpPr txBox="1"/>
+          <p:nvPr/>
+        </p:nvSpPr>
+        <p:spPr>
+          <a:xfrm>
+            <a:off x="4617720" y="2249424"/>
+            <a:ext cx="1280160" cy="566928"/>
+          </a:xfrm>
+          <a:prstGeom prst="rect">
+            <a:avLst/>
+          </a:prstGeom>
+          <a:noFill/>
+        </p:spPr>
+        <p:txBody>
+          <a:bodyPr wrap="square"/>
+          <a:lstStyle/>
+          <a:p>
+            <a:pPr algn="l"/>
+            <a:r>
+              <a:rPr sz="1200" b="0" i="0">
+                <a:solidFill>
+                  <a:srgbClr val="FFFFFF"/>
+                </a:solidFill>
+                <a:latin typeface="Calibri"/>
+              </a:rPr>
+              <a:t>1</a:t>
+            </a:r>
+          </a:p>
+        </p:txBody>
+      </p:sp>
+      <p:sp>
+        <p:nvSpPr>
+          <p:cNvPr id="34" name="Rectangle 33"/>
+          <p:cNvSpPr/>
+          <p:nvPr/>
+        </p:nvSpPr>
+        <p:spPr>
+          <a:xfrm>
+            <a:off x="5943600" y="2139696"/>
+            <a:ext cx="6035040" cy="566928"/>
+          </a:xfrm>
+          <a:prstGeom prst="rect">
+            <a:avLst/>
+          </a:prstGeom>
+          <a:solidFill>
+            <a:srgbClr val="1B3A2A"/>
+          </a:solidFill>
+          <a:ln>
+            <a:noFill/>
+          </a:ln>
+        </p:spPr>
+        <p:style>
+          <a:lnRef idx="1">
+            <a:schemeClr val="accent1"/>
+          </a:lnRef>
+          <a:fillRef idx="3">
+            <a:schemeClr val="accent1"/>
+          </a:fillRef>
+          <a:effectRef idx="2">
+            <a:schemeClr val="accent1"/>
+          </a:effectRef>
+          <a:fontRef idx="minor">
+            <a:schemeClr val="lt1"/>
+          </a:fontRef>
+        </p:style>
+        <p:txBody>
+          <a:bodyPr rtlCol="0" anchor="ctr"/>
+          <a:lstStyle/>
+          <a:p>
+            <a:pPr algn="ctr"/>
+          </a:p>
+        </p:txBody>
+      </p:sp>
+      <p:sp>
+        <p:nvSpPr>
+          <p:cNvPr id="35" name="TextBox 34"/>
+          <p:cNvSpPr txBox="1"/>
+          <p:nvPr/>
+        </p:nvSpPr>
+        <p:spPr>
+          <a:xfrm>
+            <a:off x="5989320" y="2249424"/>
+            <a:ext cx="5943600" cy="566928"/>
+          </a:xfrm>
+          <a:prstGeom prst="rect">
+            <a:avLst/>
+          </a:prstGeom>
+          <a:noFill/>
+        </p:spPr>
+        <p:txBody>
+          <a:bodyPr wrap="square"/>
+          <a:lstStyle/>
+          <a:p>
+            <a:pPr algn="l"/>
+            <a:r>
+              <a:rPr sz="1200" b="0" i="0">
+                <a:solidFill>
+                  <a:srgbClr val="FFFFFF"/>
+                </a:solidFill>
+                <a:latin typeface="Calibri"/>
+              </a:rPr>
+              <a:t>Most stable: 7 waves, 1 condition, maximum coverage</a:t>
+            </a:r>
+          </a:p>
+        </p:txBody>
+      </p:sp>
+      <p:sp>
+        <p:nvSpPr>
+          <p:cNvPr id="36" name="Rectangle 35"/>
+          <p:cNvSpPr/>
+          <p:nvPr/>
+        </p:nvSpPr>
+        <p:spPr>
+          <a:xfrm>
+            <a:off x="365760" y="2706624"/>
+            <a:ext cx="1645920" cy="566928"/>
+          </a:xfrm>
+          <a:prstGeom prst="rect">
+            <a:avLst/>
+          </a:prstGeom>
+          <a:solidFill>
+            <a:srgbClr val="3E1A1A"/>
+          </a:solidFill>
+          <a:ln>
+            <a:noFill/>
+          </a:ln>
+        </p:spPr>
+        <p:style>
+          <a:lnRef idx="1">
+            <a:schemeClr val="accent1"/>
+          </a:lnRef>
+          <a:fillRef idx="3">
+            <a:schemeClr val="accent1"/>
+          </a:fillRef>
+          <a:effectRef idx="2">
+            <a:schemeClr val="accent1"/>
+          </a:effectRef>
+          <a:fontRef idx="minor">
+            <a:schemeClr val="lt1"/>
+          </a:fontRef>
+        </p:style>
+        <p:txBody>
+          <a:bodyPr rtlCol="0" anchor="ctr"/>
+          <a:lstStyle/>
+          <a:p>
+            <a:pPr algn="ctr"/>
+          </a:p>
+        </p:txBody>
+      </p:sp>
+      <p:sp>
+        <p:nvSpPr>
+          <p:cNvPr id="37" name="TextBox 36"/>
+          <p:cNvSpPr txBox="1"/>
+          <p:nvPr/>
+        </p:nvSpPr>
+        <p:spPr>
+          <a:xfrm>
+            <a:off x="411480" y="2816352"/>
+            <a:ext cx="1554480" cy="566928"/>
+          </a:xfrm>
+          <a:prstGeom prst="rect">
+            <a:avLst/>
+          </a:prstGeom>
+          <a:noFill/>
+        </p:spPr>
+        <p:txBody>
+          <a:bodyPr wrap="square"/>
+          <a:lstStyle/>
+          <a:p>
+            <a:pPr algn="l"/>
+            <a:r>
+              <a:rPr sz="1200" b="1" i="0">
+                <a:solidFill>
+                  <a:srgbClr val="FFFFFF"/>
+                </a:solidFill>
+                <a:latin typeface="Calibri"/>
+              </a:rPr>
+              <a:t>Comorbid</a:t>
+            </a:r>
+          </a:p>
+        </p:txBody>
+      </p:sp>
+      <p:sp>
+        <p:nvSpPr>
+          <p:cNvPr id="38" name="Rectangle 37"/>
+          <p:cNvSpPr/>
+          <p:nvPr/>
+        </p:nvSpPr>
+        <p:spPr>
+          <a:xfrm>
+            <a:off x="2011680" y="2706624"/>
+            <a:ext cx="1645920" cy="566928"/>
+          </a:xfrm>
+          <a:prstGeom prst="rect">
+            <a:avLst/>
+          </a:prstGeom>
+          <a:solidFill>
+            <a:srgbClr val="3E1A1A"/>
+          </a:solidFill>
+          <a:ln>
+            <a:noFill/>
+          </a:ln>
+        </p:spPr>
+        <p:style>
+          <a:lnRef idx="1">
+            <a:schemeClr val="accent1"/>
+          </a:lnRef>
+          <a:fillRef idx="3">
+            <a:schemeClr val="accent1"/>
+          </a:fillRef>
+          <a:effectRef idx="2">
+            <a:schemeClr val="accent1"/>
+          </a:effectRef>
+          <a:fontRef idx="minor">
+            <a:schemeClr val="lt1"/>
+          </a:fontRef>
+        </p:style>
+        <p:txBody>
+          <a:bodyPr rtlCol="0" anchor="ctr"/>
+          <a:lstStyle/>
+          <a:p>
+            <a:pPr algn="ctr"/>
+          </a:p>
+        </p:txBody>
+      </p:sp>
+      <p:sp>
+        <p:nvSpPr>
+          <p:cNvPr id="39" name="TextBox 38"/>
+          <p:cNvSpPr txBox="1"/>
+          <p:nvPr/>
+        </p:nvSpPr>
+        <p:spPr>
+          <a:xfrm>
+            <a:off x="2057400" y="2816352"/>
+            <a:ext cx="1554480" cy="566928"/>
+          </a:xfrm>
+          <a:prstGeom prst="rect">
+            <a:avLst/>
+          </a:prstGeom>
+          <a:noFill/>
+        </p:spPr>
+        <p:txBody>
+          <a:bodyPr wrap="square"/>
+          <a:lstStyle/>
+          <a:p>
+            <a:pPr algn="l"/>
+            <a:r>
+              <a:rPr sz="1200" b="0" i="0">
+                <a:solidFill>
+                  <a:srgbClr val="FFFFFF"/>
+                </a:solidFill>
+                <a:latin typeface="Calibri"/>
+              </a:rPr>
+              <a:t>3b95da79</a:t>
+            </a:r>
+          </a:p>
+        </p:txBody>
+      </p:sp>
+      <p:sp>
+        <p:nvSpPr>
+          <p:cNvPr id="40" name="Rectangle 39"/>
+          <p:cNvSpPr/>
+          <p:nvPr/>
+        </p:nvSpPr>
+        <p:spPr>
+          <a:xfrm>
+            <a:off x="3657600" y="2706624"/>
+            <a:ext cx="914400" cy="566928"/>
+          </a:xfrm>
+          <a:prstGeom prst="rect">
+            <a:avLst/>
+          </a:prstGeom>
+          <a:solidFill>
+            <a:srgbClr val="3E1A1A"/>
+          </a:solidFill>
+          <a:ln>
+            <a:noFill/>
+          </a:ln>
+        </p:spPr>
+        <p:style>
+          <a:lnRef idx="1">
+            <a:schemeClr val="accent1"/>
+          </a:lnRef>
+          <a:fillRef idx="3">
+            <a:schemeClr val="accent1"/>
+          </a:fillRef>
+          <a:effectRef idx="2">
+            <a:schemeClr val="accent1"/>
+          </a:effectRef>
+          <a:fontRef idx="minor">
+            <a:schemeClr val="lt1"/>
+          </a:fontRef>
+        </p:style>
+        <p:txBody>
+          <a:bodyPr rtlCol="0" anchor="ctr"/>
+          <a:lstStyle/>
+          <a:p>
+            <a:pPr algn="ctr"/>
+          </a:p>
+        </p:txBody>
+      </p:sp>
+      <p:sp>
+        <p:nvSpPr>
+          <p:cNvPr id="41" name="TextBox 40"/>
+          <p:cNvSpPr txBox="1"/>
+          <p:nvPr/>
+        </p:nvSpPr>
+        <p:spPr>
+          <a:xfrm>
+            <a:off x="3703320" y="2816352"/>
+            <a:ext cx="822960" cy="566928"/>
+          </a:xfrm>
+          <a:prstGeom prst="rect">
+            <a:avLst/>
+          </a:prstGeom>
+          <a:noFill/>
+        </p:spPr>
+        <p:txBody>
+          <a:bodyPr wrap="square"/>
+          <a:lstStyle/>
+          <a:p>
+            <a:pPr algn="l"/>
+            <a:r>
+              <a:rPr sz="1200" b="0" i="0">
+                <a:solidFill>
+                  <a:srgbClr val="FFFFFF"/>
+                </a:solidFill>
+                <a:latin typeface="Calibri"/>
+              </a:rPr>
+              <a:t>7</a:t>
+            </a:r>
+          </a:p>
+        </p:txBody>
+      </p:sp>
+      <p:sp>
+        <p:nvSpPr>
+          <p:cNvPr id="42" name="Rectangle 41"/>
+          <p:cNvSpPr/>
+          <p:nvPr/>
+        </p:nvSpPr>
+        <p:spPr>
+          <a:xfrm>
+            <a:off x="4572000" y="2706624"/>
+            <a:ext cx="1371600" cy="566928"/>
+          </a:xfrm>
+          <a:prstGeom prst="rect">
+            <a:avLst/>
+          </a:prstGeom>
+          <a:solidFill>
+            <a:srgbClr val="3E1A1A"/>
+          </a:solidFill>
+          <a:ln>
+            <a:noFill/>
+          </a:ln>
+        </p:spPr>
+        <p:style>
+          <a:lnRef idx="1">
+            <a:schemeClr val="accent1"/>
+          </a:lnRef>
+          <a:fillRef idx="3">
+            <a:schemeClr val="accent1"/>
+          </a:fillRef>
+          <a:effectRef idx="2">
+            <a:schemeClr val="accent1"/>
+          </a:effectRef>
+          <a:fontRef idx="minor">
+            <a:schemeClr val="lt1"/>
+          </a:fontRef>
+        </p:style>
+        <p:txBody>
+          <a:bodyPr rtlCol="0" anchor="ctr"/>
+          <a:lstStyle/>
+          <a:p>
+            <a:pPr algn="ctr"/>
+          </a:p>
+        </p:txBody>
+      </p:sp>
+      <p:sp>
+        <p:nvSpPr>
+          <p:cNvPr id="43" name="TextBox 42"/>
+          <p:cNvSpPr txBox="1"/>
+          <p:nvPr/>
+        </p:nvSpPr>
+        <p:spPr>
+          <a:xfrm>
+            <a:off x="4617720" y="2816352"/>
+            <a:ext cx="1280160" cy="566928"/>
+          </a:xfrm>
+          <a:prstGeom prst="rect">
+            <a:avLst/>
+          </a:prstGeom>
+          <a:noFill/>
+        </p:spPr>
+        <p:txBody>
+          <a:bodyPr wrap="square"/>
+          <a:lstStyle/>
+          <a:p>
+            <a:pPr algn="l"/>
+            <a:r>
+              <a:rPr sz="1200" b="0" i="0">
+                <a:solidFill>
+                  <a:srgbClr val="FFFFFF"/>
+                </a:solidFill>
+                <a:latin typeface="Calibri"/>
+              </a:rPr>
+              <a:t>14</a:t>
+            </a:r>
+          </a:p>
+        </p:txBody>
+      </p:sp>
+      <p:sp>
+        <p:nvSpPr>
+          <p:cNvPr id="44" name="Rectangle 43"/>
+          <p:cNvSpPr/>
+          <p:nvPr/>
+        </p:nvSpPr>
+        <p:spPr>
+          <a:xfrm>
+            <a:off x="5943600" y="2706624"/>
+            <a:ext cx="6035040" cy="566928"/>
+          </a:xfrm>
+          <a:prstGeom prst="rect">
+            <a:avLst/>
+          </a:prstGeom>
+          <a:solidFill>
+            <a:srgbClr val="3E1A1A"/>
+          </a:solidFill>
+          <a:ln>
+            <a:noFill/>
+          </a:ln>
+        </p:spPr>
+        <p:style>
+          <a:lnRef idx="1">
+            <a:schemeClr val="accent1"/>
+          </a:lnRef>
+          <a:fillRef idx="3">
+            <a:schemeClr val="accent1"/>
+          </a:fillRef>
+          <a:effectRef idx="2">
+            <a:schemeClr val="accent1"/>
+          </a:effectRef>
+          <a:fontRef idx="minor">
+            <a:schemeClr val="lt1"/>
+          </a:fontRef>
+        </p:style>
+        <p:txBody>
+          <a:bodyPr rtlCol="0" anchor="ctr"/>
+          <a:lstStyle/>
+          <a:p>
+            <a:pPr algn="ctr"/>
+          </a:p>
+        </p:txBody>
+      </p:sp>
+      <p:sp>
+        <p:nvSpPr>
+          <p:cNvPr id="45" name="TextBox 44"/>
+          <p:cNvSpPr txBox="1"/>
+          <p:nvPr/>
+        </p:nvSpPr>
+        <p:spPr>
+          <a:xfrm>
+            <a:off x="5989320" y="2816352"/>
+            <a:ext cx="5943600" cy="566928"/>
+          </a:xfrm>
+          <a:prstGeom prst="rect">
+            <a:avLst/>
+          </a:prstGeom>
+          <a:noFill/>
+        </p:spPr>
+        <p:txBody>
+          <a:bodyPr wrap="square"/>
+          <a:lstStyle/>
+          <a:p>
+            <a:pPr algn="l"/>
+            <a:r>
+              <a:rPr sz="1200" b="0" i="0">
+                <a:solidFill>
+                  <a:srgbClr val="FFFFFF"/>
+                </a:solidFill>
+                <a:latin typeface="Calibri"/>
+              </a:rPr>
+              <a:t>HTN + Diabetes from Wave 2; monotonic burden increase</a:t>
+            </a:r>
+          </a:p>
+        </p:txBody>
+      </p:sp>
+      <p:sp>
+        <p:nvSpPr>
+          <p:cNvPr id="46" name="TextBox 45"/>
+          <p:cNvSpPr txBox="1"/>
+          <p:nvPr/>
+        </p:nvSpPr>
+        <p:spPr>
+          <a:xfrm>
+            <a:off x="365760" y="2926080"/>
+            <a:ext cx="11430000" cy="365760"/>
+          </a:xfrm>
+          <a:prstGeom prst="rect">
+            <a:avLst/>
+          </a:prstGeom>
+          <a:noFill/>
+        </p:spPr>
+        <p:txBody>
+          <a:bodyPr wrap="square"/>
+          <a:lstStyle/>
+          <a:p>
+            <a:pPr algn="l"/>
+            <a:r>
+              <a:rPr sz="1600" b="1" i="0">
+                <a:solidFill>
+                  <a:srgbClr val="2196F3"/>
+                </a:solidFill>
+                <a:latin typeface="Calibri"/>
+              </a:rPr>
+              <a:t>Patient Selection Criteria</a:t>
+            </a:r>
+          </a:p>
+        </p:txBody>
+      </p:sp>
+      <p:sp>
+        <p:nvSpPr>
+          <p:cNvPr id="47" name="Rectangle 46"/>
+          <p:cNvSpPr/>
+          <p:nvPr/>
+        </p:nvSpPr>
+        <p:spPr>
+          <a:xfrm>
+            <a:off x="365760" y="3383280"/>
+            <a:ext cx="11430000" cy="594360"/>
+          </a:xfrm>
+          <a:prstGeom prst="rect">
+            <a:avLst/>
+          </a:prstGeom>
+          <a:solidFill>
+            <a:srgbClr val="1E335E"/>
+          </a:solidFill>
+          <a:ln>
+            <a:noFill/>
+          </a:ln>
+        </p:spPr>
+        <p:style>
+          <a:lnRef idx="1">
+            <a:schemeClr val="accent1"/>
+          </a:lnRef>
+          <a:fillRef idx="3">
+            <a:schemeClr val="accent1"/>
+          </a:fillRef>
+          <a:effectRef idx="2">
+            <a:schemeClr val="accent1"/>
+          </a:effectRef>
+          <a:fontRef idx="minor">
+            <a:schemeClr val="lt1"/>
+          </a:fontRef>
+        </p:style>
+        <p:txBody>
+          <a:bodyPr rtlCol="0" anchor="ctr"/>
+          <a:lstStyle/>
+          <a:p>
+            <a:pPr algn="ctr"/>
+          </a:p>
+        </p:txBody>
+      </p:sp>
+      <p:sp>
+        <p:nvSpPr>
+          <p:cNvPr id="48" name="TextBox 47"/>
+          <p:cNvSpPr txBox="1"/>
+          <p:nvPr/>
+        </p:nvSpPr>
+        <p:spPr>
+          <a:xfrm>
+            <a:off x="502920" y="3493008"/>
+            <a:ext cx="1645920" cy="384048"/>
+          </a:xfrm>
+          <a:prstGeom prst="rect">
+            <a:avLst/>
+          </a:prstGeom>
+          <a:noFill/>
+        </p:spPr>
+        <p:txBody>
+          <a:bodyPr wrap="square"/>
+          <a:lstStyle/>
+          <a:p>
+            <a:pPr algn="l"/>
+            <a:r>
+              <a:rPr sz="1300" b="1" i="0">
+                <a:solidFill>
+                  <a:srgbClr val="2196F3"/>
+                </a:solidFill>
+                <a:latin typeface="Calibri"/>
+              </a:rPr>
+              <a:t>Star</a:t>
+            </a:r>
+          </a:p>
+        </p:txBody>
+      </p:sp>
+      <p:sp>
+        <p:nvSpPr>
+          <p:cNvPr id="49" name="TextBox 48"/>
+          <p:cNvSpPr txBox="1"/>
+          <p:nvPr/>
+        </p:nvSpPr>
+        <p:spPr>
+          <a:xfrm>
+            <a:off x="2103120" y="3493008"/>
+            <a:ext cx="9601200" cy="384048"/>
+          </a:xfrm>
+          <a:prstGeom prst="rect">
+            <a:avLst/>
+          </a:prstGeom>
+          <a:noFill/>
+        </p:spPr>
+        <p:txBody>
+          <a:bodyPr wrap="square"/>
+          <a:lstStyle/>
+          <a:p>
+            <a:pPr algn="l"/>
+            <a:r>
+              <a:rPr sz="1300" b="0" i="0">
+                <a:solidFill>
+                  <a:srgbClr val="FFFFFF"/>
+                </a:solidFill>
+                <a:latin typeface="Calibri"/>
+              </a:rPr>
+              <a:t>Highest Star score: max conditions × max waves × rare CHD</a:t>
+            </a:r>
+          </a:p>
+        </p:txBody>
+      </p:sp>
+      <p:sp>
+        <p:nvSpPr>
+          <p:cNvPr id="50" name="Rectangle 49"/>
+          <p:cNvSpPr/>
+          <p:nvPr/>
+        </p:nvSpPr>
+        <p:spPr>
+          <a:xfrm>
+            <a:off x="365760" y="4069080"/>
+            <a:ext cx="11430000" cy="594360"/>
+          </a:xfrm>
+          <a:prstGeom prst="rect">
+            <a:avLst/>
+          </a:prstGeom>
+          <a:solidFill>
+            <a:srgbClr val="1E335E"/>
+          </a:solidFill>
+          <a:ln>
+            <a:noFill/>
+          </a:ln>
+        </p:spPr>
+        <p:style>
+          <a:lnRef idx="1">
+            <a:schemeClr val="accent1"/>
+          </a:lnRef>
+          <a:fillRef idx="3">
+            <a:schemeClr val="accent1"/>
+          </a:fillRef>
+          <a:effectRef idx="2">
+            <a:schemeClr val="accent1"/>
+          </a:effectRef>
+          <a:fontRef idx="minor">
+            <a:schemeClr val="lt1"/>
+          </a:fontRef>
+        </p:style>
+        <p:txBody>
+          <a:bodyPr rtlCol="0" anchor="ctr"/>
+          <a:lstStyle/>
+          <a:p>
+            <a:pPr algn="ctr"/>
+          </a:p>
+        </p:txBody>
+      </p:sp>
+      <p:sp>
+        <p:nvSpPr>
+          <p:cNvPr id="51" name="TextBox 50"/>
+          <p:cNvSpPr txBox="1"/>
+          <p:nvPr/>
+        </p:nvSpPr>
+        <p:spPr>
+          <a:xfrm>
+            <a:off x="502920" y="4178808"/>
+            <a:ext cx="1645920" cy="384048"/>
+          </a:xfrm>
+          <a:prstGeom prst="rect">
+            <a:avLst/>
+          </a:prstGeom>
+          <a:noFill/>
+        </p:spPr>
+        <p:txBody>
+          <a:bodyPr wrap="square"/>
+          <a:lstStyle/>
+          <a:p>
+            <a:pPr algn="l"/>
+            <a:r>
+              <a:rPr sz="1300" b="1" i="0">
+                <a:solidFill>
+                  <a:srgbClr val="2196F3"/>
+                </a:solidFill>
+                <a:latin typeface="Calibri"/>
+              </a:rPr>
+              <a:t>Contrast</a:t>
+            </a:r>
+          </a:p>
+        </p:txBody>
+      </p:sp>
+      <p:sp>
+        <p:nvSpPr>
+          <p:cNvPr id="52" name="TextBox 51"/>
+          <p:cNvSpPr txBox="1"/>
+          <p:nvPr/>
+        </p:nvSpPr>
+        <p:spPr>
+          <a:xfrm>
+            <a:off x="2103120" y="4178808"/>
+            <a:ext cx="9601200" cy="384048"/>
+          </a:xfrm>
+          <a:prstGeom prst="rect">
+            <a:avLst/>
+          </a:prstGeom>
+          <a:noFill/>
+        </p:spPr>
+        <p:txBody>
+          <a:bodyPr wrap="square"/>
+          <a:lstStyle/>
+          <a:p>
+            <a:pPr algn="l"/>
+            <a:r>
+              <a:rPr sz="1300" b="0" i="0">
+                <a:solidFill>
+                  <a:srgbClr val="FFFFFF"/>
+                </a:solidFill>
+                <a:latin typeface="Calibri"/>
+              </a:rPr>
+              <a:t>Highest Contrast score: most waves with fewest conditions</a:t>
+            </a:r>
+          </a:p>
+        </p:txBody>
+      </p:sp>
+      <p:sp>
+        <p:nvSpPr>
+          <p:cNvPr id="53" name="Rectangle 52"/>
+          <p:cNvSpPr/>
+          <p:nvPr/>
+        </p:nvSpPr>
+        <p:spPr>
+          <a:xfrm>
+            <a:off x="365760" y="4754880"/>
+            <a:ext cx="11430000" cy="594360"/>
+          </a:xfrm>
+          <a:prstGeom prst="rect">
+            <a:avLst/>
+          </a:prstGeom>
+          <a:solidFill>
+            <a:srgbClr val="1E335E"/>
+          </a:solidFill>
+          <a:ln>
+            <a:noFill/>
+          </a:ln>
+        </p:spPr>
+        <p:style>
+          <a:lnRef idx="1">
+            <a:schemeClr val="accent1"/>
+          </a:lnRef>
+          <a:fillRef idx="3">
+            <a:schemeClr val="accent1"/>
+          </a:fillRef>
+          <a:effectRef idx="2">
+            <a:schemeClr val="accent1"/>
+          </a:effectRef>
+          <a:fontRef idx="minor">
+            <a:schemeClr val="lt1"/>
+          </a:fontRef>
+        </p:style>
+        <p:txBody>
+          <a:bodyPr rtlCol="0" anchor="ctr"/>
+          <a:lstStyle/>
+          <a:p>
+            <a:pPr algn="ctr"/>
+          </a:p>
+        </p:txBody>
+      </p:sp>
+      <p:sp>
+        <p:nvSpPr>
+          <p:cNvPr id="54" name="TextBox 53"/>
+          <p:cNvSpPr txBox="1"/>
+          <p:nvPr/>
+        </p:nvSpPr>
+        <p:spPr>
+          <a:xfrm>
+            <a:off x="502920" y="4864608"/>
+            <a:ext cx="1645920" cy="384048"/>
+          </a:xfrm>
+          <a:prstGeom prst="rect">
+            <a:avLst/>
+          </a:prstGeom>
+          <a:noFill/>
+        </p:spPr>
+        <p:txBody>
+          <a:bodyPr wrap="square"/>
+          <a:lstStyle/>
+          <a:p>
+            <a:pPr algn="l"/>
+            <a:r>
+              <a:rPr sz="1300" b="1" i="0">
+                <a:solidFill>
+                  <a:srgbClr val="2196F3"/>
+                </a:solidFill>
+                <a:latin typeface="Calibri"/>
+              </a:rPr>
+              <a:t>Comorbid</a:t>
+            </a:r>
+          </a:p>
+        </p:txBody>
+      </p:sp>
+      <p:sp>
+        <p:nvSpPr>
+          <p:cNvPr id="55" name="TextBox 54"/>
+          <p:cNvSpPr txBox="1"/>
+          <p:nvPr/>
+        </p:nvSpPr>
+        <p:spPr>
+          <a:xfrm>
+            <a:off x="2103120" y="4864608"/>
+            <a:ext cx="9601200" cy="384048"/>
+          </a:xfrm>
+          <a:prstGeom prst="rect">
+            <a:avLst/>
+          </a:prstGeom>
+          <a:noFill/>
+        </p:spPr>
+        <p:txBody>
+          <a:bodyPr wrap="square"/>
+          <a:lstStyle/>
+          <a:p>
+            <a:pPr algn="l"/>
+            <a:r>
+              <a:rPr sz="1300" b="0" i="0">
+                <a:solidFill>
+                  <a:srgbClr val="FFFFFF"/>
+                </a:solidFill>
+                <a:latin typeface="Calibri"/>
+              </a:rPr>
+              <a:t>Highest Comorbid score: both HTN and Diabetes from earliest wave</a:t>
             </a:r>
           </a:p>
         </p:txBody>
@@ -8714,7 +9624,7 @@
                 </a:solidFill>
                 <a:latin typeface="Calibri"/>
               </a:rPr>
-              <a:t>Failure Analysis: KG v2 (58 failures)</a:t>
+              <a:t>Patient Deep Dive: Key Findings</a:t>
             </a:r>
           </a:p>
         </p:txBody>
@@ -8728,7 +9638,7 @@
         <p:spPr>
           <a:xfrm>
             <a:off x="365760" y="749808"/>
-            <a:ext cx="5486400" cy="36576"/>
+            <a:ext cx="5029200" cy="36576"/>
           </a:xfrm>
           <a:prstGeom prst="rect">
             <a:avLst/>
@@ -8762,46 +9672,22 @@
           </a:p>
         </p:txBody>
       </p:sp>
-      <p:pic>
-        <p:nvPicPr>
-          <p:cNvPr id="6" name="Picture 5" descr="image.png"/>
-          <p:cNvPicPr>
-            <a:picLocks noChangeAspect="1"/>
-          </p:cNvPicPr>
-          <p:nvPr/>
-        </p:nvPicPr>
-        <p:blipFill>
-          <a:blip r:embed="rId2"/>
-          <a:stretch>
-            <a:fillRect/>
-          </a:stretch>
-        </p:blipFill>
-        <p:spPr>
-          <a:xfrm>
-            <a:off x="182880" y="914400"/>
-            <a:ext cx="5669280" cy="5029200"/>
-          </a:xfrm>
-          <a:prstGeom prst="rect">
-            <a:avLst/>
-          </a:prstGeom>
-        </p:spPr>
-      </p:pic>
-      <p:sp>
-        <p:nvSpPr>
-          <p:cNvPr id="7" name="Rectangle 6"/>
+      <p:sp>
+        <p:nvSpPr>
+          <p:cNvPr id="6" name="Rectangle 5"/>
           <p:cNvSpPr/>
           <p:nvPr/>
         </p:nvSpPr>
         <p:spPr>
           <a:xfrm>
-            <a:off x="6035040" y="960120"/>
-            <a:ext cx="5943600" cy="960120"/>
+            <a:off x="274320" y="960120"/>
+            <a:ext cx="3794760" cy="5120640"/>
           </a:xfrm>
           <a:prstGeom prst="rect">
             <a:avLst/>
           </a:prstGeom>
           <a:solidFill>
-            <a:srgbClr val="F44336"/>
+            <a:srgbClr val="2196F3"/>
           </a:solidFill>
           <a:ln>
             <a:noFill/>
@@ -8831,14 +9717,193 @@
       </p:sp>
       <p:sp>
         <p:nvSpPr>
+          <p:cNvPr id="7" name="TextBox 6"/>
+          <p:cNvSpPr txBox="1"/>
+          <p:nvPr/>
+        </p:nvSpPr>
+        <p:spPr>
+          <a:xfrm>
+            <a:off x="365760" y="1024128"/>
+            <a:ext cx="3611880" cy="457200"/>
+          </a:xfrm>
+          <a:prstGeom prst="rect">
+            <a:avLst/>
+          </a:prstGeom>
+          <a:noFill/>
+        </p:spPr>
+        <p:txBody>
+          <a:bodyPr wrap="square"/>
+          <a:lstStyle/>
+          <a:p>
+            <a:pPr algn="l"/>
+            <a:r>
+              <a:rPr sz="1400" b="1" i="0">
+                <a:solidFill>
+                  <a:srgbClr val="FFFFFF"/>
+                </a:solidFill>
+                <a:latin typeface="Calibri"/>
+              </a:rPr>
+              <a:t>Star — 3f336702</a:t>
+            </a:r>
+          </a:p>
+        </p:txBody>
+      </p:sp>
+      <p:sp>
+        <p:nvSpPr>
           <p:cNvPr id="8" name="TextBox 7"/>
           <p:cNvSpPr txBox="1"/>
           <p:nvPr/>
         </p:nvSpPr>
         <p:spPr>
           <a:xfrm>
-            <a:off x="6126480" y="996696"/>
-            <a:ext cx="3200400" cy="365760"/>
+            <a:off x="365760" y="1554480"/>
+            <a:ext cx="3611880" cy="4114800"/>
+          </a:xfrm>
+          <a:prstGeom prst="rect">
+            <a:avLst/>
+          </a:prstGeom>
+          <a:noFill/>
+        </p:spPr>
+        <p:txBody>
+          <a:bodyPr wrap="square">
+            <a:spAutoFit/>
+          </a:bodyPr>
+          <a:lstStyle/>
+          <a:p>
+            <a:pPr>
+              <a:spcBef>
+                <a:spcPts val="600"/>
+              </a:spcBef>
+            </a:pPr>
+            <a:r>
+              <a:rPr sz="1200">
+                <a:solidFill>
+                  <a:srgbClr val="FFFFFF"/>
+                </a:solidFill>
+                <a:latin typeface="Calibri"/>
+              </a:rPr>
+              <a:t>▸ 22 unique conditions across all waves</a:t>
+            </a:r>
+          </a:p>
+          <a:p>
+            <a:pPr>
+              <a:spcBef>
+                <a:spcPts val="600"/>
+              </a:spcBef>
+            </a:pPr>
+            <a:r>
+              <a:rPr sz="1200">
+                <a:solidFill>
+                  <a:srgbClr val="FFFFFF"/>
+                </a:solidFill>
+                <a:latin typeface="Calibri"/>
+              </a:rPr>
+              <a:t>▸ CHD persistent in 6 of 7 waves</a:t>
+            </a:r>
+          </a:p>
+          <a:p>
+            <a:pPr>
+              <a:spcBef>
+                <a:spcPts val="600"/>
+              </a:spcBef>
+            </a:pPr>
+            <a:r>
+              <a:rPr sz="1200">
+                <a:solidFill>
+                  <a:srgbClr val="FFFFFF"/>
+                </a:solidFill>
+                <a:latin typeface="Calibri"/>
+              </a:rPr>
+              <a:t>▸ Wave 1: 3 conditions → Wave 7: 22 conditions (7× growth)</a:t>
+            </a:r>
+          </a:p>
+          <a:p>
+            <a:pPr>
+              <a:spcBef>
+                <a:spcPts val="600"/>
+              </a:spcBef>
+            </a:pPr>
+            <a:r>
+              <a:rPr sz="1200">
+                <a:solidFill>
+                  <a:srgbClr val="FFFFFF"/>
+                </a:solidFill>
+                <a:latin typeface="Calibri"/>
+              </a:rPr>
+              <a:t>▸ Avg SBP Wave 5→6: +4 mmHg trend detectable</a:t>
+            </a:r>
+          </a:p>
+          <a:p>
+            <a:pPr>
+              <a:spcBef>
+                <a:spcPts val="600"/>
+              </a:spcBef>
+            </a:pPr>
+            <a:r>
+              <a:rPr sz="1200">
+                <a:solidFill>
+                  <a:srgbClr val="FFFFFF"/>
+                </a:solidFill>
+                <a:latin typeface="Calibri"/>
+              </a:rPr>
+              <a:t>▸ Greatest diagnostic complexity in cohort</a:t>
+            </a:r>
+          </a:p>
+        </p:txBody>
+      </p:sp>
+      <p:sp>
+        <p:nvSpPr>
+          <p:cNvPr id="9" name="Rectangle 8"/>
+          <p:cNvSpPr/>
+          <p:nvPr/>
+        </p:nvSpPr>
+        <p:spPr>
+          <a:xfrm>
+            <a:off x="4251959" y="960120"/>
+            <a:ext cx="3794760" cy="5120640"/>
+          </a:xfrm>
+          <a:prstGeom prst="rect">
+            <a:avLst/>
+          </a:prstGeom>
+          <a:solidFill>
+            <a:srgbClr val="4CAF50"/>
+          </a:solidFill>
+          <a:ln>
+            <a:noFill/>
+          </a:ln>
+        </p:spPr>
+        <p:style>
+          <a:lnRef idx="1">
+            <a:schemeClr val="accent1"/>
+          </a:lnRef>
+          <a:fillRef idx="3">
+            <a:schemeClr val="accent1"/>
+          </a:fillRef>
+          <a:effectRef idx="2">
+            <a:schemeClr val="accent1"/>
+          </a:effectRef>
+          <a:fontRef idx="minor">
+            <a:schemeClr val="lt1"/>
+          </a:fontRef>
+        </p:style>
+        <p:txBody>
+          <a:bodyPr rtlCol="0" anchor="ctr"/>
+          <a:lstStyle/>
+          <a:p>
+            <a:pPr algn="ctr"/>
+          </a:p>
+        </p:txBody>
+      </p:sp>
+      <p:sp>
+        <p:nvSpPr>
+          <p:cNvPr id="10" name="TextBox 9"/>
+          <p:cNvSpPr txBox="1"/>
+          <p:nvPr/>
+        </p:nvSpPr>
+        <p:spPr>
+          <a:xfrm>
+            <a:off x="4343399" y="1024128"/>
+            <a:ext cx="3611880" cy="457200"/>
           </a:xfrm>
           <a:prstGeom prst="rect">
             <a:avLst/>
@@ -8851,93 +9916,130 @@
           <a:p>
             <a:pPr algn="l"/>
             <a:r>
-              <a:rPr sz="1300" b="1" i="0">
-                <a:solidFill>
-                  <a:srgbClr val="FFFFFF"/>
-                </a:solidFill>
-                <a:latin typeface="Calibri"/>
-              </a:rPr>
-              <a:t>CROSS_TABLE</a:t>
-            </a:r>
-          </a:p>
-        </p:txBody>
-      </p:sp>
-      <p:sp>
-        <p:nvSpPr>
-          <p:cNvPr id="9" name="TextBox 8"/>
-          <p:cNvSpPr txBox="1"/>
-          <p:nvPr/>
-        </p:nvSpPr>
-        <p:spPr>
-          <a:xfrm>
-            <a:off x="9784080" y="996696"/>
-            <a:ext cx="1097280" cy="365760"/>
-          </a:xfrm>
-          <a:prstGeom prst="rect">
-            <a:avLst/>
-          </a:prstGeom>
-          <a:noFill/>
-        </p:spPr>
-        <p:txBody>
-          <a:bodyPr wrap="square"/>
-          <a:lstStyle/>
-          <a:p>
-            <a:pPr algn="r"/>
-            <a:r>
               <a:rPr sz="1400" b="1" i="0">
                 <a:solidFill>
                   <a:srgbClr val="FFFFFF"/>
                 </a:solidFill>
                 <a:latin typeface="Calibri"/>
               </a:rPr>
-              <a:t>43.1%</a:t>
-            </a:r>
-          </a:p>
-        </p:txBody>
-      </p:sp>
-      <p:sp>
-        <p:nvSpPr>
-          <p:cNvPr id="10" name="TextBox 9"/>
-          <p:cNvSpPr txBox="1"/>
-          <p:nvPr/>
-        </p:nvSpPr>
-        <p:spPr>
-          <a:xfrm>
-            <a:off x="6126480" y="1399032"/>
-            <a:ext cx="5669280" cy="457200"/>
-          </a:xfrm>
-          <a:prstGeom prst="rect">
-            <a:avLst/>
-          </a:prstGeom>
-          <a:noFill/>
-        </p:spPr>
-        <p:txBody>
-          <a:bodyPr wrap="square"/>
-          <a:lstStyle/>
-          <a:p>
-            <a:pPr algn="l"/>
-            <a:r>
-              <a:rPr sz="1100" b="0" i="0">
-                <a:solidFill>
-                  <a:srgbClr val="FFFFFF"/>
-                </a:solidFill>
-                <a:latin typeface="Calibri"/>
-              </a:rPr>
-              <a:t>Multi-hop joins require code execution</a:t>
-            </a:r>
-          </a:p>
-        </p:txBody>
-      </p:sp>
-      <p:sp>
-        <p:nvSpPr>
-          <p:cNvPr id="11" name="Rectangle 10"/>
+              <a:t>Contrast — 1930a1b6</a:t>
+            </a:r>
+          </a:p>
+        </p:txBody>
+      </p:sp>
+      <p:sp>
+        <p:nvSpPr>
+          <p:cNvPr id="11" name="TextBox 10"/>
+          <p:cNvSpPr txBox="1"/>
+          <p:nvPr/>
+        </p:nvSpPr>
+        <p:spPr>
+          <a:xfrm>
+            <a:off x="4343399" y="1554480"/>
+            <a:ext cx="3611880" cy="4114800"/>
+          </a:xfrm>
+          <a:prstGeom prst="rect">
+            <a:avLst/>
+          </a:prstGeom>
+          <a:noFill/>
+        </p:spPr>
+        <p:txBody>
+          <a:bodyPr wrap="square">
+            <a:spAutoFit/>
+          </a:bodyPr>
+          <a:lstStyle/>
+          <a:p>
+            <a:pPr>
+              <a:spcBef>
+                <a:spcPts val="600"/>
+              </a:spcBef>
+            </a:pPr>
+            <a:r>
+              <a:rPr sz="1200">
+                <a:solidFill>
+                  <a:srgbClr val="FFFFFF"/>
+                </a:solidFill>
+                <a:latin typeface="Calibri"/>
+              </a:rPr>
+              <a:t>▸ Only 1 condition (Prediabetes) across all 7 waves</a:t>
+            </a:r>
+          </a:p>
+          <a:p>
+            <a:pPr>
+              <a:spcBef>
+                <a:spcPts val="600"/>
+              </a:spcBef>
+            </a:pPr>
+            <a:r>
+              <a:rPr sz="1200">
+                <a:solidFill>
+                  <a:srgbClr val="FFFFFF"/>
+                </a:solidFill>
+                <a:latin typeface="Calibri"/>
+              </a:rPr>
+              <a:t>▸ Full 7-wave longitudinal coverage achieved</a:t>
+            </a:r>
+          </a:p>
+          <a:p>
+            <a:pPr>
+              <a:spcBef>
+                <a:spcPts val="600"/>
+              </a:spcBef>
+            </a:pPr>
+            <a:r>
+              <a:rPr sz="1200">
+                <a:solidFill>
+                  <a:srgbClr val="FFFFFF"/>
+                </a:solidFill>
+                <a:latin typeface="Calibri"/>
+              </a:rPr>
+              <a:t>▸ Zero comorbidity — clinical baseline patient</a:t>
+            </a:r>
+          </a:p>
+          <a:p>
+            <a:pPr>
+              <a:spcBef>
+                <a:spcPts val="600"/>
+              </a:spcBef>
+            </a:pPr>
+            <a:r>
+              <a:rPr sz="1200">
+                <a:solidFill>
+                  <a:srgbClr val="FFFFFF"/>
+                </a:solidFill>
+                <a:latin typeface="Calibri"/>
+              </a:rPr>
+              <a:t>▸ Demonstrates max wave coverage is achievable</a:t>
+            </a:r>
+          </a:p>
+          <a:p>
+            <a:pPr>
+              <a:spcBef>
+                <a:spcPts val="600"/>
+              </a:spcBef>
+            </a:pPr>
+            <a:r>
+              <a:rPr sz="1200">
+                <a:solidFill>
+                  <a:srgbClr val="FFFFFF"/>
+                </a:solidFill>
+                <a:latin typeface="Calibri"/>
+              </a:rPr>
+              <a:t>▸ No medication records at any wave</a:t>
+            </a:r>
+          </a:p>
+        </p:txBody>
+      </p:sp>
+      <p:sp>
+        <p:nvSpPr>
+          <p:cNvPr id="12" name="Rectangle 11"/>
           <p:cNvSpPr/>
           <p:nvPr/>
         </p:nvSpPr>
         <p:spPr>
           <a:xfrm>
-            <a:off x="6035040" y="2011680"/>
-            <a:ext cx="5943600" cy="960120"/>
+            <a:off x="8229598" y="960120"/>
+            <a:ext cx="3794760" cy="5120640"/>
           </a:xfrm>
           <a:prstGeom prst="rect">
             <a:avLst/>
@@ -8973,14 +10075,14 @@
       </p:sp>
       <p:sp>
         <p:nvSpPr>
-          <p:cNvPr id="12" name="TextBox 11"/>
-          <p:cNvSpPr txBox="1"/>
-          <p:nvPr/>
-        </p:nvSpPr>
-        <p:spPr>
-          <a:xfrm>
-            <a:off x="6126480" y="2048256"/>
-            <a:ext cx="3200400" cy="365760"/>
+          <p:cNvPr id="13" name="TextBox 12"/>
+          <p:cNvSpPr txBox="1"/>
+          <p:nvPr/>
+        </p:nvSpPr>
+        <p:spPr>
+          <a:xfrm>
+            <a:off x="8321038" y="1024128"/>
+            <a:ext cx="3611880" cy="457200"/>
           </a:xfrm>
           <a:prstGeom prst="rect">
             <a:avLst/>
@@ -8993,46 +10095,13 @@
           <a:p>
             <a:pPr algn="l"/>
             <a:r>
-              <a:rPr sz="1300" b="1" i="0">
-                <a:solidFill>
-                  <a:srgbClr val="FFFFFF"/>
-                </a:solidFill>
-                <a:latin typeface="Calibri"/>
-              </a:rPr>
-              <a:t>MISSING_EDGE</a:t>
-            </a:r>
-          </a:p>
-        </p:txBody>
-      </p:sp>
-      <p:sp>
-        <p:nvSpPr>
-          <p:cNvPr id="13" name="TextBox 12"/>
-          <p:cNvSpPr txBox="1"/>
-          <p:nvPr/>
-        </p:nvSpPr>
-        <p:spPr>
-          <a:xfrm>
-            <a:off x="9784080" y="2048256"/>
-            <a:ext cx="1097280" cy="365760"/>
-          </a:xfrm>
-          <a:prstGeom prst="rect">
-            <a:avLst/>
-          </a:prstGeom>
-          <a:noFill/>
-        </p:spPr>
-        <p:txBody>
-          <a:bodyPr wrap="square"/>
-          <a:lstStyle/>
-          <a:p>
-            <a:pPr algn="r"/>
-            <a:r>
               <a:rPr sz="1400" b="1" i="0">
                 <a:solidFill>
                   <a:srgbClr val="FFFFFF"/>
                 </a:solidFill>
                 <a:latin typeface="Calibri"/>
               </a:rPr>
-              <a:t>22.4%</a:t>
+              <a:t>Comorbid — 3b95da79</a:t>
             </a:r>
           </a:p>
         </p:txBody>
@@ -9045,453 +10114,97 @@
         </p:nvSpPr>
         <p:spPr>
           <a:xfrm>
-            <a:off x="6126480" y="2450592"/>
-            <a:ext cx="5669280" cy="457200"/>
-          </a:xfrm>
-          <a:prstGeom prst="rect">
-            <a:avLst/>
-          </a:prstGeom>
-          <a:noFill/>
-        </p:spPr>
-        <p:txBody>
-          <a:bodyPr wrap="square"/>
-          <a:lstStyle/>
-          <a:p>
-            <a:pPr algn="l"/>
-            <a:r>
-              <a:rPr sz="1100" b="0" i="0">
-                <a:solidFill>
-                  <a:srgbClr val="FFFFFF"/>
-                </a:solidFill>
-                <a:latin typeface="Calibri"/>
-              </a:rPr>
-              <a:t>Retriever passes only most-recent obs; gold needs wave avg</a:t>
-            </a:r>
-          </a:p>
-        </p:txBody>
-      </p:sp>
-      <p:sp>
-        <p:nvSpPr>
-          <p:cNvPr id="15" name="Rectangle 14"/>
-          <p:cNvSpPr/>
-          <p:nvPr/>
-        </p:nvSpPr>
-        <p:spPr>
-          <a:xfrm>
-            <a:off x="6035040" y="3063240"/>
-            <a:ext cx="5943600" cy="960120"/>
-          </a:xfrm>
-          <a:prstGeom prst="rect">
-            <a:avLst/>
-          </a:prstGeom>
-          <a:solidFill>
-            <a:srgbClr val="2196F3"/>
-          </a:solidFill>
-          <a:ln>
-            <a:noFill/>
-          </a:ln>
-        </p:spPr>
-        <p:style>
-          <a:lnRef idx="1">
-            <a:schemeClr val="accent1"/>
-          </a:lnRef>
-          <a:fillRef idx="3">
-            <a:schemeClr val="accent1"/>
-          </a:fillRef>
-          <a:effectRef idx="2">
-            <a:schemeClr val="accent1"/>
-          </a:effectRef>
-          <a:fontRef idx="minor">
-            <a:schemeClr val="lt1"/>
-          </a:fontRef>
-        </p:style>
-        <p:txBody>
-          <a:bodyPr rtlCol="0" anchor="ctr"/>
-          <a:lstStyle/>
-          <a:p>
-            <a:pPr algn="ctr"/>
-          </a:p>
-        </p:txBody>
-      </p:sp>
-      <p:sp>
-        <p:nvSpPr>
-          <p:cNvPr id="16" name="TextBox 15"/>
-          <p:cNvSpPr txBox="1"/>
-          <p:nvPr/>
-        </p:nvSpPr>
-        <p:spPr>
-          <a:xfrm>
-            <a:off x="6126480" y="3099816"/>
-            <a:ext cx="3200400" cy="365760"/>
-          </a:xfrm>
-          <a:prstGeom prst="rect">
-            <a:avLst/>
-          </a:prstGeom>
-          <a:noFill/>
-        </p:spPr>
-        <p:txBody>
-          <a:bodyPr wrap="square"/>
-          <a:lstStyle/>
-          <a:p>
-            <a:pPr algn="l"/>
-            <a:r>
-              <a:rPr sz="1300" b="1" i="0">
-                <a:solidFill>
-                  <a:srgbClr val="FFFFFF"/>
-                </a:solidFill>
-                <a:latin typeface="Calibri"/>
-              </a:rPr>
-              <a:t>LLM_FORMAT</a:t>
-            </a:r>
-          </a:p>
-        </p:txBody>
-      </p:sp>
-      <p:sp>
-        <p:nvSpPr>
-          <p:cNvPr id="17" name="TextBox 16"/>
-          <p:cNvSpPr txBox="1"/>
-          <p:nvPr/>
-        </p:nvSpPr>
-        <p:spPr>
-          <a:xfrm>
-            <a:off x="9784080" y="3099816"/>
-            <a:ext cx="1097280" cy="365760"/>
-          </a:xfrm>
-          <a:prstGeom prst="rect">
-            <a:avLst/>
-          </a:prstGeom>
-          <a:noFill/>
-        </p:spPr>
-        <p:txBody>
-          <a:bodyPr wrap="square"/>
-          <a:lstStyle/>
-          <a:p>
-            <a:pPr algn="r"/>
-            <a:r>
-              <a:rPr sz="1400" b="1" i="0">
-                <a:solidFill>
-                  <a:srgbClr val="FFFFFF"/>
-                </a:solidFill>
-                <a:latin typeface="Calibri"/>
-              </a:rPr>
-              <a:t>15.5%</a:t>
-            </a:r>
-          </a:p>
-        </p:txBody>
-      </p:sp>
-      <p:sp>
-        <p:nvSpPr>
-          <p:cNvPr id="18" name="TextBox 17"/>
-          <p:cNvSpPr txBox="1"/>
-          <p:nvPr/>
-        </p:nvSpPr>
-        <p:spPr>
-          <a:xfrm>
-            <a:off x="6126480" y="3502152"/>
-            <a:ext cx="5669280" cy="457200"/>
-          </a:xfrm>
-          <a:prstGeom prst="rect">
-            <a:avLst/>
-          </a:prstGeom>
-          <a:noFill/>
-        </p:spPr>
-        <p:txBody>
-          <a:bodyPr wrap="square"/>
-          <a:lstStyle/>
-          <a:p>
-            <a:pPr algn="l"/>
-            <a:r>
-              <a:rPr sz="1100" b="0" i="0">
-                <a:solidFill>
-                  <a:srgbClr val="FFFFFF"/>
-                </a:solidFill>
-                <a:latin typeface="Calibri"/>
-              </a:rPr>
-              <a:t>Correct data retrieved; wrong answer format</a:t>
-            </a:r>
-          </a:p>
-        </p:txBody>
-      </p:sp>
-      <p:sp>
-        <p:nvSpPr>
-          <p:cNvPr id="19" name="Rectangle 18"/>
-          <p:cNvSpPr/>
-          <p:nvPr/>
-        </p:nvSpPr>
-        <p:spPr>
-          <a:xfrm>
-            <a:off x="6035040" y="4114800"/>
-            <a:ext cx="5943600" cy="960120"/>
-          </a:xfrm>
-          <a:prstGeom prst="rect">
-            <a:avLst/>
-          </a:prstGeom>
-          <a:solidFill>
-            <a:srgbClr val="4CAF50"/>
-          </a:solidFill>
-          <a:ln>
-            <a:noFill/>
-          </a:ln>
-        </p:spPr>
-        <p:style>
-          <a:lnRef idx="1">
-            <a:schemeClr val="accent1"/>
-          </a:lnRef>
-          <a:fillRef idx="3">
-            <a:schemeClr val="accent1"/>
-          </a:fillRef>
-          <a:effectRef idx="2">
-            <a:schemeClr val="accent1"/>
-          </a:effectRef>
-          <a:fontRef idx="minor">
-            <a:schemeClr val="lt1"/>
-          </a:fontRef>
-        </p:style>
-        <p:txBody>
-          <a:bodyPr rtlCol="0" anchor="ctr"/>
-          <a:lstStyle/>
-          <a:p>
-            <a:pPr algn="ctr"/>
-          </a:p>
-        </p:txBody>
-      </p:sp>
-      <p:sp>
-        <p:nvSpPr>
-          <p:cNvPr id="20" name="TextBox 19"/>
-          <p:cNvSpPr txBox="1"/>
-          <p:nvPr/>
-        </p:nvSpPr>
-        <p:spPr>
-          <a:xfrm>
-            <a:off x="6126480" y="4151376"/>
-            <a:ext cx="3200400" cy="365760"/>
-          </a:xfrm>
-          <a:prstGeom prst="rect">
-            <a:avLst/>
-          </a:prstGeom>
-          <a:noFill/>
-        </p:spPr>
-        <p:txBody>
-          <a:bodyPr wrap="square"/>
-          <a:lstStyle/>
-          <a:p>
-            <a:pPr algn="l"/>
-            <a:r>
-              <a:rPr sz="1300" b="1" i="0">
-                <a:solidFill>
-                  <a:srgbClr val="FFFFFF"/>
-                </a:solidFill>
-                <a:latin typeface="Calibri"/>
-              </a:rPr>
-              <a:t>COMPUTATION</a:t>
-            </a:r>
-          </a:p>
-        </p:txBody>
-      </p:sp>
-      <p:sp>
-        <p:nvSpPr>
-          <p:cNvPr id="21" name="TextBox 20"/>
-          <p:cNvSpPr txBox="1"/>
-          <p:nvPr/>
-        </p:nvSpPr>
-        <p:spPr>
-          <a:xfrm>
-            <a:off x="9784080" y="4151376"/>
-            <a:ext cx="1097280" cy="365760"/>
-          </a:xfrm>
-          <a:prstGeom prst="rect">
-            <a:avLst/>
-          </a:prstGeom>
-          <a:noFill/>
-        </p:spPr>
-        <p:txBody>
-          <a:bodyPr wrap="square"/>
-          <a:lstStyle/>
-          <a:p>
-            <a:pPr algn="r"/>
-            <a:r>
-              <a:rPr sz="1400" b="1" i="0">
-                <a:solidFill>
-                  <a:srgbClr val="FFFFFF"/>
-                </a:solidFill>
-                <a:latin typeface="Calibri"/>
-              </a:rPr>
-              <a:t>15.5%</a:t>
-            </a:r>
-          </a:p>
-        </p:txBody>
-      </p:sp>
-      <p:sp>
-        <p:nvSpPr>
-          <p:cNvPr id="22" name="TextBox 21"/>
-          <p:cNvSpPr txBox="1"/>
-          <p:nvPr/>
-        </p:nvSpPr>
-        <p:spPr>
-          <a:xfrm>
-            <a:off x="6126480" y="4553712"/>
-            <a:ext cx="5669280" cy="457200"/>
-          </a:xfrm>
-          <a:prstGeom prst="rect">
-            <a:avLst/>
-          </a:prstGeom>
-          <a:noFill/>
-        </p:spPr>
-        <p:txBody>
-          <a:bodyPr wrap="square"/>
-          <a:lstStyle/>
-          <a:p>
-            <a:pPr algn="l"/>
-            <a:r>
-              <a:rPr sz="1100" b="0" i="0">
-                <a:solidFill>
-                  <a:srgbClr val="FFFFFF"/>
-                </a:solidFill>
-                <a:latin typeface="Calibri"/>
-              </a:rPr>
-              <a:t>LLM cannot count distinct waves from flat context</a:t>
-            </a:r>
-          </a:p>
-        </p:txBody>
-      </p:sp>
-      <p:sp>
-        <p:nvSpPr>
-          <p:cNvPr id="23" name="Rectangle 22"/>
-          <p:cNvSpPr/>
-          <p:nvPr/>
-        </p:nvSpPr>
-        <p:spPr>
-          <a:xfrm>
-            <a:off x="6035040" y="5166360"/>
-            <a:ext cx="5943600" cy="960120"/>
-          </a:xfrm>
-          <a:prstGeom prst="rect">
-            <a:avLst/>
-          </a:prstGeom>
-          <a:solidFill>
-            <a:srgbClr val="9C27B0"/>
-          </a:solidFill>
-          <a:ln>
-            <a:noFill/>
-          </a:ln>
-        </p:spPr>
-        <p:style>
-          <a:lnRef idx="1">
-            <a:schemeClr val="accent1"/>
-          </a:lnRef>
-          <a:fillRef idx="3">
-            <a:schemeClr val="accent1"/>
-          </a:fillRef>
-          <a:effectRef idx="2">
-            <a:schemeClr val="accent1"/>
-          </a:effectRef>
-          <a:fontRef idx="minor">
-            <a:schemeClr val="lt1"/>
-          </a:fontRef>
-        </p:style>
-        <p:txBody>
-          <a:bodyPr rtlCol="0" anchor="ctr"/>
-          <a:lstStyle/>
-          <a:p>
-            <a:pPr algn="ctr"/>
-          </a:p>
-        </p:txBody>
-      </p:sp>
-      <p:sp>
-        <p:nvSpPr>
-          <p:cNvPr id="24" name="TextBox 23"/>
-          <p:cNvSpPr txBox="1"/>
-          <p:nvPr/>
-        </p:nvSpPr>
-        <p:spPr>
-          <a:xfrm>
-            <a:off x="6126480" y="5202936"/>
-            <a:ext cx="3200400" cy="365760"/>
-          </a:xfrm>
-          <a:prstGeom prst="rect">
-            <a:avLst/>
-          </a:prstGeom>
-          <a:noFill/>
-        </p:spPr>
-        <p:txBody>
-          <a:bodyPr wrap="square"/>
-          <a:lstStyle/>
-          <a:p>
-            <a:pPr algn="l"/>
-            <a:r>
-              <a:rPr sz="1300" b="1" i="0">
-                <a:solidFill>
-                  <a:srgbClr val="FFFFFF"/>
-                </a:solidFill>
-                <a:latin typeface="Calibri"/>
-              </a:rPr>
-              <a:t>WRONG_SUBGRAPH</a:t>
-            </a:r>
-          </a:p>
-        </p:txBody>
-      </p:sp>
-      <p:sp>
-        <p:nvSpPr>
-          <p:cNvPr id="25" name="TextBox 24"/>
-          <p:cNvSpPr txBox="1"/>
-          <p:nvPr/>
-        </p:nvSpPr>
-        <p:spPr>
-          <a:xfrm>
-            <a:off x="9784080" y="5202936"/>
-            <a:ext cx="1097280" cy="365760"/>
-          </a:xfrm>
-          <a:prstGeom prst="rect">
-            <a:avLst/>
-          </a:prstGeom>
-          <a:noFill/>
-        </p:spPr>
-        <p:txBody>
-          <a:bodyPr wrap="square"/>
-          <a:lstStyle/>
-          <a:p>
-            <a:pPr algn="r"/>
-            <a:r>
-              <a:rPr sz="1400" b="1" i="0">
-                <a:solidFill>
-                  <a:srgbClr val="FFFFFF"/>
-                </a:solidFill>
-                <a:latin typeface="Calibri"/>
-              </a:rPr>
-              <a:t> 3.4%</a:t>
-            </a:r>
-          </a:p>
-        </p:txBody>
-      </p:sp>
-      <p:sp>
-        <p:nvSpPr>
-          <p:cNvPr id="26" name="TextBox 25"/>
-          <p:cNvSpPr txBox="1"/>
-          <p:nvPr/>
-        </p:nvSpPr>
-        <p:spPr>
-          <a:xfrm>
-            <a:off x="6126480" y="5605272"/>
-            <a:ext cx="5669280" cy="457200"/>
-          </a:xfrm>
-          <a:prstGeom prst="rect">
-            <a:avLst/>
-          </a:prstGeom>
-          <a:noFill/>
-        </p:spPr>
-        <p:txBody>
-          <a:bodyPr wrap="square"/>
-          <a:lstStyle/>
-          <a:p>
-            <a:pPr algn="l"/>
-            <a:r>
-              <a:rPr sz="1100" b="0" i="0">
-                <a:solidFill>
-                  <a:srgbClr val="FFFFFF"/>
-                </a:solidFill>
-                <a:latin typeface="Calibri"/>
-              </a:rPr>
-              <a:t>Empty context returned for wave that has data</a:t>
+            <a:off x="8321038" y="1554480"/>
+            <a:ext cx="3611880" cy="4114800"/>
+          </a:xfrm>
+          <a:prstGeom prst="rect">
+            <a:avLst/>
+          </a:prstGeom>
+          <a:noFill/>
+        </p:spPr>
+        <p:txBody>
+          <a:bodyPr wrap="square">
+            <a:spAutoFit/>
+          </a:bodyPr>
+          <a:lstStyle/>
+          <a:p>
+            <a:pPr>
+              <a:spcBef>
+                <a:spcPts val="600"/>
+              </a:spcBef>
+            </a:pPr>
+            <a:r>
+              <a:rPr sz="1200">
+                <a:solidFill>
+                  <a:srgbClr val="FFFFFF"/>
+                </a:solidFill>
+                <a:latin typeface="Calibri"/>
+              </a:rPr>
+              <a:t>▸ 14 conditions; HTN + T2D from Wave 2 onward</a:t>
+            </a:r>
+          </a:p>
+          <a:p>
+            <a:pPr>
+              <a:spcBef>
+                <a:spcPts val="600"/>
+              </a:spcBef>
+            </a:pPr>
+            <a:r>
+              <a:rPr sz="1200">
+                <a:solidFill>
+                  <a:srgbClr val="FFFFFF"/>
+                </a:solidFill>
+                <a:latin typeface="Calibri"/>
+              </a:rPr>
+              <a:t>▸ Monotonically increasing condition burden</a:t>
+            </a:r>
+          </a:p>
+          <a:p>
+            <a:pPr>
+              <a:spcBef>
+                <a:spcPts val="600"/>
+              </a:spcBef>
+            </a:pPr>
+            <a:r>
+              <a:rPr sz="1200">
+                <a:solidFill>
+                  <a:srgbClr val="FFFFFF"/>
+                </a:solidFill>
+                <a:latin typeface="Calibri"/>
+              </a:rPr>
+              <a:t>▸ Antihypertensives prescribed Wave 2–7</a:t>
+            </a:r>
+          </a:p>
+          <a:p>
+            <a:pPr>
+              <a:spcBef>
+                <a:spcPts val="600"/>
+              </a:spcBef>
+            </a:pPr>
+            <a:r>
+              <a:rPr sz="1200">
+                <a:solidFill>
+                  <a:srgbClr val="FFFFFF"/>
+                </a:solidFill>
+                <a:latin typeface="Calibri"/>
+              </a:rPr>
+              <a:t>▸ Pre/post-HTN SBP comparison: multi-hop benchmark query</a:t>
+            </a:r>
+          </a:p>
+          <a:p>
+            <a:pPr>
+              <a:spcBef>
+                <a:spcPts val="600"/>
+              </a:spcBef>
+            </a:pPr>
+            <a:r>
+              <a:rPr sz="1200">
+                <a:solidFill>
+                  <a:srgbClr val="FFFFFF"/>
+                </a:solidFill>
+                <a:latin typeface="Calibri"/>
+              </a:rPr>
+              <a:t>▸ Highest comorbidity complexity of any patient</a:t>
             </a:r>
           </a:p>
         </p:txBody>
@@ -9584,6 +10297,908 @@
                 <a:latin typeface="Calibri"/>
               </a:rPr>
               <a:t>16</a:t>
+            </a:r>
+          </a:p>
+        </p:txBody>
+      </p:sp>
+      <p:sp>
+        <p:nvSpPr>
+          <p:cNvPr id="4" name="TextBox 3"/>
+          <p:cNvSpPr txBox="1"/>
+          <p:nvPr/>
+        </p:nvSpPr>
+        <p:spPr>
+          <a:xfrm>
+            <a:off x="365760" y="182880"/>
+            <a:ext cx="8229600" cy="502920"/>
+          </a:xfrm>
+          <a:prstGeom prst="rect">
+            <a:avLst/>
+          </a:prstGeom>
+          <a:noFill/>
+        </p:spPr>
+        <p:txBody>
+          <a:bodyPr wrap="square"/>
+          <a:lstStyle/>
+          <a:p>
+            <a:pPr algn="l"/>
+            <a:r>
+              <a:rPr sz="2800" b="1" i="0">
+                <a:solidFill>
+                  <a:srgbClr val="FFFFFF"/>
+                </a:solidFill>
+                <a:latin typeface="Calibri"/>
+              </a:rPr>
+              <a:t>Failure Analysis: KG v2 (58 failures)</a:t>
+            </a:r>
+          </a:p>
+        </p:txBody>
+      </p:sp>
+      <p:sp>
+        <p:nvSpPr>
+          <p:cNvPr id="5" name="Rectangle 4"/>
+          <p:cNvSpPr/>
+          <p:nvPr/>
+        </p:nvSpPr>
+        <p:spPr>
+          <a:xfrm>
+            <a:off x="365760" y="749808"/>
+            <a:ext cx="5486400" cy="36576"/>
+          </a:xfrm>
+          <a:prstGeom prst="rect">
+            <a:avLst/>
+          </a:prstGeom>
+          <a:solidFill>
+            <a:srgbClr val="2196F3"/>
+          </a:solidFill>
+          <a:ln>
+            <a:noFill/>
+          </a:ln>
+        </p:spPr>
+        <p:style>
+          <a:lnRef idx="1">
+            <a:schemeClr val="accent1"/>
+          </a:lnRef>
+          <a:fillRef idx="3">
+            <a:schemeClr val="accent1"/>
+          </a:fillRef>
+          <a:effectRef idx="2">
+            <a:schemeClr val="accent1"/>
+          </a:effectRef>
+          <a:fontRef idx="minor">
+            <a:schemeClr val="lt1"/>
+          </a:fontRef>
+        </p:style>
+        <p:txBody>
+          <a:bodyPr rtlCol="0" anchor="ctr"/>
+          <a:lstStyle/>
+          <a:p>
+            <a:pPr algn="ctr"/>
+          </a:p>
+        </p:txBody>
+      </p:sp>
+      <p:pic>
+        <p:nvPicPr>
+          <p:cNvPr id="6" name="Picture 5" descr="image.png"/>
+          <p:cNvPicPr>
+            <a:picLocks noChangeAspect="1"/>
+          </p:cNvPicPr>
+          <p:nvPr/>
+        </p:nvPicPr>
+        <p:blipFill>
+          <a:blip r:embed="rId2"/>
+          <a:stretch>
+            <a:fillRect/>
+          </a:stretch>
+        </p:blipFill>
+        <p:spPr>
+          <a:xfrm>
+            <a:off x="182880" y="914400"/>
+            <a:ext cx="5669280" cy="5029200"/>
+          </a:xfrm>
+          <a:prstGeom prst="rect">
+            <a:avLst/>
+          </a:prstGeom>
+        </p:spPr>
+      </p:pic>
+      <p:sp>
+        <p:nvSpPr>
+          <p:cNvPr id="7" name="Rectangle 6"/>
+          <p:cNvSpPr/>
+          <p:nvPr/>
+        </p:nvSpPr>
+        <p:spPr>
+          <a:xfrm>
+            <a:off x="6035040" y="960120"/>
+            <a:ext cx="5943600" cy="960120"/>
+          </a:xfrm>
+          <a:prstGeom prst="rect">
+            <a:avLst/>
+          </a:prstGeom>
+          <a:solidFill>
+            <a:srgbClr val="F44336"/>
+          </a:solidFill>
+          <a:ln>
+            <a:noFill/>
+          </a:ln>
+        </p:spPr>
+        <p:style>
+          <a:lnRef idx="1">
+            <a:schemeClr val="accent1"/>
+          </a:lnRef>
+          <a:fillRef idx="3">
+            <a:schemeClr val="accent1"/>
+          </a:fillRef>
+          <a:effectRef idx="2">
+            <a:schemeClr val="accent1"/>
+          </a:effectRef>
+          <a:fontRef idx="minor">
+            <a:schemeClr val="lt1"/>
+          </a:fontRef>
+        </p:style>
+        <p:txBody>
+          <a:bodyPr rtlCol="0" anchor="ctr"/>
+          <a:lstStyle/>
+          <a:p>
+            <a:pPr algn="ctr"/>
+          </a:p>
+        </p:txBody>
+      </p:sp>
+      <p:sp>
+        <p:nvSpPr>
+          <p:cNvPr id="8" name="TextBox 7"/>
+          <p:cNvSpPr txBox="1"/>
+          <p:nvPr/>
+        </p:nvSpPr>
+        <p:spPr>
+          <a:xfrm>
+            <a:off x="6126480" y="996696"/>
+            <a:ext cx="3200400" cy="365760"/>
+          </a:xfrm>
+          <a:prstGeom prst="rect">
+            <a:avLst/>
+          </a:prstGeom>
+          <a:noFill/>
+        </p:spPr>
+        <p:txBody>
+          <a:bodyPr wrap="square"/>
+          <a:lstStyle/>
+          <a:p>
+            <a:pPr algn="l"/>
+            <a:r>
+              <a:rPr sz="1300" b="1" i="0">
+                <a:solidFill>
+                  <a:srgbClr val="FFFFFF"/>
+                </a:solidFill>
+                <a:latin typeface="Calibri"/>
+              </a:rPr>
+              <a:t>CROSS_TABLE</a:t>
+            </a:r>
+          </a:p>
+        </p:txBody>
+      </p:sp>
+      <p:sp>
+        <p:nvSpPr>
+          <p:cNvPr id="9" name="TextBox 8"/>
+          <p:cNvSpPr txBox="1"/>
+          <p:nvPr/>
+        </p:nvSpPr>
+        <p:spPr>
+          <a:xfrm>
+            <a:off x="9784080" y="996696"/>
+            <a:ext cx="1097280" cy="365760"/>
+          </a:xfrm>
+          <a:prstGeom prst="rect">
+            <a:avLst/>
+          </a:prstGeom>
+          <a:noFill/>
+        </p:spPr>
+        <p:txBody>
+          <a:bodyPr wrap="square"/>
+          <a:lstStyle/>
+          <a:p>
+            <a:pPr algn="r"/>
+            <a:r>
+              <a:rPr sz="1400" b="1" i="0">
+                <a:solidFill>
+                  <a:srgbClr val="FFFFFF"/>
+                </a:solidFill>
+                <a:latin typeface="Calibri"/>
+              </a:rPr>
+              <a:t>43.1%</a:t>
+            </a:r>
+          </a:p>
+        </p:txBody>
+      </p:sp>
+      <p:sp>
+        <p:nvSpPr>
+          <p:cNvPr id="10" name="TextBox 9"/>
+          <p:cNvSpPr txBox="1"/>
+          <p:nvPr/>
+        </p:nvSpPr>
+        <p:spPr>
+          <a:xfrm>
+            <a:off x="6126480" y="1399032"/>
+            <a:ext cx="5669280" cy="457200"/>
+          </a:xfrm>
+          <a:prstGeom prst="rect">
+            <a:avLst/>
+          </a:prstGeom>
+          <a:noFill/>
+        </p:spPr>
+        <p:txBody>
+          <a:bodyPr wrap="square"/>
+          <a:lstStyle/>
+          <a:p>
+            <a:pPr algn="l"/>
+            <a:r>
+              <a:rPr sz="1100" b="0" i="0">
+                <a:solidFill>
+                  <a:srgbClr val="FFFFFF"/>
+                </a:solidFill>
+                <a:latin typeface="Calibri"/>
+              </a:rPr>
+              <a:t>Multi-hop joins require code execution</a:t>
+            </a:r>
+          </a:p>
+        </p:txBody>
+      </p:sp>
+      <p:sp>
+        <p:nvSpPr>
+          <p:cNvPr id="11" name="Rectangle 10"/>
+          <p:cNvSpPr/>
+          <p:nvPr/>
+        </p:nvSpPr>
+        <p:spPr>
+          <a:xfrm>
+            <a:off x="6035040" y="2011680"/>
+            <a:ext cx="5943600" cy="960120"/>
+          </a:xfrm>
+          <a:prstGeom prst="rect">
+            <a:avLst/>
+          </a:prstGeom>
+          <a:solidFill>
+            <a:srgbClr val="FF9800"/>
+          </a:solidFill>
+          <a:ln>
+            <a:noFill/>
+          </a:ln>
+        </p:spPr>
+        <p:style>
+          <a:lnRef idx="1">
+            <a:schemeClr val="accent1"/>
+          </a:lnRef>
+          <a:fillRef idx="3">
+            <a:schemeClr val="accent1"/>
+          </a:fillRef>
+          <a:effectRef idx="2">
+            <a:schemeClr val="accent1"/>
+          </a:effectRef>
+          <a:fontRef idx="minor">
+            <a:schemeClr val="lt1"/>
+          </a:fontRef>
+        </p:style>
+        <p:txBody>
+          <a:bodyPr rtlCol="0" anchor="ctr"/>
+          <a:lstStyle/>
+          <a:p>
+            <a:pPr algn="ctr"/>
+          </a:p>
+        </p:txBody>
+      </p:sp>
+      <p:sp>
+        <p:nvSpPr>
+          <p:cNvPr id="12" name="TextBox 11"/>
+          <p:cNvSpPr txBox="1"/>
+          <p:nvPr/>
+        </p:nvSpPr>
+        <p:spPr>
+          <a:xfrm>
+            <a:off x="6126480" y="2048256"/>
+            <a:ext cx="3200400" cy="365760"/>
+          </a:xfrm>
+          <a:prstGeom prst="rect">
+            <a:avLst/>
+          </a:prstGeom>
+          <a:noFill/>
+        </p:spPr>
+        <p:txBody>
+          <a:bodyPr wrap="square"/>
+          <a:lstStyle/>
+          <a:p>
+            <a:pPr algn="l"/>
+            <a:r>
+              <a:rPr sz="1300" b="1" i="0">
+                <a:solidFill>
+                  <a:srgbClr val="FFFFFF"/>
+                </a:solidFill>
+                <a:latin typeface="Calibri"/>
+              </a:rPr>
+              <a:t>MISSING_EDGE</a:t>
+            </a:r>
+          </a:p>
+        </p:txBody>
+      </p:sp>
+      <p:sp>
+        <p:nvSpPr>
+          <p:cNvPr id="13" name="TextBox 12"/>
+          <p:cNvSpPr txBox="1"/>
+          <p:nvPr/>
+        </p:nvSpPr>
+        <p:spPr>
+          <a:xfrm>
+            <a:off x="9784080" y="2048256"/>
+            <a:ext cx="1097280" cy="365760"/>
+          </a:xfrm>
+          <a:prstGeom prst="rect">
+            <a:avLst/>
+          </a:prstGeom>
+          <a:noFill/>
+        </p:spPr>
+        <p:txBody>
+          <a:bodyPr wrap="square"/>
+          <a:lstStyle/>
+          <a:p>
+            <a:pPr algn="r"/>
+            <a:r>
+              <a:rPr sz="1400" b="1" i="0">
+                <a:solidFill>
+                  <a:srgbClr val="FFFFFF"/>
+                </a:solidFill>
+                <a:latin typeface="Calibri"/>
+              </a:rPr>
+              <a:t>22.4%</a:t>
+            </a:r>
+          </a:p>
+        </p:txBody>
+      </p:sp>
+      <p:sp>
+        <p:nvSpPr>
+          <p:cNvPr id="14" name="TextBox 13"/>
+          <p:cNvSpPr txBox="1"/>
+          <p:nvPr/>
+        </p:nvSpPr>
+        <p:spPr>
+          <a:xfrm>
+            <a:off x="6126480" y="2450592"/>
+            <a:ext cx="5669280" cy="457200"/>
+          </a:xfrm>
+          <a:prstGeom prst="rect">
+            <a:avLst/>
+          </a:prstGeom>
+          <a:noFill/>
+        </p:spPr>
+        <p:txBody>
+          <a:bodyPr wrap="square"/>
+          <a:lstStyle/>
+          <a:p>
+            <a:pPr algn="l"/>
+            <a:r>
+              <a:rPr sz="1100" b="0" i="0">
+                <a:solidFill>
+                  <a:srgbClr val="FFFFFF"/>
+                </a:solidFill>
+                <a:latin typeface="Calibri"/>
+              </a:rPr>
+              <a:t>Retriever passes only most-recent obs; gold needs wave avg</a:t>
+            </a:r>
+          </a:p>
+        </p:txBody>
+      </p:sp>
+      <p:sp>
+        <p:nvSpPr>
+          <p:cNvPr id="15" name="Rectangle 14"/>
+          <p:cNvSpPr/>
+          <p:nvPr/>
+        </p:nvSpPr>
+        <p:spPr>
+          <a:xfrm>
+            <a:off x="6035040" y="3063240"/>
+            <a:ext cx="5943600" cy="960120"/>
+          </a:xfrm>
+          <a:prstGeom prst="rect">
+            <a:avLst/>
+          </a:prstGeom>
+          <a:solidFill>
+            <a:srgbClr val="2196F3"/>
+          </a:solidFill>
+          <a:ln>
+            <a:noFill/>
+          </a:ln>
+        </p:spPr>
+        <p:style>
+          <a:lnRef idx="1">
+            <a:schemeClr val="accent1"/>
+          </a:lnRef>
+          <a:fillRef idx="3">
+            <a:schemeClr val="accent1"/>
+          </a:fillRef>
+          <a:effectRef idx="2">
+            <a:schemeClr val="accent1"/>
+          </a:effectRef>
+          <a:fontRef idx="minor">
+            <a:schemeClr val="lt1"/>
+          </a:fontRef>
+        </p:style>
+        <p:txBody>
+          <a:bodyPr rtlCol="0" anchor="ctr"/>
+          <a:lstStyle/>
+          <a:p>
+            <a:pPr algn="ctr"/>
+          </a:p>
+        </p:txBody>
+      </p:sp>
+      <p:sp>
+        <p:nvSpPr>
+          <p:cNvPr id="16" name="TextBox 15"/>
+          <p:cNvSpPr txBox="1"/>
+          <p:nvPr/>
+        </p:nvSpPr>
+        <p:spPr>
+          <a:xfrm>
+            <a:off x="6126480" y="3099816"/>
+            <a:ext cx="3200400" cy="365760"/>
+          </a:xfrm>
+          <a:prstGeom prst="rect">
+            <a:avLst/>
+          </a:prstGeom>
+          <a:noFill/>
+        </p:spPr>
+        <p:txBody>
+          <a:bodyPr wrap="square"/>
+          <a:lstStyle/>
+          <a:p>
+            <a:pPr algn="l"/>
+            <a:r>
+              <a:rPr sz="1300" b="1" i="0">
+                <a:solidFill>
+                  <a:srgbClr val="FFFFFF"/>
+                </a:solidFill>
+                <a:latin typeface="Calibri"/>
+              </a:rPr>
+              <a:t>LLM_FORMAT</a:t>
+            </a:r>
+          </a:p>
+        </p:txBody>
+      </p:sp>
+      <p:sp>
+        <p:nvSpPr>
+          <p:cNvPr id="17" name="TextBox 16"/>
+          <p:cNvSpPr txBox="1"/>
+          <p:nvPr/>
+        </p:nvSpPr>
+        <p:spPr>
+          <a:xfrm>
+            <a:off x="9784080" y="3099816"/>
+            <a:ext cx="1097280" cy="365760"/>
+          </a:xfrm>
+          <a:prstGeom prst="rect">
+            <a:avLst/>
+          </a:prstGeom>
+          <a:noFill/>
+        </p:spPr>
+        <p:txBody>
+          <a:bodyPr wrap="square"/>
+          <a:lstStyle/>
+          <a:p>
+            <a:pPr algn="r"/>
+            <a:r>
+              <a:rPr sz="1400" b="1" i="0">
+                <a:solidFill>
+                  <a:srgbClr val="FFFFFF"/>
+                </a:solidFill>
+                <a:latin typeface="Calibri"/>
+              </a:rPr>
+              <a:t>15.5%</a:t>
+            </a:r>
+          </a:p>
+        </p:txBody>
+      </p:sp>
+      <p:sp>
+        <p:nvSpPr>
+          <p:cNvPr id="18" name="TextBox 17"/>
+          <p:cNvSpPr txBox="1"/>
+          <p:nvPr/>
+        </p:nvSpPr>
+        <p:spPr>
+          <a:xfrm>
+            <a:off x="6126480" y="3502152"/>
+            <a:ext cx="5669280" cy="457200"/>
+          </a:xfrm>
+          <a:prstGeom prst="rect">
+            <a:avLst/>
+          </a:prstGeom>
+          <a:noFill/>
+        </p:spPr>
+        <p:txBody>
+          <a:bodyPr wrap="square"/>
+          <a:lstStyle/>
+          <a:p>
+            <a:pPr algn="l"/>
+            <a:r>
+              <a:rPr sz="1100" b="0" i="0">
+                <a:solidFill>
+                  <a:srgbClr val="FFFFFF"/>
+                </a:solidFill>
+                <a:latin typeface="Calibri"/>
+              </a:rPr>
+              <a:t>Correct data retrieved; wrong answer format</a:t>
+            </a:r>
+          </a:p>
+        </p:txBody>
+      </p:sp>
+      <p:sp>
+        <p:nvSpPr>
+          <p:cNvPr id="19" name="Rectangle 18"/>
+          <p:cNvSpPr/>
+          <p:nvPr/>
+        </p:nvSpPr>
+        <p:spPr>
+          <a:xfrm>
+            <a:off x="6035040" y="4114800"/>
+            <a:ext cx="5943600" cy="960120"/>
+          </a:xfrm>
+          <a:prstGeom prst="rect">
+            <a:avLst/>
+          </a:prstGeom>
+          <a:solidFill>
+            <a:srgbClr val="4CAF50"/>
+          </a:solidFill>
+          <a:ln>
+            <a:noFill/>
+          </a:ln>
+        </p:spPr>
+        <p:style>
+          <a:lnRef idx="1">
+            <a:schemeClr val="accent1"/>
+          </a:lnRef>
+          <a:fillRef idx="3">
+            <a:schemeClr val="accent1"/>
+          </a:fillRef>
+          <a:effectRef idx="2">
+            <a:schemeClr val="accent1"/>
+          </a:effectRef>
+          <a:fontRef idx="minor">
+            <a:schemeClr val="lt1"/>
+          </a:fontRef>
+        </p:style>
+        <p:txBody>
+          <a:bodyPr rtlCol="0" anchor="ctr"/>
+          <a:lstStyle/>
+          <a:p>
+            <a:pPr algn="ctr"/>
+          </a:p>
+        </p:txBody>
+      </p:sp>
+      <p:sp>
+        <p:nvSpPr>
+          <p:cNvPr id="20" name="TextBox 19"/>
+          <p:cNvSpPr txBox="1"/>
+          <p:nvPr/>
+        </p:nvSpPr>
+        <p:spPr>
+          <a:xfrm>
+            <a:off x="6126480" y="4151376"/>
+            <a:ext cx="3200400" cy="365760"/>
+          </a:xfrm>
+          <a:prstGeom prst="rect">
+            <a:avLst/>
+          </a:prstGeom>
+          <a:noFill/>
+        </p:spPr>
+        <p:txBody>
+          <a:bodyPr wrap="square"/>
+          <a:lstStyle/>
+          <a:p>
+            <a:pPr algn="l"/>
+            <a:r>
+              <a:rPr sz="1300" b="1" i="0">
+                <a:solidFill>
+                  <a:srgbClr val="FFFFFF"/>
+                </a:solidFill>
+                <a:latin typeface="Calibri"/>
+              </a:rPr>
+              <a:t>COMPUTATION</a:t>
+            </a:r>
+          </a:p>
+        </p:txBody>
+      </p:sp>
+      <p:sp>
+        <p:nvSpPr>
+          <p:cNvPr id="21" name="TextBox 20"/>
+          <p:cNvSpPr txBox="1"/>
+          <p:nvPr/>
+        </p:nvSpPr>
+        <p:spPr>
+          <a:xfrm>
+            <a:off x="9784080" y="4151376"/>
+            <a:ext cx="1097280" cy="365760"/>
+          </a:xfrm>
+          <a:prstGeom prst="rect">
+            <a:avLst/>
+          </a:prstGeom>
+          <a:noFill/>
+        </p:spPr>
+        <p:txBody>
+          <a:bodyPr wrap="square"/>
+          <a:lstStyle/>
+          <a:p>
+            <a:pPr algn="r"/>
+            <a:r>
+              <a:rPr sz="1400" b="1" i="0">
+                <a:solidFill>
+                  <a:srgbClr val="FFFFFF"/>
+                </a:solidFill>
+                <a:latin typeface="Calibri"/>
+              </a:rPr>
+              <a:t>15.5%</a:t>
+            </a:r>
+          </a:p>
+        </p:txBody>
+      </p:sp>
+      <p:sp>
+        <p:nvSpPr>
+          <p:cNvPr id="22" name="TextBox 21"/>
+          <p:cNvSpPr txBox="1"/>
+          <p:nvPr/>
+        </p:nvSpPr>
+        <p:spPr>
+          <a:xfrm>
+            <a:off x="6126480" y="4553712"/>
+            <a:ext cx="5669280" cy="457200"/>
+          </a:xfrm>
+          <a:prstGeom prst="rect">
+            <a:avLst/>
+          </a:prstGeom>
+          <a:noFill/>
+        </p:spPr>
+        <p:txBody>
+          <a:bodyPr wrap="square"/>
+          <a:lstStyle/>
+          <a:p>
+            <a:pPr algn="l"/>
+            <a:r>
+              <a:rPr sz="1100" b="0" i="0">
+                <a:solidFill>
+                  <a:srgbClr val="FFFFFF"/>
+                </a:solidFill>
+                <a:latin typeface="Calibri"/>
+              </a:rPr>
+              <a:t>LLM cannot count distinct waves from flat context</a:t>
+            </a:r>
+          </a:p>
+        </p:txBody>
+      </p:sp>
+      <p:sp>
+        <p:nvSpPr>
+          <p:cNvPr id="23" name="Rectangle 22"/>
+          <p:cNvSpPr/>
+          <p:nvPr/>
+        </p:nvSpPr>
+        <p:spPr>
+          <a:xfrm>
+            <a:off x="6035040" y="5166360"/>
+            <a:ext cx="5943600" cy="960120"/>
+          </a:xfrm>
+          <a:prstGeom prst="rect">
+            <a:avLst/>
+          </a:prstGeom>
+          <a:solidFill>
+            <a:srgbClr val="9C27B0"/>
+          </a:solidFill>
+          <a:ln>
+            <a:noFill/>
+          </a:ln>
+        </p:spPr>
+        <p:style>
+          <a:lnRef idx="1">
+            <a:schemeClr val="accent1"/>
+          </a:lnRef>
+          <a:fillRef idx="3">
+            <a:schemeClr val="accent1"/>
+          </a:fillRef>
+          <a:effectRef idx="2">
+            <a:schemeClr val="accent1"/>
+          </a:effectRef>
+          <a:fontRef idx="minor">
+            <a:schemeClr val="lt1"/>
+          </a:fontRef>
+        </p:style>
+        <p:txBody>
+          <a:bodyPr rtlCol="0" anchor="ctr"/>
+          <a:lstStyle/>
+          <a:p>
+            <a:pPr algn="ctr"/>
+          </a:p>
+        </p:txBody>
+      </p:sp>
+      <p:sp>
+        <p:nvSpPr>
+          <p:cNvPr id="24" name="TextBox 23"/>
+          <p:cNvSpPr txBox="1"/>
+          <p:nvPr/>
+        </p:nvSpPr>
+        <p:spPr>
+          <a:xfrm>
+            <a:off x="6126480" y="5202936"/>
+            <a:ext cx="3200400" cy="365760"/>
+          </a:xfrm>
+          <a:prstGeom prst="rect">
+            <a:avLst/>
+          </a:prstGeom>
+          <a:noFill/>
+        </p:spPr>
+        <p:txBody>
+          <a:bodyPr wrap="square"/>
+          <a:lstStyle/>
+          <a:p>
+            <a:pPr algn="l"/>
+            <a:r>
+              <a:rPr sz="1300" b="1" i="0">
+                <a:solidFill>
+                  <a:srgbClr val="FFFFFF"/>
+                </a:solidFill>
+                <a:latin typeface="Calibri"/>
+              </a:rPr>
+              <a:t>WRONG_SUBGRAPH</a:t>
+            </a:r>
+          </a:p>
+        </p:txBody>
+      </p:sp>
+      <p:sp>
+        <p:nvSpPr>
+          <p:cNvPr id="25" name="TextBox 24"/>
+          <p:cNvSpPr txBox="1"/>
+          <p:nvPr/>
+        </p:nvSpPr>
+        <p:spPr>
+          <a:xfrm>
+            <a:off x="9784080" y="5202936"/>
+            <a:ext cx="1097280" cy="365760"/>
+          </a:xfrm>
+          <a:prstGeom prst="rect">
+            <a:avLst/>
+          </a:prstGeom>
+          <a:noFill/>
+        </p:spPr>
+        <p:txBody>
+          <a:bodyPr wrap="square"/>
+          <a:lstStyle/>
+          <a:p>
+            <a:pPr algn="r"/>
+            <a:r>
+              <a:rPr sz="1400" b="1" i="0">
+                <a:solidFill>
+                  <a:srgbClr val="FFFFFF"/>
+                </a:solidFill>
+                <a:latin typeface="Calibri"/>
+              </a:rPr>
+              <a:t> 3.4%</a:t>
+            </a:r>
+          </a:p>
+        </p:txBody>
+      </p:sp>
+      <p:sp>
+        <p:nvSpPr>
+          <p:cNvPr id="26" name="TextBox 25"/>
+          <p:cNvSpPr txBox="1"/>
+          <p:nvPr/>
+        </p:nvSpPr>
+        <p:spPr>
+          <a:xfrm>
+            <a:off x="6126480" y="5605272"/>
+            <a:ext cx="5669280" cy="457200"/>
+          </a:xfrm>
+          <a:prstGeom prst="rect">
+            <a:avLst/>
+          </a:prstGeom>
+          <a:noFill/>
+        </p:spPr>
+        <p:txBody>
+          <a:bodyPr wrap="square"/>
+          <a:lstStyle/>
+          <a:p>
+            <a:pPr algn="l"/>
+            <a:r>
+              <a:rPr sz="1100" b="0" i="0">
+                <a:solidFill>
+                  <a:srgbClr val="FFFFFF"/>
+                </a:solidFill>
+                <a:latin typeface="Calibri"/>
+              </a:rPr>
+              <a:t>Empty context returned for wave that has data</a:t>
+            </a:r>
+          </a:p>
+        </p:txBody>
+      </p:sp>
+    </p:spTree>
+  </p:cSld>
+  <p:clrMapOvr>
+    <a:masterClrMapping/>
+  </p:clrMapOvr>
+</p:sld>
+</file>
+
+<file path=ppt/slides/slide17.xml><?xml version="1.0" encoding="utf-8"?>
+<p:sld xmlns:a="http://schemas.openxmlformats.org/drawingml/2006/main" xmlns:p="http://schemas.openxmlformats.org/presentationml/2006/main" xmlns:r="http://schemas.openxmlformats.org/officeDocument/2006/relationships">
+  <p:cSld>
+    <p:bg>
+      <p:bgPr>
+        <a:solidFill>
+          <a:srgbClr val="1A2744"/>
+        </a:solidFill>
+        <a:effectLst/>
+      </p:bgPr>
+    </p:bg>
+    <p:spTree>
+      <p:nvGrpSpPr>
+        <p:cNvPr id="1" name=""/>
+        <p:cNvGrpSpPr/>
+        <p:nvPr/>
+      </p:nvGrpSpPr>
+      <p:grpSpPr/>
+      <p:sp>
+        <p:nvSpPr>
+          <p:cNvPr id="2" name="TextBox 1"/>
+          <p:cNvSpPr txBox="1"/>
+          <p:nvPr/>
+        </p:nvSpPr>
+        <p:spPr>
+          <a:xfrm>
+            <a:off x="6858000" y="91440"/>
+            <a:ext cx="5212080" cy="320040"/>
+          </a:xfrm>
+          <a:prstGeom prst="rect">
+            <a:avLst/>
+          </a:prstGeom>
+          <a:noFill/>
+        </p:spPr>
+        <p:txBody>
+          <a:bodyPr wrap="square"/>
+          <a:lstStyle/>
+          <a:p>
+            <a:pPr algn="r"/>
+            <a:r>
+              <a:rPr sz="1000" b="0" i="0">
+                <a:solidFill>
+                  <a:srgbClr val="2196F3"/>
+                </a:solidFill>
+                <a:latin typeface="Calibri"/>
+              </a:rPr>
+              <a:t>IIIT-Hyderabad · IASNLP · 2026</a:t>
+            </a:r>
+          </a:p>
+        </p:txBody>
+      </p:sp>
+      <p:sp>
+        <p:nvSpPr>
+          <p:cNvPr id="3" name="TextBox 2"/>
+          <p:cNvSpPr txBox="1"/>
+          <p:nvPr/>
+        </p:nvSpPr>
+        <p:spPr>
+          <a:xfrm>
+            <a:off x="10972800" y="6492240"/>
+            <a:ext cx="1097280" cy="274320"/>
+          </a:xfrm>
+          <a:prstGeom prst="rect">
+            <a:avLst/>
+          </a:prstGeom>
+          <a:noFill/>
+        </p:spPr>
+        <p:txBody>
+          <a:bodyPr wrap="square"/>
+          <a:lstStyle/>
+          <a:p>
+            <a:pPr algn="r"/>
+            <a:r>
+              <a:rPr sz="1000" b="0" i="0">
+                <a:solidFill>
+                  <a:srgbClr val="FFFFFF"/>
+                </a:solidFill>
+                <a:latin typeface="Calibri"/>
+              </a:rPr>
+              <a:t>17</a:t>
             </a:r>
           </a:p>
         </p:txBody>
